--- a/BATIKI_COM_IMPORT_EXPORT_LTDA.pptx
+++ b/BATIKI_COM_IMPORT_EXPORT_LTDA.pptx
@@ -162,7 +162,7 @@
                 <c:formatCode>General</c:formatCode>
                 <c:ptCount val="2"/>
                 <c:pt idx="0">
-                  <c:v>122</c:v>
+                  <c:v>0</c:v>
                 </c:pt>
                 <c:pt idx="1">
                   <c:v>65</c:v>
@@ -211,7 +211,7 @@
                 <c:formatCode>General</c:formatCode>
                 <c:ptCount val="2"/>
                 <c:pt idx="0">
-                  <c:v>3</c:v>
+                  <c:v>0</c:v>
                 </c:pt>
                 <c:pt idx="1">
                   <c:v>9</c:v>
@@ -3688,7 +3688,7 @@
         <p:spPr>
           <a:xfrm>
             <a:off x="1005840" y="2240279"/>
-            <a:ext cx="2377439" cy="891540"/>
+            <a:ext cx="2377440" cy="868680"/>
           </a:xfrm>
           <a:prstGeom prst="rect">
             <a:avLst/>
@@ -3722,8 +3722,8 @@
         </p:nvSpPr>
         <p:spPr>
           <a:xfrm>
-            <a:off x="1005840" y="3058668"/>
-            <a:ext cx="2377439" cy="548640"/>
+            <a:off x="1005840" y="3090672"/>
+            <a:ext cx="2377440" cy="411480"/>
           </a:xfrm>
           <a:prstGeom prst="rect">
             <a:avLst/>
@@ -3803,7 +3803,7 @@
         <p:spPr>
           <a:xfrm>
             <a:off x="3931920" y="2240279"/>
-            <a:ext cx="2377439" cy="891540"/>
+            <a:ext cx="2377440" cy="868680"/>
           </a:xfrm>
           <a:prstGeom prst="rect">
             <a:avLst/>
@@ -3837,8 +3837,8 @@
         </p:nvSpPr>
         <p:spPr>
           <a:xfrm>
-            <a:off x="3931920" y="3058668"/>
-            <a:ext cx="2377439" cy="548640"/>
+            <a:off x="3931920" y="3090672"/>
+            <a:ext cx="2377440" cy="411480"/>
           </a:xfrm>
           <a:prstGeom prst="rect">
             <a:avLst/>
@@ -3918,7 +3918,7 @@
         <p:spPr>
           <a:xfrm>
             <a:off x="6858000" y="2240279"/>
-            <a:ext cx="2377439" cy="891540"/>
+            <a:ext cx="2377440" cy="868680"/>
           </a:xfrm>
           <a:prstGeom prst="rect">
             <a:avLst/>
@@ -3952,8 +3952,8 @@
         </p:nvSpPr>
         <p:spPr>
           <a:xfrm>
-            <a:off x="6858000" y="3058668"/>
-            <a:ext cx="2377439" cy="548640"/>
+            <a:off x="6858000" y="3090672"/>
+            <a:ext cx="2377440" cy="411480"/>
           </a:xfrm>
           <a:prstGeom prst="rect">
             <a:avLst/>
@@ -4033,7 +4033,7 @@
         <p:spPr>
           <a:xfrm>
             <a:off x="9784080" y="2240279"/>
-            <a:ext cx="2377439" cy="891540"/>
+            <a:ext cx="2377440" cy="868680"/>
           </a:xfrm>
           <a:prstGeom prst="rect">
             <a:avLst/>
@@ -4067,8 +4067,8 @@
         </p:nvSpPr>
         <p:spPr>
           <a:xfrm>
-            <a:off x="9784080" y="3058668"/>
-            <a:ext cx="2377439" cy="548640"/>
+            <a:off x="9784080" y="3090672"/>
+            <a:ext cx="2377440" cy="411480"/>
           </a:xfrm>
           <a:prstGeom prst="rect">
             <a:avLst/>
@@ -4121,7 +4121,7 @@
               <a:tr h="475488">
                 <a:tc>
                   <a:txBody>
-                    <a:bodyPr wrap="square"/>
+                    <a:bodyPr/>
                     <a:lstStyle/>
                     <a:p>
                       <a:pPr algn="ctr"/>
@@ -4144,7 +4144,7 @@
                 </a:tc>
                 <a:tc>
                   <a:txBody>
-                    <a:bodyPr wrap="square"/>
+                    <a:bodyPr/>
                     <a:lstStyle/>
                     <a:p>
                       <a:pPr algn="ctr"/>
@@ -4167,7 +4167,7 @@
                 </a:tc>
                 <a:tc>
                   <a:txBody>
-                    <a:bodyPr wrap="square"/>
+                    <a:bodyPr/>
                     <a:lstStyle/>
                     <a:p>
                       <a:pPr algn="ctr"/>
@@ -4190,7 +4190,7 @@
                 </a:tc>
                 <a:tc>
                   <a:txBody>
-                    <a:bodyPr wrap="square"/>
+                    <a:bodyPr/>
                     <a:lstStyle/>
                     <a:p>
                       <a:pPr algn="ctr"/>
@@ -4215,18 +4215,18 @@
               <a:tr h="475488">
                 <a:tc>
                   <a:txBody>
-                    <a:bodyPr wrap="square"/>
-                    <a:lstStyle/>
-                    <a:p>
-                      <a:pPr algn="l"/>
-                      <a:r>
-                        <a:rPr sz="1000" b="0">
-                          <a:solidFill>
-                            <a:srgbClr val="1D1B43"/>
-                          </a:solidFill>
-                          <a:latin typeface="Calibri"/>
-                        </a:rPr>
-                        <a:t>Total Entregas</a:t>
+                    <a:bodyPr/>
+                    <a:lstStyle/>
+                    <a:p>
+                      <a:pPr algn="l"/>
+                      <a:r>
+                        <a:rPr sz="1000" b="0">
+                          <a:solidFill>
+                            <a:srgbClr val="1D1B43"/>
+                          </a:solidFill>
+                          <a:latin typeface="Calibri"/>
+                        </a:rPr>
+                        <a:t>Total</a:t>
                       </a:r>
                     </a:p>
                   </a:txBody>
@@ -4238,18 +4238,18 @@
                 </a:tc>
                 <a:tc>
                   <a:txBody>
-                    <a:bodyPr wrap="square"/>
-                    <a:lstStyle/>
-                    <a:p>
-                      <a:pPr algn="l"/>
-                      <a:r>
-                        <a:rPr sz="1000" b="0">
-                          <a:solidFill>
-                            <a:srgbClr val="1D1B43"/>
-                          </a:solidFill>
-                          <a:latin typeface="Calibri"/>
-                        </a:rPr>
-                        <a:t>125</a:t>
+                    <a:bodyPr/>
+                    <a:lstStyle/>
+                    <a:p>
+                      <a:pPr algn="l"/>
+                      <a:r>
+                        <a:rPr sz="1000" b="0">
+                          <a:solidFill>
+                            <a:srgbClr val="1D1B43"/>
+                          </a:solidFill>
+                          <a:latin typeface="Calibri"/>
+                        </a:rPr>
+                        <a:t>0</a:t>
                       </a:r>
                     </a:p>
                   </a:txBody>
@@ -4261,7 +4261,7 @@
                 </a:tc>
                 <a:tc>
                   <a:txBody>
-                    <a:bodyPr wrap="square"/>
+                    <a:bodyPr/>
                     <a:lstStyle/>
                     <a:p>
                       <a:pPr algn="l"/>
@@ -4284,18 +4284,18 @@
                 </a:tc>
                 <a:tc>
                   <a:txBody>
-                    <a:bodyPr wrap="square"/>
-                    <a:lstStyle/>
-                    <a:p>
-                      <a:pPr algn="l"/>
-                      <a:r>
-                        <a:rPr sz="1000" b="0">
-                          <a:solidFill>
-                            <a:srgbClr val="1D1B43"/>
-                          </a:solidFill>
-                          <a:latin typeface="Calibri"/>
-                        </a:rPr>
-                        <a:t>- 51</a:t>
+                    <a:bodyPr/>
+                    <a:lstStyle/>
+                    <a:p>
+                      <a:pPr algn="l"/>
+                      <a:r>
+                        <a:rPr sz="1000" b="0">
+                          <a:solidFill>
+                            <a:srgbClr val="1D1B43"/>
+                          </a:solidFill>
+                          <a:latin typeface="Calibri"/>
+                        </a:rPr>
+                        <a:t>+ 74</a:t>
                       </a:r>
                     </a:p>
                   </a:txBody>
@@ -4309,7 +4309,7 @@
               <a:tr h="475488">
                 <a:tc>
                   <a:txBody>
-                    <a:bodyPr wrap="square"/>
+                    <a:bodyPr/>
                     <a:lstStyle/>
                     <a:p>
                       <a:pPr algn="l"/>
@@ -4332,18 +4332,18 @@
                 </a:tc>
                 <a:tc>
                   <a:txBody>
-                    <a:bodyPr wrap="square"/>
-                    <a:lstStyle/>
-                    <a:p>
-                      <a:pPr algn="l"/>
-                      <a:r>
-                        <a:rPr sz="1000" b="0">
-                          <a:solidFill>
-                            <a:srgbClr val="1D1B43"/>
-                          </a:solidFill>
-                          <a:latin typeface="Calibri"/>
-                        </a:rPr>
-                        <a:t>122</a:t>
+                    <a:bodyPr/>
+                    <a:lstStyle/>
+                    <a:p>
+                      <a:pPr algn="l"/>
+                      <a:r>
+                        <a:rPr sz="1000" b="0">
+                          <a:solidFill>
+                            <a:srgbClr val="1D1B43"/>
+                          </a:solidFill>
+                          <a:latin typeface="Calibri"/>
+                        </a:rPr>
+                        <a:t>0</a:t>
                       </a:r>
                     </a:p>
                   </a:txBody>
@@ -4355,7 +4355,7 @@
                 </a:tc>
                 <a:tc>
                   <a:txBody>
-                    <a:bodyPr wrap="square"/>
+                    <a:bodyPr/>
                     <a:lstStyle/>
                     <a:p>
                       <a:pPr algn="l"/>
@@ -4378,18 +4378,18 @@
                 </a:tc>
                 <a:tc>
                   <a:txBody>
-                    <a:bodyPr wrap="square"/>
-                    <a:lstStyle/>
-                    <a:p>
-                      <a:pPr algn="l"/>
-                      <a:r>
-                        <a:rPr sz="1000" b="0">
-                          <a:solidFill>
-                            <a:srgbClr val="1D1B43"/>
-                          </a:solidFill>
-                          <a:latin typeface="Calibri"/>
-                        </a:rPr>
-                        <a:t>- 57</a:t>
+                    <a:bodyPr/>
+                    <a:lstStyle/>
+                    <a:p>
+                      <a:pPr algn="l"/>
+                      <a:r>
+                        <a:rPr sz="1000" b="0">
+                          <a:solidFill>
+                            <a:srgbClr val="1D1B43"/>
+                          </a:solidFill>
+                          <a:latin typeface="Calibri"/>
+                        </a:rPr>
+                        <a:t>+ 65</a:t>
                       </a:r>
                     </a:p>
                   </a:txBody>
@@ -4403,18 +4403,18 @@
               <a:tr h="475488">
                 <a:tc>
                   <a:txBody>
-                    <a:bodyPr wrap="square"/>
-                    <a:lstStyle/>
-                    <a:p>
-                      <a:pPr algn="l"/>
-                      <a:r>
-                        <a:rPr sz="1000" b="0">
-                          <a:solidFill>
-                            <a:srgbClr val="1D1B43"/>
-                          </a:solidFill>
-                          <a:latin typeface="Calibri"/>
-                        </a:rPr>
-                        <a:t>Fora do Prazo</a:t>
+                    <a:bodyPr/>
+                    <a:lstStyle/>
+                    <a:p>
+                      <a:pPr algn="l"/>
+                      <a:r>
+                        <a:rPr sz="1000" b="0">
+                          <a:solidFill>
+                            <a:srgbClr val="1D1B43"/>
+                          </a:solidFill>
+                          <a:latin typeface="Calibri"/>
+                        </a:rPr>
+                        <a:t>Fora Prazo</a:t>
                       </a:r>
                     </a:p>
                   </a:txBody>
@@ -4426,18 +4426,18 @@
                 </a:tc>
                 <a:tc>
                   <a:txBody>
-                    <a:bodyPr wrap="square"/>
-                    <a:lstStyle/>
-                    <a:p>
-                      <a:pPr algn="l"/>
-                      <a:r>
-                        <a:rPr sz="1000" b="0">
-                          <a:solidFill>
-                            <a:srgbClr val="1D1B43"/>
-                          </a:solidFill>
-                          <a:latin typeface="Calibri"/>
-                        </a:rPr>
-                        <a:t>3</a:t>
+                    <a:bodyPr/>
+                    <a:lstStyle/>
+                    <a:p>
+                      <a:pPr algn="l"/>
+                      <a:r>
+                        <a:rPr sz="1000" b="0">
+                          <a:solidFill>
+                            <a:srgbClr val="1D1B43"/>
+                          </a:solidFill>
+                          <a:latin typeface="Calibri"/>
+                        </a:rPr>
+                        <a:t>0</a:t>
                       </a:r>
                     </a:p>
                   </a:txBody>
@@ -4449,7 +4449,7 @@
                 </a:tc>
                 <a:tc>
                   <a:txBody>
-                    <a:bodyPr wrap="square"/>
+                    <a:bodyPr/>
                     <a:lstStyle/>
                     <a:p>
                       <a:pPr algn="l"/>
@@ -4472,18 +4472,18 @@
                 </a:tc>
                 <a:tc>
                   <a:txBody>
-                    <a:bodyPr wrap="square"/>
-                    <a:lstStyle/>
-                    <a:p>
-                      <a:pPr algn="l"/>
-                      <a:r>
-                        <a:rPr sz="1000" b="0">
-                          <a:solidFill>
-                            <a:srgbClr val="1D1B43"/>
-                          </a:solidFill>
-                          <a:latin typeface="Calibri"/>
-                        </a:rPr>
-                        <a:t>+ 6</a:t>
+                    <a:bodyPr/>
+                    <a:lstStyle/>
+                    <a:p>
+                      <a:pPr algn="l"/>
+                      <a:r>
+                        <a:rPr sz="1000" b="0">
+                          <a:solidFill>
+                            <a:srgbClr val="1D1B43"/>
+                          </a:solidFill>
+                          <a:latin typeface="Calibri"/>
+                        </a:rPr>
+                        <a:t>+ 9</a:t>
                       </a:r>
                     </a:p>
                   </a:txBody>
@@ -4497,7 +4497,7 @@
               <a:tr h="475488">
                 <a:tc>
                   <a:txBody>
-                    <a:bodyPr wrap="square"/>
+                    <a:bodyPr/>
                     <a:lstStyle/>
                     <a:p>
                       <a:pPr algn="l"/>
@@ -4520,18 +4520,18 @@
                 </a:tc>
                 <a:tc>
                   <a:txBody>
-                    <a:bodyPr wrap="square"/>
-                    <a:lstStyle/>
-                    <a:p>
-                      <a:pPr algn="l"/>
-                      <a:r>
-                        <a:rPr sz="1000" b="0">
-                          <a:solidFill>
-                            <a:srgbClr val="1D1B43"/>
-                          </a:solidFill>
-                          <a:latin typeface="Calibri"/>
-                        </a:rPr>
-                        <a:t>97.6%</a:t>
+                    <a:bodyPr/>
+                    <a:lstStyle/>
+                    <a:p>
+                      <a:pPr algn="l"/>
+                      <a:r>
+                        <a:rPr sz="1000" b="0">
+                          <a:solidFill>
+                            <a:srgbClr val="1D1B43"/>
+                          </a:solidFill>
+                          <a:latin typeface="Calibri"/>
+                        </a:rPr>
+                        <a:t>87.8%</a:t>
                       </a:r>
                     </a:p>
                   </a:txBody>
@@ -4543,7 +4543,7 @@
                 </a:tc>
                 <a:tc>
                   <a:txBody>
-                    <a:bodyPr wrap="square"/>
+                    <a:bodyPr/>
                     <a:lstStyle/>
                     <a:p>
                       <a:pPr algn="l"/>
@@ -4566,18 +4566,18 @@
                 </a:tc>
                 <a:tc>
                   <a:txBody>
-                    <a:bodyPr wrap="square"/>
-                    <a:lstStyle/>
-                    <a:p>
-                      <a:pPr algn="l"/>
-                      <a:r>
-                        <a:rPr sz="1000" b="0">
-                          <a:solidFill>
-                            <a:srgbClr val="1D1B43"/>
-                          </a:solidFill>
-                          <a:latin typeface="Calibri"/>
-                        </a:rPr>
-                        <a:t>- 9.8pp</a:t>
+                    <a:bodyPr/>
+                    <a:lstStyle/>
+                    <a:p>
+                      <a:pPr algn="l"/>
+                      <a:r>
+                        <a:rPr sz="1000" b="0">
+                          <a:solidFill>
+                            <a:srgbClr val="1D1B43"/>
+                          </a:solidFill>
+                          <a:latin typeface="Calibri"/>
+                        </a:rPr>
+                        <a:t>+ 0.0pp</a:t>
                       </a:r>
                     </a:p>
                   </a:txBody>
@@ -4766,7 +4766,7 @@
               <a:tr h="438912">
                 <a:tc>
                   <a:txBody>
-                    <a:bodyPr wrap="square"/>
+                    <a:bodyPr/>
                     <a:lstStyle/>
                     <a:p>
                       <a:pPr algn="ctr"/>
@@ -4789,7 +4789,7 @@
                 </a:tc>
                 <a:tc>
                   <a:txBody>
-                    <a:bodyPr wrap="square"/>
+                    <a:bodyPr/>
                     <a:lstStyle/>
                     <a:p>
                       <a:pPr algn="ctr"/>
@@ -4812,7 +4812,7 @@
                 </a:tc>
                 <a:tc>
                   <a:txBody>
-                    <a:bodyPr wrap="square"/>
+                    <a:bodyPr/>
                     <a:lstStyle/>
                     <a:p>
                       <a:pPr algn="ctr"/>
@@ -4835,7 +4835,7 @@
                 </a:tc>
                 <a:tc>
                   <a:txBody>
-                    <a:bodyPr wrap="square"/>
+                    <a:bodyPr/>
                     <a:lstStyle/>
                     <a:p>
                       <a:pPr algn="ctr"/>
@@ -4858,7 +4858,7 @@
                 </a:tc>
                 <a:tc>
                   <a:txBody>
-                    <a:bodyPr wrap="square"/>
+                    <a:bodyPr/>
                     <a:lstStyle/>
                     <a:p>
                       <a:pPr algn="ctr"/>
@@ -4883,7 +4883,7 @@
               <a:tr h="438912">
                 <a:tc>
                   <a:txBody>
-                    <a:bodyPr wrap="square"/>
+                    <a:bodyPr/>
                     <a:lstStyle/>
                     <a:p>
                       <a:pPr algn="l"/>
@@ -4906,18 +4906,18 @@
                 </a:tc>
                 <a:tc>
                   <a:txBody>
-                    <a:bodyPr wrap="square"/>
-                    <a:lstStyle/>
-                    <a:p>
-                      <a:pPr algn="l"/>
-                      <a:r>
-                        <a:rPr sz="1000" b="0">
-                          <a:solidFill>
-                            <a:srgbClr val="1D1B43"/>
-                          </a:solidFill>
-                          <a:latin typeface="Calibri"/>
-                        </a:rPr>
-                        <a:t>125</a:t>
+                    <a:bodyPr/>
+                    <a:lstStyle/>
+                    <a:p>
+                      <a:pPr algn="l"/>
+                      <a:r>
+                        <a:rPr sz="1000" b="0">
+                          <a:solidFill>
+                            <a:srgbClr val="1D1B43"/>
+                          </a:solidFill>
+                          <a:latin typeface="Calibri"/>
+                        </a:rPr>
+                        <a:t>0</a:t>
                       </a:r>
                     </a:p>
                   </a:txBody>
@@ -4929,18 +4929,18 @@
                 </a:tc>
                 <a:tc>
                   <a:txBody>
-                    <a:bodyPr wrap="square"/>
-                    <a:lstStyle/>
-                    <a:p>
-                      <a:pPr algn="l"/>
-                      <a:r>
-                        <a:rPr sz="1000" b="0">
-                          <a:solidFill>
-                            <a:srgbClr val="1D1B43"/>
-                          </a:solidFill>
-                          <a:latin typeface="Calibri"/>
-                        </a:rPr>
-                        <a:t>122</a:t>
+                    <a:bodyPr/>
+                    <a:lstStyle/>
+                    <a:p>
+                      <a:pPr algn="l"/>
+                      <a:r>
+                        <a:rPr sz="1000" b="0">
+                          <a:solidFill>
+                            <a:srgbClr val="1D1B43"/>
+                          </a:solidFill>
+                          <a:latin typeface="Calibri"/>
+                        </a:rPr>
+                        <a:t>0</a:t>
                       </a:r>
                     </a:p>
                   </a:txBody>
@@ -4952,18 +4952,18 @@
                 </a:tc>
                 <a:tc>
                   <a:txBody>
-                    <a:bodyPr wrap="square"/>
-                    <a:lstStyle/>
-                    <a:p>
-                      <a:pPr algn="l"/>
-                      <a:r>
-                        <a:rPr sz="1000" b="0">
-                          <a:solidFill>
-                            <a:srgbClr val="1D1B43"/>
-                          </a:solidFill>
-                          <a:latin typeface="Calibri"/>
-                        </a:rPr>
-                        <a:t>3</a:t>
+                    <a:bodyPr/>
+                    <a:lstStyle/>
+                    <a:p>
+                      <a:pPr algn="l"/>
+                      <a:r>
+                        <a:rPr sz="1000" b="0">
+                          <a:solidFill>
+                            <a:srgbClr val="1D1B43"/>
+                          </a:solidFill>
+                          <a:latin typeface="Calibri"/>
+                        </a:rPr>
+                        <a:t>0</a:t>
                       </a:r>
                     </a:p>
                   </a:txBody>
@@ -4975,18 +4975,18 @@
                 </a:tc>
                 <a:tc>
                   <a:txBody>
-                    <a:bodyPr wrap="square"/>
-                    <a:lstStyle/>
-                    <a:p>
-                      <a:pPr algn="l"/>
-                      <a:r>
-                        <a:rPr sz="1000" b="0">
-                          <a:solidFill>
-                            <a:srgbClr val="1D1B43"/>
-                          </a:solidFill>
-                          <a:latin typeface="Calibri"/>
-                        </a:rPr>
-                        <a:t>97.6%</a:t>
+                    <a:bodyPr/>
+                    <a:lstStyle/>
+                    <a:p>
+                      <a:pPr algn="l"/>
+                      <a:r>
+                        <a:rPr sz="1000" b="0">
+                          <a:solidFill>
+                            <a:srgbClr val="1D1B43"/>
+                          </a:solidFill>
+                          <a:latin typeface="Calibri"/>
+                        </a:rPr>
+                        <a:t>87.8%</a:t>
                       </a:r>
                     </a:p>
                   </a:txBody>
@@ -5000,7 +5000,7 @@
               <a:tr h="438912">
                 <a:tc>
                   <a:txBody>
-                    <a:bodyPr wrap="square"/>
+                    <a:bodyPr/>
                     <a:lstStyle/>
                     <a:p>
                       <a:pPr algn="l"/>
@@ -5023,7 +5023,7 @@
                 </a:tc>
                 <a:tc>
                   <a:txBody>
-                    <a:bodyPr wrap="square"/>
+                    <a:bodyPr/>
                     <a:lstStyle/>
                     <a:p>
                       <a:pPr algn="l"/>
@@ -5046,7 +5046,7 @@
                 </a:tc>
                 <a:tc>
                   <a:txBody>
-                    <a:bodyPr wrap="square"/>
+                    <a:bodyPr/>
                     <a:lstStyle/>
                     <a:p>
                       <a:pPr algn="l"/>
@@ -5069,7 +5069,7 @@
                 </a:tc>
                 <a:tc>
                   <a:txBody>
-                    <a:bodyPr wrap="square"/>
+                    <a:bodyPr/>
                     <a:lstStyle/>
                     <a:p>
                       <a:pPr algn="l"/>
@@ -5092,7 +5092,7 @@
                 </a:tc>
                 <a:tc>
                   <a:txBody>
-                    <a:bodyPr wrap="square"/>
+                    <a:bodyPr/>
                     <a:lstStyle/>
                     <a:p>
                       <a:pPr algn="l"/>
@@ -5352,7 +5352,7 @@
               <a:tr h="384048">
                 <a:tc>
                   <a:txBody>
-                    <a:bodyPr wrap="square"/>
+                    <a:bodyPr/>
                     <a:lstStyle/>
                     <a:p>
                       <a:pPr algn="ctr"/>
@@ -5375,7 +5375,7 @@
                 </a:tc>
                 <a:tc>
                   <a:txBody>
-                    <a:bodyPr wrap="square"/>
+                    <a:bodyPr/>
                     <a:lstStyle/>
                     <a:p>
                       <a:pPr algn="ctr"/>
@@ -5398,7 +5398,7 @@
                 </a:tc>
                 <a:tc>
                   <a:txBody>
-                    <a:bodyPr wrap="square"/>
+                    <a:bodyPr/>
                     <a:lstStyle/>
                     <a:p>
                       <a:pPr algn="ctr"/>
@@ -5421,7 +5421,7 @@
                 </a:tc>
                 <a:tc>
                   <a:txBody>
-                    <a:bodyPr wrap="square"/>
+                    <a:bodyPr/>
                     <a:lstStyle/>
                     <a:p>
                       <a:pPr algn="ctr"/>
@@ -5444,7 +5444,7 @@
                 </a:tc>
                 <a:tc>
                   <a:txBody>
-                    <a:bodyPr wrap="square"/>
+                    <a:bodyPr/>
                     <a:lstStyle/>
                     <a:p>
                       <a:pPr algn="ctr"/>
@@ -5469,7 +5469,7 @@
               <a:tr h="384048">
                 <a:tc>
                   <a:txBody>
-                    <a:bodyPr wrap="square"/>
+                    <a:bodyPr/>
                     <a:lstStyle/>
                     <a:p>
                       <a:pPr algn="l"/>
@@ -5492,7 +5492,7 @@
                 </a:tc>
                 <a:tc>
                   <a:txBody>
-                    <a:bodyPr wrap="square"/>
+                    <a:bodyPr/>
                     <a:lstStyle/>
                     <a:p>
                       <a:pPr algn="l"/>
@@ -5515,7 +5515,7 @@
                 </a:tc>
                 <a:tc>
                   <a:txBody>
-                    <a:bodyPr wrap="square"/>
+                    <a:bodyPr/>
                     <a:lstStyle/>
                     <a:p>
                       <a:pPr algn="l"/>
@@ -5538,7 +5538,7 @@
                 </a:tc>
                 <a:tc>
                   <a:txBody>
-                    <a:bodyPr wrap="square"/>
+                    <a:bodyPr/>
                     <a:lstStyle/>
                     <a:p>
                       <a:pPr algn="l"/>
@@ -5561,7 +5561,7 @@
                 </a:tc>
                 <a:tc>
                   <a:txBody>
-                    <a:bodyPr wrap="square"/>
+                    <a:bodyPr/>
                     <a:lstStyle/>
                     <a:p>
                       <a:pPr algn="l"/>
@@ -5586,7 +5586,7 @@
               <a:tr h="384048">
                 <a:tc>
                   <a:txBody>
-                    <a:bodyPr wrap="square"/>
+                    <a:bodyPr/>
                     <a:lstStyle/>
                     <a:p>
                       <a:pPr algn="l"/>
@@ -5609,7 +5609,7 @@
                 </a:tc>
                 <a:tc>
                   <a:txBody>
-                    <a:bodyPr wrap="square"/>
+                    <a:bodyPr/>
                     <a:lstStyle/>
                     <a:p>
                       <a:pPr algn="l"/>
@@ -5632,7 +5632,7 @@
                 </a:tc>
                 <a:tc>
                   <a:txBody>
-                    <a:bodyPr wrap="square"/>
+                    <a:bodyPr/>
                     <a:lstStyle/>
                     <a:p>
                       <a:pPr algn="l"/>
@@ -5655,7 +5655,7 @@
                 </a:tc>
                 <a:tc>
                   <a:txBody>
-                    <a:bodyPr wrap="square"/>
+                    <a:bodyPr/>
                     <a:lstStyle/>
                     <a:p>
                       <a:pPr algn="l"/>
@@ -5678,7 +5678,7 @@
                 </a:tc>
                 <a:tc>
                   <a:txBody>
-                    <a:bodyPr wrap="square"/>
+                    <a:bodyPr/>
                     <a:lstStyle/>
                     <a:p>
                       <a:pPr algn="l"/>
@@ -5703,7 +5703,7 @@
               <a:tr h="384048">
                 <a:tc>
                   <a:txBody>
-                    <a:bodyPr wrap="square"/>
+                    <a:bodyPr/>
                     <a:lstStyle/>
                     <a:p>
                       <a:pPr algn="l"/>
@@ -5726,7 +5726,7 @@
                 </a:tc>
                 <a:tc>
                   <a:txBody>
-                    <a:bodyPr wrap="square"/>
+                    <a:bodyPr/>
                     <a:lstStyle/>
                     <a:p>
                       <a:pPr algn="l"/>
@@ -5749,7 +5749,7 @@
                 </a:tc>
                 <a:tc>
                   <a:txBody>
-                    <a:bodyPr wrap="square"/>
+                    <a:bodyPr/>
                     <a:lstStyle/>
                     <a:p>
                       <a:pPr algn="l"/>
@@ -5772,7 +5772,7 @@
                 </a:tc>
                 <a:tc>
                   <a:txBody>
-                    <a:bodyPr wrap="square"/>
+                    <a:bodyPr/>
                     <a:lstStyle/>
                     <a:p>
                       <a:pPr algn="l"/>
@@ -5795,7 +5795,7 @@
                 </a:tc>
                 <a:tc>
                   <a:txBody>
-                    <a:bodyPr wrap="square"/>
+                    <a:bodyPr/>
                     <a:lstStyle/>
                     <a:p>
                       <a:pPr algn="l"/>
@@ -5820,7 +5820,7 @@
               <a:tr h="384048">
                 <a:tc>
                   <a:txBody>
-                    <a:bodyPr wrap="square"/>
+                    <a:bodyPr/>
                     <a:lstStyle/>
                     <a:p>
                       <a:pPr algn="l"/>
@@ -5843,7 +5843,7 @@
                 </a:tc>
                 <a:tc>
                   <a:txBody>
-                    <a:bodyPr wrap="square"/>
+                    <a:bodyPr/>
                     <a:lstStyle/>
                     <a:p>
                       <a:pPr algn="l"/>
@@ -5866,7 +5866,7 @@
                 </a:tc>
                 <a:tc>
                   <a:txBody>
-                    <a:bodyPr wrap="square"/>
+                    <a:bodyPr/>
                     <a:lstStyle/>
                     <a:p>
                       <a:pPr algn="l"/>
@@ -5889,7 +5889,7 @@
                 </a:tc>
                 <a:tc>
                   <a:txBody>
-                    <a:bodyPr wrap="square"/>
+                    <a:bodyPr/>
                     <a:lstStyle/>
                     <a:p>
                       <a:pPr algn="l"/>
@@ -5912,7 +5912,7 @@
                 </a:tc>
                 <a:tc>
                   <a:txBody>
-                    <a:bodyPr wrap="square"/>
+                    <a:bodyPr/>
                     <a:lstStyle/>
                     <a:p>
                       <a:pPr algn="l"/>
@@ -5937,7 +5937,7 @@
               <a:tr h="384048">
                 <a:tc>
                   <a:txBody>
-                    <a:bodyPr wrap="square"/>
+                    <a:bodyPr/>
                     <a:lstStyle/>
                     <a:p>
                       <a:pPr algn="l"/>
@@ -5960,7 +5960,7 @@
                 </a:tc>
                 <a:tc>
                   <a:txBody>
-                    <a:bodyPr wrap="square"/>
+                    <a:bodyPr/>
                     <a:lstStyle/>
                     <a:p>
                       <a:pPr algn="l"/>
@@ -5983,7 +5983,7 @@
                 </a:tc>
                 <a:tc>
                   <a:txBody>
-                    <a:bodyPr wrap="square"/>
+                    <a:bodyPr/>
                     <a:lstStyle/>
                     <a:p>
                       <a:pPr algn="l"/>
@@ -6006,7 +6006,7 @@
                 </a:tc>
                 <a:tc>
                   <a:txBody>
-                    <a:bodyPr wrap="square"/>
+                    <a:bodyPr/>
                     <a:lstStyle/>
                     <a:p>
                       <a:pPr algn="l"/>
@@ -6029,7 +6029,7 @@
                 </a:tc>
                 <a:tc>
                   <a:txBody>
-                    <a:bodyPr wrap="square"/>
+                    <a:bodyPr/>
                     <a:lstStyle/>
                     <a:p>
                       <a:pPr algn="l"/>
@@ -6054,7 +6054,7 @@
               <a:tr h="384048">
                 <a:tc>
                   <a:txBody>
-                    <a:bodyPr wrap="square"/>
+                    <a:bodyPr/>
                     <a:lstStyle/>
                     <a:p>
                       <a:pPr algn="l"/>
@@ -6077,7 +6077,7 @@
                 </a:tc>
                 <a:tc>
                   <a:txBody>
-                    <a:bodyPr wrap="square"/>
+                    <a:bodyPr/>
                     <a:lstStyle/>
                     <a:p>
                       <a:pPr algn="l"/>
@@ -6100,7 +6100,7 @@
                 </a:tc>
                 <a:tc>
                   <a:txBody>
-                    <a:bodyPr wrap="square"/>
+                    <a:bodyPr/>
                     <a:lstStyle/>
                     <a:p>
                       <a:pPr algn="l"/>
@@ -6123,7 +6123,7 @@
                 </a:tc>
                 <a:tc>
                   <a:txBody>
-                    <a:bodyPr wrap="square"/>
+                    <a:bodyPr/>
                     <a:lstStyle/>
                     <a:p>
                       <a:pPr algn="l"/>
@@ -6146,7 +6146,7 @@
                 </a:tc>
                 <a:tc>
                   <a:txBody>
-                    <a:bodyPr wrap="square"/>
+                    <a:bodyPr/>
                     <a:lstStyle/>
                     <a:p>
                       <a:pPr algn="l"/>
@@ -6171,7 +6171,7 @@
               <a:tr h="384048">
                 <a:tc>
                   <a:txBody>
-                    <a:bodyPr wrap="square"/>
+                    <a:bodyPr/>
                     <a:lstStyle/>
                     <a:p>
                       <a:pPr algn="l"/>
@@ -6194,7 +6194,7 @@
                 </a:tc>
                 <a:tc>
                   <a:txBody>
-                    <a:bodyPr wrap="square"/>
+                    <a:bodyPr/>
                     <a:lstStyle/>
                     <a:p>
                       <a:pPr algn="l"/>
@@ -6217,7 +6217,7 @@
                 </a:tc>
                 <a:tc>
                   <a:txBody>
-                    <a:bodyPr wrap="square"/>
+                    <a:bodyPr/>
                     <a:lstStyle/>
                     <a:p>
                       <a:pPr algn="l"/>
@@ -6240,7 +6240,7 @@
                 </a:tc>
                 <a:tc>
                   <a:txBody>
-                    <a:bodyPr wrap="square"/>
+                    <a:bodyPr/>
                     <a:lstStyle/>
                     <a:p>
                       <a:pPr algn="l"/>
@@ -6263,7 +6263,7 @@
                 </a:tc>
                 <a:tc>
                   <a:txBody>
-                    <a:bodyPr wrap="square"/>
+                    <a:bodyPr/>
                     <a:lstStyle/>
                     <a:p>
                       <a:pPr algn="l"/>
@@ -6288,7 +6288,7 @@
               <a:tr h="384048">
                 <a:tc>
                   <a:txBody>
-                    <a:bodyPr wrap="square"/>
+                    <a:bodyPr/>
                     <a:lstStyle/>
                     <a:p>
                       <a:pPr algn="l"/>
@@ -6311,7 +6311,7 @@
                 </a:tc>
                 <a:tc>
                   <a:txBody>
-                    <a:bodyPr wrap="square"/>
+                    <a:bodyPr/>
                     <a:lstStyle/>
                     <a:p>
                       <a:pPr algn="l"/>
@@ -6334,7 +6334,7 @@
                 </a:tc>
                 <a:tc>
                   <a:txBody>
-                    <a:bodyPr wrap="square"/>
+                    <a:bodyPr/>
                     <a:lstStyle/>
                     <a:p>
                       <a:pPr algn="l"/>
@@ -6357,7 +6357,7 @@
                 </a:tc>
                 <a:tc>
                   <a:txBody>
-                    <a:bodyPr wrap="square"/>
+                    <a:bodyPr/>
                     <a:lstStyle/>
                     <a:p>
                       <a:pPr algn="l"/>
@@ -6380,7 +6380,7 @@
                 </a:tc>
                 <a:tc>
                   <a:txBody>
-                    <a:bodyPr wrap="square"/>
+                    <a:bodyPr/>
                     <a:lstStyle/>
                     <a:p>
                       <a:pPr algn="l"/>
@@ -6405,7 +6405,7 @@
               <a:tr h="384048">
                 <a:tc>
                   <a:txBody>
-                    <a:bodyPr wrap="square"/>
+                    <a:bodyPr/>
                     <a:lstStyle/>
                     <a:p>
                       <a:pPr algn="l"/>
@@ -6428,7 +6428,7 @@
                 </a:tc>
                 <a:tc>
                   <a:txBody>
-                    <a:bodyPr wrap="square"/>
+                    <a:bodyPr/>
                     <a:lstStyle/>
                     <a:p>
                       <a:pPr algn="l"/>
@@ -6451,7 +6451,7 @@
                 </a:tc>
                 <a:tc>
                   <a:txBody>
-                    <a:bodyPr wrap="square"/>
+                    <a:bodyPr/>
                     <a:lstStyle/>
                     <a:p>
                       <a:pPr algn="l"/>
@@ -6474,7 +6474,7 @@
                 </a:tc>
                 <a:tc>
                   <a:txBody>
-                    <a:bodyPr wrap="square"/>
+                    <a:bodyPr/>
                     <a:lstStyle/>
                     <a:p>
                       <a:pPr algn="l"/>
@@ -6497,7 +6497,7 @@
                 </a:tc>
                 <a:tc>
                   <a:txBody>
-                    <a:bodyPr wrap="square"/>
+                    <a:bodyPr/>
                     <a:lstStyle/>
                     <a:p>
                       <a:pPr algn="l"/>
@@ -6680,7 +6680,7 @@
               <a:tr h="457200">
                 <a:tc>
                   <a:txBody>
-                    <a:bodyPr wrap="square"/>
+                    <a:bodyPr/>
                     <a:lstStyle/>
                     <a:p>
                       <a:pPr algn="ctr"/>
@@ -6703,7 +6703,7 @@
                 </a:tc>
                 <a:tc>
                   <a:txBody>
-                    <a:bodyPr wrap="square"/>
+                    <a:bodyPr/>
                     <a:lstStyle/>
                     <a:p>
                       <a:pPr algn="ctr"/>
@@ -6726,7 +6726,7 @@
                 </a:tc>
                 <a:tc>
                   <a:txBody>
-                    <a:bodyPr wrap="square"/>
+                    <a:bodyPr/>
                     <a:lstStyle/>
                     <a:p>
                       <a:pPr algn="ctr"/>
@@ -6749,7 +6749,7 @@
                 </a:tc>
                 <a:tc>
                   <a:txBody>
-                    <a:bodyPr wrap="square"/>
+                    <a:bodyPr/>
                     <a:lstStyle/>
                     <a:p>
                       <a:pPr algn="ctr"/>
@@ -6772,7 +6772,7 @@
                 </a:tc>
                 <a:tc>
                   <a:txBody>
-                    <a:bodyPr wrap="square"/>
+                    <a:bodyPr/>
                     <a:lstStyle/>
                     <a:p>
                       <a:pPr algn="ctr"/>
@@ -6795,7 +6795,7 @@
                 </a:tc>
                 <a:tc>
                   <a:txBody>
-                    <a:bodyPr wrap="square"/>
+                    <a:bodyPr/>
                     <a:lstStyle/>
                     <a:p>
                       <a:pPr algn="ctr"/>
@@ -6820,7 +6820,7 @@
               <a:tr h="457200">
                 <a:tc>
                   <a:txBody>
-                    <a:bodyPr wrap="square"/>
+                    <a:bodyPr/>
                     <a:lstStyle/>
                     <a:p>
                       <a:pPr algn="l"/>
@@ -6843,7 +6843,7 @@
                 </a:tc>
                 <a:tc>
                   <a:txBody>
-                    <a:bodyPr wrap="square"/>
+                    <a:bodyPr/>
                     <a:lstStyle/>
                     <a:p>
                       <a:pPr algn="l"/>
@@ -6866,7 +6866,7 @@
                 </a:tc>
                 <a:tc>
                   <a:txBody>
-                    <a:bodyPr wrap="square"/>
+                    <a:bodyPr/>
                     <a:lstStyle/>
                     <a:p>
                       <a:pPr algn="l"/>
@@ -6889,7 +6889,7 @@
                 </a:tc>
                 <a:tc>
                   <a:txBody>
-                    <a:bodyPr wrap="square"/>
+                    <a:bodyPr/>
                     <a:lstStyle/>
                     <a:p>
                       <a:pPr algn="l"/>
@@ -6912,7 +6912,7 @@
                 </a:tc>
                 <a:tc>
                   <a:txBody>
-                    <a:bodyPr wrap="square"/>
+                    <a:bodyPr/>
                     <a:lstStyle/>
                     <a:p>
                       <a:pPr algn="l"/>
@@ -6935,7 +6935,7 @@
                 </a:tc>
                 <a:tc>
                   <a:txBody>
-                    <a:bodyPr wrap="square"/>
+                    <a:bodyPr/>
                     <a:lstStyle/>
                     <a:p>
                       <a:pPr algn="l"/>
@@ -6960,7 +6960,7 @@
               <a:tr h="457200">
                 <a:tc>
                   <a:txBody>
-                    <a:bodyPr wrap="square"/>
+                    <a:bodyPr/>
                     <a:lstStyle/>
                     <a:p>
                       <a:pPr algn="l"/>
@@ -6983,7 +6983,7 @@
                 </a:tc>
                 <a:tc>
                   <a:txBody>
-                    <a:bodyPr wrap="square"/>
+                    <a:bodyPr/>
                     <a:lstStyle/>
                     <a:p>
                       <a:pPr algn="l"/>
@@ -7006,7 +7006,7 @@
                 </a:tc>
                 <a:tc>
                   <a:txBody>
-                    <a:bodyPr wrap="square"/>
+                    <a:bodyPr/>
                     <a:lstStyle/>
                     <a:p>
                       <a:pPr algn="l"/>
@@ -7029,7 +7029,7 @@
                 </a:tc>
                 <a:tc>
                   <a:txBody>
-                    <a:bodyPr wrap="square"/>
+                    <a:bodyPr/>
                     <a:lstStyle/>
                     <a:p>
                       <a:pPr algn="l"/>
@@ -7052,7 +7052,7 @@
                 </a:tc>
                 <a:tc>
                   <a:txBody>
-                    <a:bodyPr wrap="square"/>
+                    <a:bodyPr/>
                     <a:lstStyle/>
                     <a:p>
                       <a:pPr algn="l"/>
@@ -7075,7 +7075,7 @@
                 </a:tc>
                 <a:tc>
                   <a:txBody>
-                    <a:bodyPr wrap="square"/>
+                    <a:bodyPr/>
                     <a:lstStyle/>
                     <a:p>
                       <a:pPr algn="l"/>
@@ -7100,7 +7100,7 @@
               <a:tr h="457200">
                 <a:tc>
                   <a:txBody>
-                    <a:bodyPr wrap="square"/>
+                    <a:bodyPr/>
                     <a:lstStyle/>
                     <a:p>
                       <a:pPr algn="l"/>
@@ -7123,7 +7123,7 @@
                 </a:tc>
                 <a:tc>
                   <a:txBody>
-                    <a:bodyPr wrap="square"/>
+                    <a:bodyPr/>
                     <a:lstStyle/>
                     <a:p>
                       <a:pPr algn="l"/>
@@ -7146,7 +7146,7 @@
                 </a:tc>
                 <a:tc>
                   <a:txBody>
-                    <a:bodyPr wrap="square"/>
+                    <a:bodyPr/>
                     <a:lstStyle/>
                     <a:p>
                       <a:pPr algn="l"/>
@@ -7169,7 +7169,7 @@
                 </a:tc>
                 <a:tc>
                   <a:txBody>
-                    <a:bodyPr wrap="square"/>
+                    <a:bodyPr/>
                     <a:lstStyle/>
                     <a:p>
                       <a:pPr algn="l"/>
@@ -7192,7 +7192,7 @@
                 </a:tc>
                 <a:tc>
                   <a:txBody>
-                    <a:bodyPr wrap="square"/>
+                    <a:bodyPr/>
                     <a:lstStyle/>
                     <a:p>
                       <a:pPr algn="l"/>
@@ -7215,7 +7215,7 @@
                 </a:tc>
                 <a:tc>
                   <a:txBody>
-                    <a:bodyPr wrap="square"/>
+                    <a:bodyPr/>
                     <a:lstStyle/>
                     <a:p>
                       <a:pPr algn="l"/>
@@ -7240,7 +7240,7 @@
               <a:tr h="457200">
                 <a:tc>
                   <a:txBody>
-                    <a:bodyPr wrap="square"/>
+                    <a:bodyPr/>
                     <a:lstStyle/>
                     <a:p>
                       <a:pPr algn="l"/>
@@ -7263,7 +7263,7 @@
                 </a:tc>
                 <a:tc>
                   <a:txBody>
-                    <a:bodyPr wrap="square"/>
+                    <a:bodyPr/>
                     <a:lstStyle/>
                     <a:p>
                       <a:pPr algn="l"/>
@@ -7286,7 +7286,7 @@
                 </a:tc>
                 <a:tc>
                   <a:txBody>
-                    <a:bodyPr wrap="square"/>
+                    <a:bodyPr/>
                     <a:lstStyle/>
                     <a:p>
                       <a:pPr algn="l"/>
@@ -7309,7 +7309,7 @@
                 </a:tc>
                 <a:tc>
                   <a:txBody>
-                    <a:bodyPr wrap="square"/>
+                    <a:bodyPr/>
                     <a:lstStyle/>
                     <a:p>
                       <a:pPr algn="l"/>
@@ -7332,7 +7332,7 @@
                 </a:tc>
                 <a:tc>
                   <a:txBody>
-                    <a:bodyPr wrap="square"/>
+                    <a:bodyPr/>
                     <a:lstStyle/>
                     <a:p>
                       <a:pPr algn="l"/>
@@ -7355,7 +7355,7 @@
                 </a:tc>
                 <a:tc>
                   <a:txBody>
-                    <a:bodyPr wrap="square"/>
+                    <a:bodyPr/>
                     <a:lstStyle/>
                     <a:p>
                       <a:pPr algn="l"/>
@@ -7380,7 +7380,7 @@
               <a:tr h="457200">
                 <a:tc>
                   <a:txBody>
-                    <a:bodyPr wrap="square"/>
+                    <a:bodyPr/>
                     <a:lstStyle/>
                     <a:p>
                       <a:pPr algn="l"/>
@@ -7403,7 +7403,7 @@
                 </a:tc>
                 <a:tc>
                   <a:txBody>
-                    <a:bodyPr wrap="square"/>
+                    <a:bodyPr/>
                     <a:lstStyle/>
                     <a:p>
                       <a:pPr algn="l"/>
@@ -7426,7 +7426,7 @@
                 </a:tc>
                 <a:tc>
                   <a:txBody>
-                    <a:bodyPr wrap="square"/>
+                    <a:bodyPr/>
                     <a:lstStyle/>
                     <a:p>
                       <a:pPr algn="l"/>
@@ -7449,7 +7449,7 @@
                 </a:tc>
                 <a:tc>
                   <a:txBody>
-                    <a:bodyPr wrap="square"/>
+                    <a:bodyPr/>
                     <a:lstStyle/>
                     <a:p>
                       <a:pPr algn="l"/>
@@ -7472,7 +7472,7 @@
                 </a:tc>
                 <a:tc>
                   <a:txBody>
-                    <a:bodyPr wrap="square"/>
+                    <a:bodyPr/>
                     <a:lstStyle/>
                     <a:p>
                       <a:pPr algn="l"/>
@@ -7495,7 +7495,7 @@
                 </a:tc>
                 <a:tc>
                   <a:txBody>
-                    <a:bodyPr wrap="square"/>
+                    <a:bodyPr/>
                     <a:lstStyle/>
                     <a:p>
                       <a:pPr algn="l"/>
@@ -7520,7 +7520,7 @@
               <a:tr h="457200">
                 <a:tc>
                   <a:txBody>
-                    <a:bodyPr wrap="square"/>
+                    <a:bodyPr/>
                     <a:lstStyle/>
                     <a:p>
                       <a:pPr algn="l"/>
@@ -7543,7 +7543,7 @@
                 </a:tc>
                 <a:tc>
                   <a:txBody>
-                    <a:bodyPr wrap="square"/>
+                    <a:bodyPr/>
                     <a:lstStyle/>
                     <a:p>
                       <a:pPr algn="l"/>
@@ -7566,7 +7566,7 @@
                 </a:tc>
                 <a:tc>
                   <a:txBody>
-                    <a:bodyPr wrap="square"/>
+                    <a:bodyPr/>
                     <a:lstStyle/>
                     <a:p>
                       <a:pPr algn="l"/>
@@ -7589,7 +7589,7 @@
                 </a:tc>
                 <a:tc>
                   <a:txBody>
-                    <a:bodyPr wrap="square"/>
+                    <a:bodyPr/>
                     <a:lstStyle/>
                     <a:p>
                       <a:pPr algn="l"/>
@@ -7612,7 +7612,7 @@
                 </a:tc>
                 <a:tc>
                   <a:txBody>
-                    <a:bodyPr wrap="square"/>
+                    <a:bodyPr/>
                     <a:lstStyle/>
                     <a:p>
                       <a:pPr algn="l"/>
@@ -7635,7 +7635,7 @@
                 </a:tc>
                 <a:tc>
                   <a:txBody>
-                    <a:bodyPr wrap="square"/>
+                    <a:bodyPr/>
                     <a:lstStyle/>
                     <a:p>
                       <a:pPr algn="l"/>
@@ -7819,7 +7819,7 @@
               <a:tr h="292608">
                 <a:tc>
                   <a:txBody>
-                    <a:bodyPr wrap="square"/>
+                    <a:bodyPr/>
                     <a:lstStyle/>
                     <a:p>
                       <a:pPr algn="ctr"/>
@@ -7842,7 +7842,7 @@
                 </a:tc>
                 <a:tc>
                   <a:txBody>
-                    <a:bodyPr wrap="square"/>
+                    <a:bodyPr/>
                     <a:lstStyle/>
                     <a:p>
                       <a:pPr algn="ctr"/>
@@ -7865,7 +7865,7 @@
                 </a:tc>
                 <a:tc>
                   <a:txBody>
-                    <a:bodyPr wrap="square"/>
+                    <a:bodyPr/>
                     <a:lstStyle/>
                     <a:p>
                       <a:pPr algn="ctr"/>
@@ -7888,7 +7888,7 @@
                 </a:tc>
                 <a:tc>
                   <a:txBody>
-                    <a:bodyPr wrap="square"/>
+                    <a:bodyPr/>
                     <a:lstStyle/>
                     <a:p>
                       <a:pPr algn="ctr"/>
@@ -7911,7 +7911,7 @@
                 </a:tc>
                 <a:tc>
                   <a:txBody>
-                    <a:bodyPr wrap="square"/>
+                    <a:bodyPr/>
                     <a:lstStyle/>
                     <a:p>
                       <a:pPr algn="ctr"/>
@@ -7934,7 +7934,7 @@
                 </a:tc>
                 <a:tc>
                   <a:txBody>
-                    <a:bodyPr wrap="square"/>
+                    <a:bodyPr/>
                     <a:lstStyle/>
                     <a:p>
                       <a:pPr algn="ctr"/>
@@ -7957,7 +7957,7 @@
                 </a:tc>
                 <a:tc>
                   <a:txBody>
-                    <a:bodyPr wrap="square"/>
+                    <a:bodyPr/>
                     <a:lstStyle/>
                     <a:p>
                       <a:pPr algn="ctr"/>
@@ -7982,7 +7982,7 @@
               <a:tr h="292608">
                 <a:tc>
                   <a:txBody>
-                    <a:bodyPr wrap="square"/>
+                    <a:bodyPr/>
                     <a:lstStyle/>
                     <a:p>
                       <a:pPr algn="l"/>
@@ -8005,7 +8005,7 @@
                 </a:tc>
                 <a:tc>
                   <a:txBody>
-                    <a:bodyPr wrap="square"/>
+                    <a:bodyPr/>
                     <a:lstStyle/>
                     <a:p>
                       <a:pPr algn="l"/>
@@ -8028,7 +8028,7 @@
                 </a:tc>
                 <a:tc>
                   <a:txBody>
-                    <a:bodyPr wrap="square"/>
+                    <a:bodyPr/>
                     <a:lstStyle/>
                     <a:p>
                       <a:pPr algn="l"/>
@@ -8051,7 +8051,7 @@
                 </a:tc>
                 <a:tc>
                   <a:txBody>
-                    <a:bodyPr wrap="square"/>
+                    <a:bodyPr/>
                     <a:lstStyle/>
                     <a:p>
                       <a:pPr algn="l"/>
@@ -8074,7 +8074,7 @@
                 </a:tc>
                 <a:tc>
                   <a:txBody>
-                    <a:bodyPr wrap="square"/>
+                    <a:bodyPr/>
                     <a:lstStyle/>
                     <a:p>
                       <a:pPr algn="l"/>
@@ -8097,7 +8097,7 @@
                 </a:tc>
                 <a:tc>
                   <a:txBody>
-                    <a:bodyPr wrap="square"/>
+                    <a:bodyPr/>
                     <a:lstStyle/>
                     <a:p>
                       <a:pPr algn="l"/>
@@ -8120,7 +8120,7 @@
                 </a:tc>
                 <a:tc>
                   <a:txBody>
-                    <a:bodyPr wrap="square"/>
+                    <a:bodyPr/>
                     <a:lstStyle/>
                     <a:p>
                       <a:pPr algn="l"/>
@@ -8145,7 +8145,7 @@
               <a:tr h="292608">
                 <a:tc>
                   <a:txBody>
-                    <a:bodyPr wrap="square"/>
+                    <a:bodyPr/>
                     <a:lstStyle/>
                     <a:p>
                       <a:pPr algn="l"/>
@@ -8168,7 +8168,7 @@
                 </a:tc>
                 <a:tc>
                   <a:txBody>
-                    <a:bodyPr wrap="square"/>
+                    <a:bodyPr/>
                     <a:lstStyle/>
                     <a:p>
                       <a:pPr algn="l"/>
@@ -8191,7 +8191,7 @@
                 </a:tc>
                 <a:tc>
                   <a:txBody>
-                    <a:bodyPr wrap="square"/>
+                    <a:bodyPr/>
                     <a:lstStyle/>
                     <a:p>
                       <a:pPr algn="l"/>
@@ -8214,7 +8214,7 @@
                 </a:tc>
                 <a:tc>
                   <a:txBody>
-                    <a:bodyPr wrap="square"/>
+                    <a:bodyPr/>
                     <a:lstStyle/>
                     <a:p>
                       <a:pPr algn="l"/>
@@ -8237,7 +8237,7 @@
                 </a:tc>
                 <a:tc>
                   <a:txBody>
-                    <a:bodyPr wrap="square"/>
+                    <a:bodyPr/>
                     <a:lstStyle/>
                     <a:p>
                       <a:pPr algn="l"/>
@@ -8260,7 +8260,7 @@
                 </a:tc>
                 <a:tc>
                   <a:txBody>
-                    <a:bodyPr wrap="square"/>
+                    <a:bodyPr/>
                     <a:lstStyle/>
                     <a:p>
                       <a:pPr algn="l"/>
@@ -8283,7 +8283,7 @@
                 </a:tc>
                 <a:tc>
                   <a:txBody>
-                    <a:bodyPr wrap="square"/>
+                    <a:bodyPr/>
                     <a:lstStyle/>
                     <a:p>
                       <a:pPr algn="l"/>
@@ -8308,7 +8308,7 @@
               <a:tr h="292608">
                 <a:tc>
                   <a:txBody>
-                    <a:bodyPr wrap="square"/>
+                    <a:bodyPr/>
                     <a:lstStyle/>
                     <a:p>
                       <a:pPr algn="l"/>
@@ -8331,7 +8331,7 @@
                 </a:tc>
                 <a:tc>
                   <a:txBody>
-                    <a:bodyPr wrap="square"/>
+                    <a:bodyPr/>
                     <a:lstStyle/>
                     <a:p>
                       <a:pPr algn="l"/>
@@ -8354,7 +8354,7 @@
                 </a:tc>
                 <a:tc>
                   <a:txBody>
-                    <a:bodyPr wrap="square"/>
+                    <a:bodyPr/>
                     <a:lstStyle/>
                     <a:p>
                       <a:pPr algn="l"/>
@@ -8377,7 +8377,7 @@
                 </a:tc>
                 <a:tc>
                   <a:txBody>
-                    <a:bodyPr wrap="square"/>
+                    <a:bodyPr/>
                     <a:lstStyle/>
                     <a:p>
                       <a:pPr algn="l"/>
@@ -8400,7 +8400,7 @@
                 </a:tc>
                 <a:tc>
                   <a:txBody>
-                    <a:bodyPr wrap="square"/>
+                    <a:bodyPr/>
                     <a:lstStyle/>
                     <a:p>
                       <a:pPr algn="l"/>
@@ -8423,7 +8423,7 @@
                 </a:tc>
                 <a:tc>
                   <a:txBody>
-                    <a:bodyPr wrap="square"/>
+                    <a:bodyPr/>
                     <a:lstStyle/>
                     <a:p>
                       <a:pPr algn="l"/>
@@ -8446,7 +8446,7 @@
                 </a:tc>
                 <a:tc>
                   <a:txBody>
-                    <a:bodyPr wrap="square"/>
+                    <a:bodyPr/>
                     <a:lstStyle/>
                     <a:p>
                       <a:pPr algn="l"/>
@@ -8471,7 +8471,7 @@
               <a:tr h="292608">
                 <a:tc>
                   <a:txBody>
-                    <a:bodyPr wrap="square"/>
+                    <a:bodyPr/>
                     <a:lstStyle/>
                     <a:p>
                       <a:pPr algn="l"/>
@@ -8494,7 +8494,7 @@
                 </a:tc>
                 <a:tc>
                   <a:txBody>
-                    <a:bodyPr wrap="square"/>
+                    <a:bodyPr/>
                     <a:lstStyle/>
                     <a:p>
                       <a:pPr algn="l"/>
@@ -8517,7 +8517,7 @@
                 </a:tc>
                 <a:tc>
                   <a:txBody>
-                    <a:bodyPr wrap="square"/>
+                    <a:bodyPr/>
                     <a:lstStyle/>
                     <a:p>
                       <a:pPr algn="l"/>
@@ -8540,7 +8540,7 @@
                 </a:tc>
                 <a:tc>
                   <a:txBody>
-                    <a:bodyPr wrap="square"/>
+                    <a:bodyPr/>
                     <a:lstStyle/>
                     <a:p>
                       <a:pPr algn="l"/>
@@ -8563,7 +8563,7 @@
                 </a:tc>
                 <a:tc>
                   <a:txBody>
-                    <a:bodyPr wrap="square"/>
+                    <a:bodyPr/>
                     <a:lstStyle/>
                     <a:p>
                       <a:pPr algn="l"/>
@@ -8586,7 +8586,7 @@
                 </a:tc>
                 <a:tc>
                   <a:txBody>
-                    <a:bodyPr wrap="square"/>
+                    <a:bodyPr/>
                     <a:lstStyle/>
                     <a:p>
                       <a:pPr algn="l"/>
@@ -8609,7 +8609,7 @@
                 </a:tc>
                 <a:tc>
                   <a:txBody>
-                    <a:bodyPr wrap="square"/>
+                    <a:bodyPr/>
                     <a:lstStyle/>
                     <a:p>
                       <a:pPr algn="l"/>
@@ -8634,7 +8634,7 @@
               <a:tr h="292608">
                 <a:tc>
                   <a:txBody>
-                    <a:bodyPr wrap="square"/>
+                    <a:bodyPr/>
                     <a:lstStyle/>
                     <a:p>
                       <a:pPr algn="l"/>
@@ -8657,7 +8657,7 @@
                 </a:tc>
                 <a:tc>
                   <a:txBody>
-                    <a:bodyPr wrap="square"/>
+                    <a:bodyPr/>
                     <a:lstStyle/>
                     <a:p>
                       <a:pPr algn="l"/>
@@ -8680,7 +8680,7 @@
                 </a:tc>
                 <a:tc>
                   <a:txBody>
-                    <a:bodyPr wrap="square"/>
+                    <a:bodyPr/>
                     <a:lstStyle/>
                     <a:p>
                       <a:pPr algn="l"/>
@@ -8703,7 +8703,7 @@
                 </a:tc>
                 <a:tc>
                   <a:txBody>
-                    <a:bodyPr wrap="square"/>
+                    <a:bodyPr/>
                     <a:lstStyle/>
                     <a:p>
                       <a:pPr algn="l"/>
@@ -8726,7 +8726,7 @@
                 </a:tc>
                 <a:tc>
                   <a:txBody>
-                    <a:bodyPr wrap="square"/>
+                    <a:bodyPr/>
                     <a:lstStyle/>
                     <a:p>
                       <a:pPr algn="l"/>
@@ -8749,7 +8749,7 @@
                 </a:tc>
                 <a:tc>
                   <a:txBody>
-                    <a:bodyPr wrap="square"/>
+                    <a:bodyPr/>
                     <a:lstStyle/>
                     <a:p>
                       <a:pPr algn="l"/>
@@ -8772,7 +8772,7 @@
                 </a:tc>
                 <a:tc>
                   <a:txBody>
-                    <a:bodyPr wrap="square"/>
+                    <a:bodyPr/>
                     <a:lstStyle/>
                     <a:p>
                       <a:pPr algn="l"/>
@@ -8797,7 +8797,7 @@
               <a:tr h="292608">
                 <a:tc>
                   <a:txBody>
-                    <a:bodyPr wrap="square"/>
+                    <a:bodyPr/>
                     <a:lstStyle/>
                     <a:p>
                       <a:pPr algn="l"/>
@@ -8820,7 +8820,7 @@
                 </a:tc>
                 <a:tc>
                   <a:txBody>
-                    <a:bodyPr wrap="square"/>
+                    <a:bodyPr/>
                     <a:lstStyle/>
                     <a:p>
                       <a:pPr algn="l"/>
@@ -8843,7 +8843,7 @@
                 </a:tc>
                 <a:tc>
                   <a:txBody>
-                    <a:bodyPr wrap="square"/>
+                    <a:bodyPr/>
                     <a:lstStyle/>
                     <a:p>
                       <a:pPr algn="l"/>
@@ -8866,7 +8866,7 @@
                 </a:tc>
                 <a:tc>
                   <a:txBody>
-                    <a:bodyPr wrap="square"/>
+                    <a:bodyPr/>
                     <a:lstStyle/>
                     <a:p>
                       <a:pPr algn="l"/>
@@ -8889,7 +8889,7 @@
                 </a:tc>
                 <a:tc>
                   <a:txBody>
-                    <a:bodyPr wrap="square"/>
+                    <a:bodyPr/>
                     <a:lstStyle/>
                     <a:p>
                       <a:pPr algn="l"/>
@@ -8912,7 +8912,7 @@
                 </a:tc>
                 <a:tc>
                   <a:txBody>
-                    <a:bodyPr wrap="square"/>
+                    <a:bodyPr/>
                     <a:lstStyle/>
                     <a:p>
                       <a:pPr algn="l"/>
@@ -8935,7 +8935,7 @@
                 </a:tc>
                 <a:tc>
                   <a:txBody>
-                    <a:bodyPr wrap="square"/>
+                    <a:bodyPr/>
                     <a:lstStyle/>
                     <a:p>
                       <a:pPr algn="l"/>
@@ -8960,7 +8960,7 @@
               <a:tr h="292608">
                 <a:tc>
                   <a:txBody>
-                    <a:bodyPr wrap="square"/>
+                    <a:bodyPr/>
                     <a:lstStyle/>
                     <a:p>
                       <a:pPr algn="l"/>
@@ -8983,7 +8983,7 @@
                 </a:tc>
                 <a:tc>
                   <a:txBody>
-                    <a:bodyPr wrap="square"/>
+                    <a:bodyPr/>
                     <a:lstStyle/>
                     <a:p>
                       <a:pPr algn="l"/>
@@ -9006,7 +9006,7 @@
                 </a:tc>
                 <a:tc>
                   <a:txBody>
-                    <a:bodyPr wrap="square"/>
+                    <a:bodyPr/>
                     <a:lstStyle/>
                     <a:p>
                       <a:pPr algn="l"/>
@@ -9029,7 +9029,7 @@
                 </a:tc>
                 <a:tc>
                   <a:txBody>
-                    <a:bodyPr wrap="square"/>
+                    <a:bodyPr/>
                     <a:lstStyle/>
                     <a:p>
                       <a:pPr algn="l"/>
@@ -9052,7 +9052,7 @@
                 </a:tc>
                 <a:tc>
                   <a:txBody>
-                    <a:bodyPr wrap="square"/>
+                    <a:bodyPr/>
                     <a:lstStyle/>
                     <a:p>
                       <a:pPr algn="l"/>
@@ -9075,7 +9075,7 @@
                 </a:tc>
                 <a:tc>
                   <a:txBody>
-                    <a:bodyPr wrap="square"/>
+                    <a:bodyPr/>
                     <a:lstStyle/>
                     <a:p>
                       <a:pPr algn="l"/>
@@ -9098,7 +9098,7 @@
                 </a:tc>
                 <a:tc>
                   <a:txBody>
-                    <a:bodyPr wrap="square"/>
+                    <a:bodyPr/>
                     <a:lstStyle/>
                     <a:p>
                       <a:pPr algn="l"/>
@@ -9123,7 +9123,7 @@
               <a:tr h="292608">
                 <a:tc>
                   <a:txBody>
-                    <a:bodyPr wrap="square"/>
+                    <a:bodyPr/>
                     <a:lstStyle/>
                     <a:p>
                       <a:pPr algn="l"/>
@@ -9146,7 +9146,7 @@
                 </a:tc>
                 <a:tc>
                   <a:txBody>
-                    <a:bodyPr wrap="square"/>
+                    <a:bodyPr/>
                     <a:lstStyle/>
                     <a:p>
                       <a:pPr algn="l"/>
@@ -9169,7 +9169,7 @@
                 </a:tc>
                 <a:tc>
                   <a:txBody>
-                    <a:bodyPr wrap="square"/>
+                    <a:bodyPr/>
                     <a:lstStyle/>
                     <a:p>
                       <a:pPr algn="l"/>
@@ -9192,7 +9192,7 @@
                 </a:tc>
                 <a:tc>
                   <a:txBody>
-                    <a:bodyPr wrap="square"/>
+                    <a:bodyPr/>
                     <a:lstStyle/>
                     <a:p>
                       <a:pPr algn="l"/>
@@ -9215,7 +9215,7 @@
                 </a:tc>
                 <a:tc>
                   <a:txBody>
-                    <a:bodyPr wrap="square"/>
+                    <a:bodyPr/>
                     <a:lstStyle/>
                     <a:p>
                       <a:pPr algn="l"/>
@@ -9238,7 +9238,7 @@
                 </a:tc>
                 <a:tc>
                   <a:txBody>
-                    <a:bodyPr wrap="square"/>
+                    <a:bodyPr/>
                     <a:lstStyle/>
                     <a:p>
                       <a:pPr algn="l"/>
@@ -9261,7 +9261,7 @@
                 </a:tc>
                 <a:tc>
                   <a:txBody>
-                    <a:bodyPr wrap="square"/>
+                    <a:bodyPr/>
                     <a:lstStyle/>
                     <a:p>
                       <a:pPr algn="l"/>
@@ -9286,7 +9286,7 @@
               <a:tr h="292608">
                 <a:tc>
                   <a:txBody>
-                    <a:bodyPr wrap="square"/>
+                    <a:bodyPr/>
                     <a:lstStyle/>
                     <a:p>
                       <a:pPr algn="l"/>
@@ -9309,7 +9309,7 @@
                 </a:tc>
                 <a:tc>
                   <a:txBody>
-                    <a:bodyPr wrap="square"/>
+                    <a:bodyPr/>
                     <a:lstStyle/>
                     <a:p>
                       <a:pPr algn="l"/>
@@ -9332,7 +9332,7 @@
                 </a:tc>
                 <a:tc>
                   <a:txBody>
-                    <a:bodyPr wrap="square"/>
+                    <a:bodyPr/>
                     <a:lstStyle/>
                     <a:p>
                       <a:pPr algn="l"/>
@@ -9355,7 +9355,7 @@
                 </a:tc>
                 <a:tc>
                   <a:txBody>
-                    <a:bodyPr wrap="square"/>
+                    <a:bodyPr/>
                     <a:lstStyle/>
                     <a:p>
                       <a:pPr algn="l"/>
@@ -9378,7 +9378,7 @@
                 </a:tc>
                 <a:tc>
                   <a:txBody>
-                    <a:bodyPr wrap="square"/>
+                    <a:bodyPr/>
                     <a:lstStyle/>
                     <a:p>
                       <a:pPr algn="l"/>
@@ -9401,7 +9401,7 @@
                 </a:tc>
                 <a:tc>
                   <a:txBody>
-                    <a:bodyPr wrap="square"/>
+                    <a:bodyPr/>
                     <a:lstStyle/>
                     <a:p>
                       <a:pPr algn="l"/>
@@ -9424,7 +9424,7 @@
                 </a:tc>
                 <a:tc>
                   <a:txBody>
-                    <a:bodyPr wrap="square"/>
+                    <a:bodyPr/>
                     <a:lstStyle/>
                     <a:p>
                       <a:pPr algn="l"/>
@@ -9449,7 +9449,7 @@
               <a:tr h="292608">
                 <a:tc>
                   <a:txBody>
-                    <a:bodyPr wrap="square"/>
+                    <a:bodyPr/>
                     <a:lstStyle/>
                     <a:p>
                       <a:pPr algn="l"/>
@@ -9472,7 +9472,7 @@
                 </a:tc>
                 <a:tc>
                   <a:txBody>
-                    <a:bodyPr wrap="square"/>
+                    <a:bodyPr/>
                     <a:lstStyle/>
                     <a:p>
                       <a:pPr algn="l"/>
@@ -9495,7 +9495,7 @@
                 </a:tc>
                 <a:tc>
                   <a:txBody>
-                    <a:bodyPr wrap="square"/>
+                    <a:bodyPr/>
                     <a:lstStyle/>
                     <a:p>
                       <a:pPr algn="l"/>
@@ -9518,7 +9518,7 @@
                 </a:tc>
                 <a:tc>
                   <a:txBody>
-                    <a:bodyPr wrap="square"/>
+                    <a:bodyPr/>
                     <a:lstStyle/>
                     <a:p>
                       <a:pPr algn="l"/>
@@ -9541,7 +9541,7 @@
                 </a:tc>
                 <a:tc>
                   <a:txBody>
-                    <a:bodyPr wrap="square"/>
+                    <a:bodyPr/>
                     <a:lstStyle/>
                     <a:p>
                       <a:pPr algn="l"/>
@@ -9564,7 +9564,7 @@
                 </a:tc>
                 <a:tc>
                   <a:txBody>
-                    <a:bodyPr wrap="square"/>
+                    <a:bodyPr/>
                     <a:lstStyle/>
                     <a:p>
                       <a:pPr algn="l"/>
@@ -9587,7 +9587,7 @@
                 </a:tc>
                 <a:tc>
                   <a:txBody>
-                    <a:bodyPr wrap="square"/>
+                    <a:bodyPr/>
                     <a:lstStyle/>
                     <a:p>
                       <a:pPr algn="l"/>
@@ -9612,7 +9612,7 @@
               <a:tr h="292608">
                 <a:tc>
                   <a:txBody>
-                    <a:bodyPr wrap="square"/>
+                    <a:bodyPr/>
                     <a:lstStyle/>
                     <a:p>
                       <a:pPr algn="l"/>
@@ -9635,7 +9635,7 @@
                 </a:tc>
                 <a:tc>
                   <a:txBody>
-                    <a:bodyPr wrap="square"/>
+                    <a:bodyPr/>
                     <a:lstStyle/>
                     <a:p>
                       <a:pPr algn="l"/>
@@ -9658,7 +9658,7 @@
                 </a:tc>
                 <a:tc>
                   <a:txBody>
-                    <a:bodyPr wrap="square"/>
+                    <a:bodyPr/>
                     <a:lstStyle/>
                     <a:p>
                       <a:pPr algn="l"/>
@@ -9681,7 +9681,7 @@
                 </a:tc>
                 <a:tc>
                   <a:txBody>
-                    <a:bodyPr wrap="square"/>
+                    <a:bodyPr/>
                     <a:lstStyle/>
                     <a:p>
                       <a:pPr algn="l"/>
@@ -9704,7 +9704,7 @@
                 </a:tc>
                 <a:tc>
                   <a:txBody>
-                    <a:bodyPr wrap="square"/>
+                    <a:bodyPr/>
                     <a:lstStyle/>
                     <a:p>
                       <a:pPr algn="l"/>
@@ -9727,7 +9727,7 @@
                 </a:tc>
                 <a:tc>
                   <a:txBody>
-                    <a:bodyPr wrap="square"/>
+                    <a:bodyPr/>
                     <a:lstStyle/>
                     <a:p>
                       <a:pPr algn="l"/>
@@ -9750,7 +9750,7 @@
                 </a:tc>
                 <a:tc>
                   <a:txBody>
-                    <a:bodyPr wrap="square"/>
+                    <a:bodyPr/>
                     <a:lstStyle/>
                     <a:p>
                       <a:pPr algn="l"/>
@@ -9775,7 +9775,7 @@
               <a:tr h="292608">
                 <a:tc>
                   <a:txBody>
-                    <a:bodyPr wrap="square"/>
+                    <a:bodyPr/>
                     <a:lstStyle/>
                     <a:p>
                       <a:pPr algn="l"/>
@@ -9798,7 +9798,7 @@
                 </a:tc>
                 <a:tc>
                   <a:txBody>
-                    <a:bodyPr wrap="square"/>
+                    <a:bodyPr/>
                     <a:lstStyle/>
                     <a:p>
                       <a:pPr algn="l"/>
@@ -9821,7 +9821,7 @@
                 </a:tc>
                 <a:tc>
                   <a:txBody>
-                    <a:bodyPr wrap="square"/>
+                    <a:bodyPr/>
                     <a:lstStyle/>
                     <a:p>
                       <a:pPr algn="l"/>
@@ -9844,7 +9844,7 @@
                 </a:tc>
                 <a:tc>
                   <a:txBody>
-                    <a:bodyPr wrap="square"/>
+                    <a:bodyPr/>
                     <a:lstStyle/>
                     <a:p>
                       <a:pPr algn="l"/>
@@ -9867,7 +9867,7 @@
                 </a:tc>
                 <a:tc>
                   <a:txBody>
-                    <a:bodyPr wrap="square"/>
+                    <a:bodyPr/>
                     <a:lstStyle/>
                     <a:p>
                       <a:pPr algn="l"/>
@@ -9890,7 +9890,7 @@
                 </a:tc>
                 <a:tc>
                   <a:txBody>
-                    <a:bodyPr wrap="square"/>
+                    <a:bodyPr/>
                     <a:lstStyle/>
                     <a:p>
                       <a:pPr algn="l"/>
@@ -9913,7 +9913,7 @@
                 </a:tc>
                 <a:tc>
                   <a:txBody>
-                    <a:bodyPr wrap="square"/>
+                    <a:bodyPr/>
                     <a:lstStyle/>
                     <a:p>
                       <a:pPr algn="l"/>
@@ -9938,7 +9938,7 @@
               <a:tr h="292608">
                 <a:tc>
                   <a:txBody>
-                    <a:bodyPr wrap="square"/>
+                    <a:bodyPr/>
                     <a:lstStyle/>
                     <a:p>
                       <a:pPr algn="l"/>
@@ -9961,7 +9961,7 @@
                 </a:tc>
                 <a:tc>
                   <a:txBody>
-                    <a:bodyPr wrap="square"/>
+                    <a:bodyPr/>
                     <a:lstStyle/>
                     <a:p>
                       <a:pPr algn="l"/>
@@ -9984,7 +9984,7 @@
                 </a:tc>
                 <a:tc>
                   <a:txBody>
-                    <a:bodyPr wrap="square"/>
+                    <a:bodyPr/>
                     <a:lstStyle/>
                     <a:p>
                       <a:pPr algn="l"/>
@@ -10007,7 +10007,7 @@
                 </a:tc>
                 <a:tc>
                   <a:txBody>
-                    <a:bodyPr wrap="square"/>
+                    <a:bodyPr/>
                     <a:lstStyle/>
                     <a:p>
                       <a:pPr algn="l"/>
@@ -10030,7 +10030,7 @@
                 </a:tc>
                 <a:tc>
                   <a:txBody>
-                    <a:bodyPr wrap="square"/>
+                    <a:bodyPr/>
                     <a:lstStyle/>
                     <a:p>
                       <a:pPr algn="l"/>
@@ -10053,7 +10053,7 @@
                 </a:tc>
                 <a:tc>
                   <a:txBody>
-                    <a:bodyPr wrap="square"/>
+                    <a:bodyPr/>
                     <a:lstStyle/>
                     <a:p>
                       <a:pPr algn="l"/>
@@ -10076,7 +10076,7 @@
                 </a:tc>
                 <a:tc>
                   <a:txBody>
-                    <a:bodyPr wrap="square"/>
+                    <a:bodyPr/>
                     <a:lstStyle/>
                     <a:p>
                       <a:pPr algn="l"/>
@@ -10101,7 +10101,7 @@
               <a:tr h="292608">
                 <a:tc>
                   <a:txBody>
-                    <a:bodyPr wrap="square"/>
+                    <a:bodyPr/>
                     <a:lstStyle/>
                     <a:p>
                       <a:pPr algn="l"/>
@@ -10124,7 +10124,7 @@
                 </a:tc>
                 <a:tc>
                   <a:txBody>
-                    <a:bodyPr wrap="square"/>
+                    <a:bodyPr/>
                     <a:lstStyle/>
                     <a:p>
                       <a:pPr algn="l"/>
@@ -10147,7 +10147,7 @@
                 </a:tc>
                 <a:tc>
                   <a:txBody>
-                    <a:bodyPr wrap="square"/>
+                    <a:bodyPr/>
                     <a:lstStyle/>
                     <a:p>
                       <a:pPr algn="l"/>
@@ -10170,7 +10170,7 @@
                 </a:tc>
                 <a:tc>
                   <a:txBody>
-                    <a:bodyPr wrap="square"/>
+                    <a:bodyPr/>
                     <a:lstStyle/>
                     <a:p>
                       <a:pPr algn="l"/>
@@ -10193,7 +10193,7 @@
                 </a:tc>
                 <a:tc>
                   <a:txBody>
-                    <a:bodyPr wrap="square"/>
+                    <a:bodyPr/>
                     <a:lstStyle/>
                     <a:p>
                       <a:pPr algn="l"/>
@@ -10216,7 +10216,7 @@
                 </a:tc>
                 <a:tc>
                   <a:txBody>
-                    <a:bodyPr wrap="square"/>
+                    <a:bodyPr/>
                     <a:lstStyle/>
                     <a:p>
                       <a:pPr algn="l"/>
@@ -10239,7 +10239,7 @@
                 </a:tc>
                 <a:tc>
                   <a:txBody>
-                    <a:bodyPr wrap="square"/>
+                    <a:bodyPr/>
                     <a:lstStyle/>
                     <a:p>
                       <a:pPr algn="l"/>

--- a/BATIKI_COM_IMPORT_EXPORT_LTDA.pptx
+++ b/BATIKI_COM_IMPORT_EXPORT_LTDA.pptx
@@ -147,10 +147,10 @@
               <c:strCache>
                 <c:ptCount val="2"/>
                 <c:pt idx="0">
-                  <c:v>Marco 2026</c:v>
+                  <c:v>Abril 2026</c:v>
                 </c:pt>
                 <c:pt idx="1">
-                  <c:v>Abril 2026</c:v>
+                  <c:v>Maio 2026</c:v>
                 </c:pt>
               </c:strCache>
             </c:strRef>
@@ -162,10 +162,10 @@
                 <c:formatCode>General</c:formatCode>
                 <c:ptCount val="2"/>
                 <c:pt idx="0">
-                  <c:v>0</c:v>
+                  <c:v>65</c:v>
                 </c:pt>
                 <c:pt idx="1">
-                  <c:v>65</c:v>
+                  <c:v>79</c:v>
                 </c:pt>
               </c:numCache>
             </c:numRef>
@@ -196,10 +196,10 @@
               <c:strCache>
                 <c:ptCount val="2"/>
                 <c:pt idx="0">
-                  <c:v>Marco 2026</c:v>
+                  <c:v>Abril 2026</c:v>
                 </c:pt>
                 <c:pt idx="1">
-                  <c:v>Abril 2026</c:v>
+                  <c:v>Maio 2026</c:v>
                 </c:pt>
               </c:strCache>
             </c:strRef>
@@ -211,10 +211,10 @@
                 <c:formatCode>General</c:formatCode>
                 <c:ptCount val="2"/>
                 <c:pt idx="0">
-                  <c:v>0</c:v>
+                  <c:v>9</c:v>
                 </c:pt>
                 <c:pt idx="1">
-                  <c:v>9</c:v>
+                  <c:v>3</c:v>
                 </c:pt>
               </c:numCache>
             </c:numRef>
@@ -3387,7 +3387,7 @@
                 </a:solidFill>
                 <a:latin typeface="Calibri"/>
               </a:rPr>
-              <a:t>INDICADORES ABRIL 2026</a:t>
+              <a:t>INDICADORES MAIO 2026</a:t>
             </a:r>
           </a:p>
         </p:txBody>
@@ -3709,7 +3709,7 @@
                 </a:solidFill>
                 <a:latin typeface="Calibri"/>
               </a:rPr>
-              <a:t>74</a:t>
+              <a:t>82</a:t>
             </a:r>
           </a:p>
         </p:txBody>
@@ -3824,7 +3824,7 @@
                 </a:solidFill>
                 <a:latin typeface="Calibri"/>
               </a:rPr>
-              <a:t>65</a:t>
+              <a:t>79</a:t>
             </a:r>
           </a:p>
         </p:txBody>
@@ -3939,7 +3939,7 @@
                 </a:solidFill>
                 <a:latin typeface="Calibri"/>
               </a:rPr>
-              <a:t>9</a:t>
+              <a:t>3</a:t>
             </a:r>
           </a:p>
         </p:txBody>
@@ -4050,11 +4050,11 @@
             <a:r>
               <a:rPr sz="2800" b="1">
                 <a:solidFill>
-                  <a:srgbClr val="F59E0B"/>
+                  <a:srgbClr val="10B981"/>
                 </a:solidFill>
                 <a:latin typeface="Calibri"/>
               </a:rPr>
-              <a:t>87.8%</a:t>
+              <a:t>96.3%</a:t>
             </a:r>
           </a:p>
         </p:txBody>
@@ -4155,7 +4155,7 @@
                           </a:solidFill>
                           <a:latin typeface="Calibri"/>
                         </a:rPr>
-                        <a:t>Marco 2026</a:t>
+                        <a:t>Abril 2026</a:t>
                       </a:r>
                     </a:p>
                   </a:txBody>
@@ -4178,7 +4178,7 @@
                           </a:solidFill>
                           <a:latin typeface="Calibri"/>
                         </a:rPr>
-                        <a:t>Abril 2026</a:t>
+                        <a:t>Maio 2026</a:t>
                       </a:r>
                     </a:p>
                   </a:txBody>
@@ -4249,7 +4249,7 @@
                           </a:solidFill>
                           <a:latin typeface="Calibri"/>
                         </a:rPr>
-                        <a:t>0</a:t>
+                        <a:t>74</a:t>
                       </a:r>
                     </a:p>
                   </a:txBody>
@@ -4272,7 +4272,7 @@
                           </a:solidFill>
                           <a:latin typeface="Calibri"/>
                         </a:rPr>
-                        <a:t>74</a:t>
+                        <a:t>82</a:t>
                       </a:r>
                     </a:p>
                   </a:txBody>
@@ -4295,7 +4295,7 @@
                           </a:solidFill>
                           <a:latin typeface="Calibri"/>
                         </a:rPr>
-                        <a:t>+ 74</a:t>
+                        <a:t>+ 8</a:t>
                       </a:r>
                     </a:p>
                   </a:txBody>
@@ -4343,7 +4343,7 @@
                           </a:solidFill>
                           <a:latin typeface="Calibri"/>
                         </a:rPr>
-                        <a:t>0</a:t>
+                        <a:t>65</a:t>
                       </a:r>
                     </a:p>
                   </a:txBody>
@@ -4366,7 +4366,7 @@
                           </a:solidFill>
                           <a:latin typeface="Calibri"/>
                         </a:rPr>
-                        <a:t>65</a:t>
+                        <a:t>79</a:t>
                       </a:r>
                     </a:p>
                   </a:txBody>
@@ -4389,7 +4389,7 @@
                           </a:solidFill>
                           <a:latin typeface="Calibri"/>
                         </a:rPr>
-                        <a:t>+ 65</a:t>
+                        <a:t>+ 14</a:t>
                       </a:r>
                     </a:p>
                   </a:txBody>
@@ -4437,7 +4437,7 @@
                           </a:solidFill>
                           <a:latin typeface="Calibri"/>
                         </a:rPr>
-                        <a:t>0</a:t>
+                        <a:t>9</a:t>
                       </a:r>
                     </a:p>
                   </a:txBody>
@@ -4460,7 +4460,7 @@
                           </a:solidFill>
                           <a:latin typeface="Calibri"/>
                         </a:rPr>
-                        <a:t>9</a:t>
+                        <a:t>3</a:t>
                       </a:r>
                     </a:p>
                   </a:txBody>
@@ -4483,7 +4483,7 @@
                           </a:solidFill>
                           <a:latin typeface="Calibri"/>
                         </a:rPr>
-                        <a:t>+ 9</a:t>
+                        <a:t>- 6</a:t>
                       </a:r>
                     </a:p>
                   </a:txBody>
@@ -4554,7 +4554,7 @@
                           </a:solidFill>
                           <a:latin typeface="Calibri"/>
                         </a:rPr>
-                        <a:t>87.8%</a:t>
+                        <a:t>96.3%</a:t>
                       </a:r>
                     </a:p>
                   </a:txBody>
@@ -4577,7 +4577,7 @@
                           </a:solidFill>
                           <a:latin typeface="Calibri"/>
                         </a:rPr>
-                        <a:t>+ 0.0pp</a:t>
+                        <a:t>+ 8.5pp</a:t>
                       </a:r>
                     </a:p>
                   </a:txBody>
@@ -4894,7 +4894,7 @@
                           </a:solidFill>
                           <a:latin typeface="Calibri"/>
                         </a:rPr>
-                        <a:t>Marco 2026</a:t>
+                        <a:t>Abril 2026</a:t>
                       </a:r>
                     </a:p>
                   </a:txBody>
@@ -4917,7 +4917,7 @@
                           </a:solidFill>
                           <a:latin typeface="Calibri"/>
                         </a:rPr>
-                        <a:t>0</a:t>
+                        <a:t>74</a:t>
                       </a:r>
                     </a:p>
                   </a:txBody>
@@ -4940,7 +4940,7 @@
                           </a:solidFill>
                           <a:latin typeface="Calibri"/>
                         </a:rPr>
-                        <a:t>0</a:t>
+                        <a:t>65</a:t>
                       </a:r>
                     </a:p>
                   </a:txBody>
@@ -4963,7 +4963,7 @@
                           </a:solidFill>
                           <a:latin typeface="Calibri"/>
                         </a:rPr>
-                        <a:t>0</a:t>
+                        <a:t>9</a:t>
                       </a:r>
                     </a:p>
                   </a:txBody>
@@ -5011,7 +5011,7 @@
                           </a:solidFill>
                           <a:latin typeface="Calibri"/>
                         </a:rPr>
-                        <a:t>Abril 2026</a:t>
+                        <a:t>Maio 2026</a:t>
                       </a:r>
                     </a:p>
                   </a:txBody>
@@ -5034,7 +5034,7 @@
                           </a:solidFill>
                           <a:latin typeface="Calibri"/>
                         </a:rPr>
-                        <a:t>74</a:t>
+                        <a:t>82</a:t>
                       </a:r>
                     </a:p>
                   </a:txBody>
@@ -5057,7 +5057,7 @@
                           </a:solidFill>
                           <a:latin typeface="Calibri"/>
                         </a:rPr>
-                        <a:t>65</a:t>
+                        <a:t>79</a:t>
                       </a:r>
                     </a:p>
                   </a:txBody>
@@ -5080,7 +5080,7 @@
                           </a:solidFill>
                           <a:latin typeface="Calibri"/>
                         </a:rPr>
-                        <a:t>9</a:t>
+                        <a:t>3</a:t>
                       </a:r>
                     </a:p>
                   </a:txBody>
@@ -5103,7 +5103,7 @@
                           </a:solidFill>
                           <a:latin typeface="Calibri"/>
                         </a:rPr>
-                        <a:t>87.8%</a:t>
+                        <a:t>96.3%</a:t>
                       </a:r>
                     </a:p>
                   </a:txBody>
@@ -5191,7 +5191,7 @@
                 </a:solidFill>
                 <a:latin typeface="Calibri"/>
               </a:rPr>
-              <a:t>PERFORMANCE: 87.8% - REGULAR</a:t>
+              <a:t>PERFORMANCE: 96.3% - EXCELENTE</a:t>
             </a:r>
           </a:p>
         </p:txBody>
@@ -5276,7 +5276,7 @@
                 </a:solidFill>
                 <a:latin typeface="Calibri"/>
               </a:rPr>
-              <a:t>OCORRENCIAS FORA DO PRAZO (9)</a:t>
+              <a:t>OCORRENCIAS FORA DO PRAZO (3)</a:t>
             </a:r>
           </a:p>
         </p:txBody>
@@ -5334,7 +5334,7 @@
         </p:nvGraphicFramePr>
         <p:xfrm>
           <a:off x="457200" y="1828800"/>
-          <a:ext cx="11429999" cy="3840480"/>
+          <a:ext cx="11429999" cy="1536192"/>
         </p:xfrm>
         <a:graphic>
           <a:graphicData uri="http://schemas.openxmlformats.org/drawingml/2006/table">
@@ -5480,7 +5480,7 @@
                           </a:solidFill>
                           <a:latin typeface="Calibri"/>
                         </a:rPr>
-                        <a:t>275848</a:t>
+                        <a:t>282091</a:t>
                       </a:r>
                     </a:p>
                   </a:txBody>
@@ -5503,7 +5503,7 @@
                           </a:solidFill>
                           <a:latin typeface="Calibri"/>
                         </a:rPr>
-                        <a:t>ANTONIO MARCOS DA SI - NAZARIO / GO</a:t>
+                        <a:t>BATIKI COM IMPORT EX - SAO JOSE DO RIO PRETO / S</a:t>
                       </a:r>
                     </a:p>
                   </a:txBody>
@@ -5526,7 +5526,7 @@
                           </a:solidFill>
                           <a:latin typeface="Calibri"/>
                         </a:rPr>
-                        <a:t>NAZARIO/GO</a:t>
+                        <a:t>SAO JOSE DO RIO PRETO/SP</a:t>
                       </a:r>
                     </a:p>
                   </a:txBody>
@@ -5549,7 +5549,7 @@
                           </a:solidFill>
                           <a:latin typeface="Calibri"/>
                         </a:rPr>
-                        <a:t>06/04/2026</a:t>
+                        <a:t>13/05/2026</a:t>
                       </a:r>
                     </a:p>
                   </a:txBody>
@@ -5572,7 +5572,7 @@
                           </a:solidFill>
                           <a:latin typeface="Calibri"/>
                         </a:rPr>
-                        <a:t>ENTREGUE FORA DO PRAZO</a:t>
+                        <a:t>FORA DO PRAZO</a:t>
                       </a:r>
                     </a:p>
                   </a:txBody>
@@ -5597,7 +5597,7 @@
                           </a:solidFill>
                           <a:latin typeface="Calibri"/>
                         </a:rPr>
-                        <a:t>275849</a:t>
+                        <a:t>282113</a:t>
                       </a:r>
                     </a:p>
                   </a:txBody>
@@ -5620,7 +5620,7 @@
                           </a:solidFill>
                           <a:latin typeface="Calibri"/>
                         </a:rPr>
-                        <a:t>LEO MOVEIS LTDA ME - ARUANA / GO</a:t>
+                        <a:t>TCB COMERCIO DE ARTI - SAO PAULO / SP</a:t>
                       </a:r>
                     </a:p>
                   </a:txBody>
@@ -5643,7 +5643,7 @@
                           </a:solidFill>
                           <a:latin typeface="Calibri"/>
                         </a:rPr>
-                        <a:t>ARUANA/GO</a:t>
+                        <a:t>SAO PAULO/SP</a:t>
                       </a:r>
                     </a:p>
                   </a:txBody>
@@ -5666,7 +5666,7 @@
                           </a:solidFill>
                           <a:latin typeface="Calibri"/>
                         </a:rPr>
-                        <a:t>06/04/2026</a:t>
+                        <a:t>12/05/2026</a:t>
                       </a:r>
                     </a:p>
                   </a:txBody>
@@ -5714,7 +5714,7 @@
                           </a:solidFill>
                           <a:latin typeface="Calibri"/>
                         </a:rPr>
-                        <a:t>275851</a:t>
+                        <a:t>282115</a:t>
                       </a:r>
                     </a:p>
                   </a:txBody>
@@ -5737,7 +5737,7 @@
                           </a:solidFill>
                           <a:latin typeface="Calibri"/>
                         </a:rPr>
-                        <a:t>CELSO JERONIMO DE OL - EDEIA / GO</a:t>
+                        <a:t>CHRISTIANE GIRON ME - ARARAQUARA / SP</a:t>
                       </a:r>
                     </a:p>
                   </a:txBody>
@@ -5760,7 +5760,7 @@
                           </a:solidFill>
                           <a:latin typeface="Calibri"/>
                         </a:rPr>
-                        <a:t>EDEIA/GO</a:t>
+                        <a:t>ARARAQUARA/SP</a:t>
                       </a:r>
                     </a:p>
                   </a:txBody>
@@ -5783,709 +5783,7 @@
                           </a:solidFill>
                           <a:latin typeface="Calibri"/>
                         </a:rPr>
-                        <a:t>06/04/2026</a:t>
-                      </a:r>
-                    </a:p>
-                  </a:txBody>
-                  <a:tcPr>
-                    <a:solidFill>
-                      <a:srgbClr val="FFFFFF"/>
-                    </a:solidFill>
-                  </a:tcPr>
-                </a:tc>
-                <a:tc>
-                  <a:txBody>
-                    <a:bodyPr/>
-                    <a:lstStyle/>
-                    <a:p>
-                      <a:pPr algn="l"/>
-                      <a:r>
-                        <a:rPr sz="1000" b="0">
-                          <a:solidFill>
-                            <a:srgbClr val="1D1B43"/>
-                          </a:solidFill>
-                          <a:latin typeface="Calibri"/>
-                        </a:rPr>
-                        <a:t>ENTREGUE FORA DO PRAZO</a:t>
-                      </a:r>
-                    </a:p>
-                  </a:txBody>
-                  <a:tcPr>
-                    <a:solidFill>
-                      <a:srgbClr val="FFFFFF"/>
-                    </a:solidFill>
-                  </a:tcPr>
-                </a:tc>
-              </a:tr>
-              <a:tr h="384048">
-                <a:tc>
-                  <a:txBody>
-                    <a:bodyPr/>
-                    <a:lstStyle/>
-                    <a:p>
-                      <a:pPr algn="l"/>
-                      <a:r>
-                        <a:rPr sz="1000" b="0">
-                          <a:solidFill>
-                            <a:srgbClr val="1D1B43"/>
-                          </a:solidFill>
-                          <a:latin typeface="Calibri"/>
-                        </a:rPr>
-                        <a:t>276913</a:t>
-                      </a:r>
-                    </a:p>
-                  </a:txBody>
-                  <a:tcPr>
-                    <a:solidFill>
-                      <a:srgbClr val="F2F2F2"/>
-                    </a:solidFill>
-                  </a:tcPr>
-                </a:tc>
-                <a:tc>
-                  <a:txBody>
-                    <a:bodyPr/>
-                    <a:lstStyle/>
-                    <a:p>
-                      <a:pPr algn="l"/>
-                      <a:r>
-                        <a:rPr sz="1000" b="0">
-                          <a:solidFill>
-                            <a:srgbClr val="1D1B43"/>
-                          </a:solidFill>
-                          <a:latin typeface="Calibri"/>
-                        </a:rPr>
-                        <a:t>CSG RODRIGUESVARIEDA - GOIANESIA / GO</a:t>
-                      </a:r>
-                    </a:p>
-                  </a:txBody>
-                  <a:tcPr>
-                    <a:solidFill>
-                      <a:srgbClr val="F2F2F2"/>
-                    </a:solidFill>
-                  </a:tcPr>
-                </a:tc>
-                <a:tc>
-                  <a:txBody>
-                    <a:bodyPr/>
-                    <a:lstStyle/>
-                    <a:p>
-                      <a:pPr algn="l"/>
-                      <a:r>
-                        <a:rPr sz="1000" b="0">
-                          <a:solidFill>
-                            <a:srgbClr val="1D1B43"/>
-                          </a:solidFill>
-                          <a:latin typeface="Calibri"/>
-                        </a:rPr>
-                        <a:t>GOIANESIA/GO</a:t>
-                      </a:r>
-                    </a:p>
-                  </a:txBody>
-                  <a:tcPr>
-                    <a:solidFill>
-                      <a:srgbClr val="F2F2F2"/>
-                    </a:solidFill>
-                  </a:tcPr>
-                </a:tc>
-                <a:tc>
-                  <a:txBody>
-                    <a:bodyPr/>
-                    <a:lstStyle/>
-                    <a:p>
-                      <a:pPr algn="l"/>
-                      <a:r>
-                        <a:rPr sz="1000" b="0">
-                          <a:solidFill>
-                            <a:srgbClr val="1D1B43"/>
-                          </a:solidFill>
-                          <a:latin typeface="Calibri"/>
-                        </a:rPr>
-                        <a:t>06/04/2026</a:t>
-                      </a:r>
-                    </a:p>
-                  </a:txBody>
-                  <a:tcPr>
-                    <a:solidFill>
-                      <a:srgbClr val="F2F2F2"/>
-                    </a:solidFill>
-                  </a:tcPr>
-                </a:tc>
-                <a:tc>
-                  <a:txBody>
-                    <a:bodyPr/>
-                    <a:lstStyle/>
-                    <a:p>
-                      <a:pPr algn="l"/>
-                      <a:r>
-                        <a:rPr sz="1000" b="0">
-                          <a:solidFill>
-                            <a:srgbClr val="1D1B43"/>
-                          </a:solidFill>
-                          <a:latin typeface="Calibri"/>
-                        </a:rPr>
-                        <a:t>ENTREGUE FORA DO PRAZO</a:t>
-                      </a:r>
-                    </a:p>
-                  </a:txBody>
-                  <a:tcPr>
-                    <a:solidFill>
-                      <a:srgbClr val="F2F2F2"/>
-                    </a:solidFill>
-                  </a:tcPr>
-                </a:tc>
-              </a:tr>
-              <a:tr h="384048">
-                <a:tc>
-                  <a:txBody>
-                    <a:bodyPr/>
-                    <a:lstStyle/>
-                    <a:p>
-                      <a:pPr algn="l"/>
-                      <a:r>
-                        <a:rPr sz="1000" b="0">
-                          <a:solidFill>
-                            <a:srgbClr val="1D1B43"/>
-                          </a:solidFill>
-                          <a:latin typeface="Calibri"/>
-                        </a:rPr>
-                        <a:t>276918</a:t>
-                      </a:r>
-                    </a:p>
-                  </a:txBody>
-                  <a:tcPr>
-                    <a:solidFill>
-                      <a:srgbClr val="FFFFFF"/>
-                    </a:solidFill>
-                  </a:tcPr>
-                </a:tc>
-                <a:tc>
-                  <a:txBody>
-                    <a:bodyPr/>
-                    <a:lstStyle/>
-                    <a:p>
-                      <a:pPr algn="l"/>
-                      <a:r>
-                        <a:rPr sz="1000" b="0">
-                          <a:solidFill>
-                            <a:srgbClr val="1D1B43"/>
-                          </a:solidFill>
-                          <a:latin typeface="Calibri"/>
-                        </a:rPr>
-                        <a:t>ELETROCENTER MOVEIS - CARMO DO RIO VERDE / GO</a:t>
-                      </a:r>
-                    </a:p>
-                  </a:txBody>
-                  <a:tcPr>
-                    <a:solidFill>
-                      <a:srgbClr val="FFFFFF"/>
-                    </a:solidFill>
-                  </a:tcPr>
-                </a:tc>
-                <a:tc>
-                  <a:txBody>
-                    <a:bodyPr/>
-                    <a:lstStyle/>
-                    <a:p>
-                      <a:pPr algn="l"/>
-                      <a:r>
-                        <a:rPr sz="1000" b="0">
-                          <a:solidFill>
-                            <a:srgbClr val="1D1B43"/>
-                          </a:solidFill>
-                          <a:latin typeface="Calibri"/>
-                        </a:rPr>
-                        <a:t>CARMO DO RIO VERDE/GO</a:t>
-                      </a:r>
-                    </a:p>
-                  </a:txBody>
-                  <a:tcPr>
-                    <a:solidFill>
-                      <a:srgbClr val="FFFFFF"/>
-                    </a:solidFill>
-                  </a:tcPr>
-                </a:tc>
-                <a:tc>
-                  <a:txBody>
-                    <a:bodyPr/>
-                    <a:lstStyle/>
-                    <a:p>
-                      <a:pPr algn="l"/>
-                      <a:r>
-                        <a:rPr sz="1000" b="0">
-                          <a:solidFill>
-                            <a:srgbClr val="1D1B43"/>
-                          </a:solidFill>
-                          <a:latin typeface="Calibri"/>
-                        </a:rPr>
-                        <a:t>06/04/2026</a:t>
-                      </a:r>
-                    </a:p>
-                  </a:txBody>
-                  <a:tcPr>
-                    <a:solidFill>
-                      <a:srgbClr val="FFFFFF"/>
-                    </a:solidFill>
-                  </a:tcPr>
-                </a:tc>
-                <a:tc>
-                  <a:txBody>
-                    <a:bodyPr/>
-                    <a:lstStyle/>
-                    <a:p>
-                      <a:pPr algn="l"/>
-                      <a:r>
-                        <a:rPr sz="1000" b="0">
-                          <a:solidFill>
-                            <a:srgbClr val="1D1B43"/>
-                          </a:solidFill>
-                          <a:latin typeface="Calibri"/>
-                        </a:rPr>
-                        <a:t>ENTREGUE FORA DO PRAZO</a:t>
-                      </a:r>
-                    </a:p>
-                  </a:txBody>
-                  <a:tcPr>
-                    <a:solidFill>
-                      <a:srgbClr val="FFFFFF"/>
-                    </a:solidFill>
-                  </a:tcPr>
-                </a:tc>
-              </a:tr>
-              <a:tr h="384048">
-                <a:tc>
-                  <a:txBody>
-                    <a:bodyPr/>
-                    <a:lstStyle/>
-                    <a:p>
-                      <a:pPr algn="l"/>
-                      <a:r>
-                        <a:rPr sz="1000" b="0">
-                          <a:solidFill>
-                            <a:srgbClr val="1D1B43"/>
-                          </a:solidFill>
-                          <a:latin typeface="Calibri"/>
-                        </a:rPr>
-                        <a:t>276999</a:t>
-                      </a:r>
-                    </a:p>
-                  </a:txBody>
-                  <a:tcPr>
-                    <a:solidFill>
-                      <a:srgbClr val="F2F2F2"/>
-                    </a:solidFill>
-                  </a:tcPr>
-                </a:tc>
-                <a:tc>
-                  <a:txBody>
-                    <a:bodyPr/>
-                    <a:lstStyle/>
-                    <a:p>
-                      <a:pPr algn="l"/>
-                      <a:r>
-                        <a:rPr sz="1000" b="0">
-                          <a:solidFill>
-                            <a:srgbClr val="1D1B43"/>
-                          </a:solidFill>
-                          <a:latin typeface="Calibri"/>
-                        </a:rPr>
-                        <a:t>MARIA AUGUSTA SILVEI - FELIZ NATAL / MT</a:t>
-                      </a:r>
-                    </a:p>
-                  </a:txBody>
-                  <a:tcPr>
-                    <a:solidFill>
-                      <a:srgbClr val="F2F2F2"/>
-                    </a:solidFill>
-                  </a:tcPr>
-                </a:tc>
-                <a:tc>
-                  <a:txBody>
-                    <a:bodyPr/>
-                    <a:lstStyle/>
-                    <a:p>
-                      <a:pPr algn="l"/>
-                      <a:r>
-                        <a:rPr sz="1000" b="0">
-                          <a:solidFill>
-                            <a:srgbClr val="1D1B43"/>
-                          </a:solidFill>
-                          <a:latin typeface="Calibri"/>
-                        </a:rPr>
-                        <a:t>FELIZ NATAL/MT</a:t>
-                      </a:r>
-                    </a:p>
-                  </a:txBody>
-                  <a:tcPr>
-                    <a:solidFill>
-                      <a:srgbClr val="F2F2F2"/>
-                    </a:solidFill>
-                  </a:tcPr>
-                </a:tc>
-                <a:tc>
-                  <a:txBody>
-                    <a:bodyPr/>
-                    <a:lstStyle/>
-                    <a:p>
-                      <a:pPr algn="l"/>
-                      <a:r>
-                        <a:rPr sz="1000" b="0">
-                          <a:solidFill>
-                            <a:srgbClr val="1D1B43"/>
-                          </a:solidFill>
-                          <a:latin typeface="Calibri"/>
-                        </a:rPr>
-                        <a:t>14/04/2026</a:t>
-                      </a:r>
-                    </a:p>
-                  </a:txBody>
-                  <a:tcPr>
-                    <a:solidFill>
-                      <a:srgbClr val="F2F2F2"/>
-                    </a:solidFill>
-                  </a:tcPr>
-                </a:tc>
-                <a:tc>
-                  <a:txBody>
-                    <a:bodyPr/>
-                    <a:lstStyle/>
-                    <a:p>
-                      <a:pPr algn="l"/>
-                      <a:r>
-                        <a:rPr sz="1000" b="0">
-                          <a:solidFill>
-                            <a:srgbClr val="1D1B43"/>
-                          </a:solidFill>
-                          <a:latin typeface="Calibri"/>
-                        </a:rPr>
-                        <a:t>ENTREGUE FORA DO PRAZO</a:t>
-                      </a:r>
-                    </a:p>
-                  </a:txBody>
-                  <a:tcPr>
-                    <a:solidFill>
-                      <a:srgbClr val="F2F2F2"/>
-                    </a:solidFill>
-                  </a:tcPr>
-                </a:tc>
-              </a:tr>
-              <a:tr h="384048">
-                <a:tc>
-                  <a:txBody>
-                    <a:bodyPr/>
-                    <a:lstStyle/>
-                    <a:p>
-                      <a:pPr algn="l"/>
-                      <a:r>
-                        <a:rPr sz="1000" b="0">
-                          <a:solidFill>
-                            <a:srgbClr val="1D1B43"/>
-                          </a:solidFill>
-                          <a:latin typeface="Calibri"/>
-                        </a:rPr>
-                        <a:t>277092</a:t>
-                      </a:r>
-                    </a:p>
-                  </a:txBody>
-                  <a:tcPr>
-                    <a:solidFill>
-                      <a:srgbClr val="FFFFFF"/>
-                    </a:solidFill>
-                  </a:tcPr>
-                </a:tc>
-                <a:tc>
-                  <a:txBody>
-                    <a:bodyPr/>
-                    <a:lstStyle/>
-                    <a:p>
-                      <a:pPr algn="l"/>
-                      <a:r>
-                        <a:rPr sz="1000" b="0">
-                          <a:solidFill>
-                            <a:srgbClr val="1D1B43"/>
-                          </a:solidFill>
-                          <a:latin typeface="Calibri"/>
-                        </a:rPr>
-                        <a:t>J.R. VAZ CARNEIRO - GOIANESIA / GO</a:t>
-                      </a:r>
-                    </a:p>
-                  </a:txBody>
-                  <a:tcPr>
-                    <a:solidFill>
-                      <a:srgbClr val="FFFFFF"/>
-                    </a:solidFill>
-                  </a:tcPr>
-                </a:tc>
-                <a:tc>
-                  <a:txBody>
-                    <a:bodyPr/>
-                    <a:lstStyle/>
-                    <a:p>
-                      <a:pPr algn="l"/>
-                      <a:r>
-                        <a:rPr sz="1000" b="0">
-                          <a:solidFill>
-                            <a:srgbClr val="1D1B43"/>
-                          </a:solidFill>
-                          <a:latin typeface="Calibri"/>
-                        </a:rPr>
-                        <a:t>GOIANESIA/GO</a:t>
-                      </a:r>
-                    </a:p>
-                  </a:txBody>
-                  <a:tcPr>
-                    <a:solidFill>
-                      <a:srgbClr val="FFFFFF"/>
-                    </a:solidFill>
-                  </a:tcPr>
-                </a:tc>
-                <a:tc>
-                  <a:txBody>
-                    <a:bodyPr/>
-                    <a:lstStyle/>
-                    <a:p>
-                      <a:pPr algn="l"/>
-                      <a:r>
-                        <a:rPr sz="1000" b="0">
-                          <a:solidFill>
-                            <a:srgbClr val="1D1B43"/>
-                          </a:solidFill>
-                          <a:latin typeface="Calibri"/>
-                        </a:rPr>
-                        <a:t>10/04/2026</a:t>
-                      </a:r>
-                    </a:p>
-                  </a:txBody>
-                  <a:tcPr>
-                    <a:solidFill>
-                      <a:srgbClr val="FFFFFF"/>
-                    </a:solidFill>
-                  </a:tcPr>
-                </a:tc>
-                <a:tc>
-                  <a:txBody>
-                    <a:bodyPr/>
-                    <a:lstStyle/>
-                    <a:p>
-                      <a:pPr algn="l"/>
-                      <a:r>
-                        <a:rPr sz="1000" b="0">
-                          <a:solidFill>
-                            <a:srgbClr val="1D1B43"/>
-                          </a:solidFill>
-                          <a:latin typeface="Calibri"/>
-                        </a:rPr>
-                        <a:t>ENTREGUE FORA DO PRAZO</a:t>
-                      </a:r>
-                    </a:p>
-                  </a:txBody>
-                  <a:tcPr>
-                    <a:solidFill>
-                      <a:srgbClr val="FFFFFF"/>
-                    </a:solidFill>
-                  </a:tcPr>
-                </a:tc>
-              </a:tr>
-              <a:tr h="384048">
-                <a:tc>
-                  <a:txBody>
-                    <a:bodyPr/>
-                    <a:lstStyle/>
-                    <a:p>
-                      <a:pPr algn="l"/>
-                      <a:r>
-                        <a:rPr sz="1000" b="0">
-                          <a:solidFill>
-                            <a:srgbClr val="1D1B43"/>
-                          </a:solidFill>
-                          <a:latin typeface="Calibri"/>
-                        </a:rPr>
-                        <a:t>277552</a:t>
-                      </a:r>
-                    </a:p>
-                  </a:txBody>
-                  <a:tcPr>
-                    <a:solidFill>
-                      <a:srgbClr val="F2F2F2"/>
-                    </a:solidFill>
-                  </a:tcPr>
-                </a:tc>
-                <a:tc>
-                  <a:txBody>
-                    <a:bodyPr/>
-                    <a:lstStyle/>
-                    <a:p>
-                      <a:pPr algn="l"/>
-                      <a:r>
-                        <a:rPr sz="1000" b="0">
-                          <a:solidFill>
-                            <a:srgbClr val="1D1B43"/>
-                          </a:solidFill>
-                          <a:latin typeface="Calibri"/>
-                        </a:rPr>
-                        <a:t>O S NOGUEIRA - CACU / GO</a:t>
-                      </a:r>
-                    </a:p>
-                  </a:txBody>
-                  <a:tcPr>
-                    <a:solidFill>
-                      <a:srgbClr val="F2F2F2"/>
-                    </a:solidFill>
-                  </a:tcPr>
-                </a:tc>
-                <a:tc>
-                  <a:txBody>
-                    <a:bodyPr/>
-                    <a:lstStyle/>
-                    <a:p>
-                      <a:pPr algn="l"/>
-                      <a:r>
-                        <a:rPr sz="1000" b="0">
-                          <a:solidFill>
-                            <a:srgbClr val="1D1B43"/>
-                          </a:solidFill>
-                          <a:latin typeface="Calibri"/>
-                        </a:rPr>
-                        <a:t>CACU/GO</a:t>
-                      </a:r>
-                    </a:p>
-                  </a:txBody>
-                  <a:tcPr>
-                    <a:solidFill>
-                      <a:srgbClr val="F2F2F2"/>
-                    </a:solidFill>
-                  </a:tcPr>
-                </a:tc>
-                <a:tc>
-                  <a:txBody>
-                    <a:bodyPr/>
-                    <a:lstStyle/>
-                    <a:p>
-                      <a:pPr algn="l"/>
-                      <a:r>
-                        <a:rPr sz="1000" b="0">
-                          <a:solidFill>
-                            <a:srgbClr val="1D1B43"/>
-                          </a:solidFill>
-                          <a:latin typeface="Calibri"/>
-                        </a:rPr>
-                        <a:t>15/04/2026</a:t>
-                      </a:r>
-                    </a:p>
-                  </a:txBody>
-                  <a:tcPr>
-                    <a:solidFill>
-                      <a:srgbClr val="F2F2F2"/>
-                    </a:solidFill>
-                  </a:tcPr>
-                </a:tc>
-                <a:tc>
-                  <a:txBody>
-                    <a:bodyPr/>
-                    <a:lstStyle/>
-                    <a:p>
-                      <a:pPr algn="l"/>
-                      <a:r>
-                        <a:rPr sz="1000" b="0">
-                          <a:solidFill>
-                            <a:srgbClr val="1D1B43"/>
-                          </a:solidFill>
-                          <a:latin typeface="Calibri"/>
-                        </a:rPr>
-                        <a:t>ENTREGUE FORA DO PRAZO</a:t>
-                      </a:r>
-                    </a:p>
-                  </a:txBody>
-                  <a:tcPr>
-                    <a:solidFill>
-                      <a:srgbClr val="F2F2F2"/>
-                    </a:solidFill>
-                  </a:tcPr>
-                </a:tc>
-              </a:tr>
-              <a:tr h="384048">
-                <a:tc>
-                  <a:txBody>
-                    <a:bodyPr/>
-                    <a:lstStyle/>
-                    <a:p>
-                      <a:pPr algn="l"/>
-                      <a:r>
-                        <a:rPr sz="1000" b="0">
-                          <a:solidFill>
-                            <a:srgbClr val="1D1B43"/>
-                          </a:solidFill>
-                          <a:latin typeface="Calibri"/>
-                        </a:rPr>
-                        <a:t>278355</a:t>
-                      </a:r>
-                    </a:p>
-                  </a:txBody>
-                  <a:tcPr>
-                    <a:solidFill>
-                      <a:srgbClr val="FFFFFF"/>
-                    </a:solidFill>
-                  </a:tcPr>
-                </a:tc>
-                <a:tc>
-                  <a:txBody>
-                    <a:bodyPr/>
-                    <a:lstStyle/>
-                    <a:p>
-                      <a:pPr algn="l"/>
-                      <a:r>
-                        <a:rPr sz="1000" b="0">
-                          <a:solidFill>
-                            <a:srgbClr val="1D1B43"/>
-                          </a:solidFill>
-                          <a:latin typeface="Calibri"/>
-                        </a:rPr>
-                        <a:t>ROSEMERI HEPP EIRELL - MARECHAL CANDIDO RONDON /</a:t>
-                      </a:r>
-                    </a:p>
-                  </a:txBody>
-                  <a:tcPr>
-                    <a:solidFill>
-                      <a:srgbClr val="FFFFFF"/>
-                    </a:solidFill>
-                  </a:tcPr>
-                </a:tc>
-                <a:tc>
-                  <a:txBody>
-                    <a:bodyPr/>
-                    <a:lstStyle/>
-                    <a:p>
-                      <a:pPr algn="l"/>
-                      <a:r>
-                        <a:rPr sz="1000" b="0">
-                          <a:solidFill>
-                            <a:srgbClr val="1D1B43"/>
-                          </a:solidFill>
-                          <a:latin typeface="Calibri"/>
-                        </a:rPr>
-                        <a:t>MARECHAL CANDIDO RONDON/PR</a:t>
-                      </a:r>
-                    </a:p>
-                  </a:txBody>
-                  <a:tcPr>
-                    <a:solidFill>
-                      <a:srgbClr val="FFFFFF"/>
-                    </a:solidFill>
-                  </a:tcPr>
-                </a:tc>
-                <a:tc>
-                  <a:txBody>
-                    <a:bodyPr/>
-                    <a:lstStyle/>
-                    <a:p>
-                      <a:pPr algn="l"/>
-                      <a:r>
-                        <a:rPr sz="1000" b="0">
-                          <a:solidFill>
-                            <a:srgbClr val="1D1B43"/>
-                          </a:solidFill>
-                          <a:latin typeface="Calibri"/>
-                        </a:rPr>
-                        <a:t>14/04/2026</a:t>
+                        <a:t>13/05/2026</a:t>
                       </a:r>
                     </a:p>
                   </a:txBody>
@@ -6661,7 +5959,7 @@
         </p:nvGraphicFramePr>
         <p:xfrm>
           <a:off x="731520" y="1920240"/>
-          <a:ext cx="10698480" cy="3200400"/>
+          <a:ext cx="10698480" cy="3657600"/>
         </p:xfrm>
         <a:graphic>
           <a:graphicData uri="http://schemas.openxmlformats.org/drawingml/2006/table">
@@ -6854,7 +6152,7 @@
                           </a:solidFill>
                           <a:latin typeface="Calibri"/>
                         </a:rPr>
-                        <a:t>30</a:t>
+                        <a:t>56</a:t>
                       </a:r>
                     </a:p>
                   </a:txBody>
@@ -6877,7 +6175,7 @@
                           </a:solidFill>
                           <a:latin typeface="Calibri"/>
                         </a:rPr>
-                        <a:t>30</a:t>
+                        <a:t>53</a:t>
                       </a:r>
                     </a:p>
                   </a:txBody>
@@ -6900,7 +6198,7 @@
                           </a:solidFill>
                           <a:latin typeface="Calibri"/>
                         </a:rPr>
-                        <a:t>0</a:t>
+                        <a:t>3</a:t>
                       </a:r>
                     </a:p>
                   </a:txBody>
@@ -6923,7 +6221,7 @@
                           </a:solidFill>
                           <a:latin typeface="Calibri"/>
                         </a:rPr>
-                        <a:t>100.0%</a:t>
+                        <a:t>94.6%</a:t>
                       </a:r>
                     </a:p>
                   </a:txBody>
@@ -6946,7 +6244,7 @@
                           </a:solidFill>
                           <a:latin typeface="Calibri"/>
                         </a:rPr>
-                        <a:t>Excelente</a:t>
+                        <a:t>Regular</a:t>
                       </a:r>
                     </a:p>
                   </a:txBody>
@@ -6994,7 +6292,7 @@
                           </a:solidFill>
                           <a:latin typeface="Calibri"/>
                         </a:rPr>
-                        <a:t>26</a:t>
+                        <a:t>8</a:t>
                       </a:r>
                     </a:p>
                   </a:txBody>
@@ -7017,7 +6315,7 @@
                           </a:solidFill>
                           <a:latin typeface="Calibri"/>
                         </a:rPr>
-                        <a:t>19</a:t>
+                        <a:t>8</a:t>
                       </a:r>
                     </a:p>
                   </a:txBody>
@@ -7040,7 +6338,7 @@
                           </a:solidFill>
                           <a:latin typeface="Calibri"/>
                         </a:rPr>
-                        <a:t>7</a:t>
+                        <a:t>0</a:t>
                       </a:r>
                     </a:p>
                   </a:txBody>
@@ -7063,7 +6361,7 @@
                           </a:solidFill>
                           <a:latin typeface="Calibri"/>
                         </a:rPr>
-                        <a:t>73.1%</a:t>
+                        <a:t>100.0%</a:t>
                       </a:r>
                     </a:p>
                   </a:txBody>
@@ -7086,7 +6384,7 @@
                           </a:solidFill>
                           <a:latin typeface="Calibri"/>
                         </a:rPr>
-                        <a:t>Atencao</a:t>
+                        <a:t>Excelente</a:t>
                       </a:r>
                     </a:p>
                   </a:txBody>
@@ -7111,7 +6409,7 @@
                           </a:solidFill>
                           <a:latin typeface="Calibri"/>
                         </a:rPr>
-                        <a:t>MT</a:t>
+                        <a:t>SC</a:t>
                       </a:r>
                     </a:p>
                   </a:txBody>
@@ -7134,7 +6432,7 @@
                           </a:solidFill>
                           <a:latin typeface="Calibri"/>
                         </a:rPr>
-                        <a:t>5</a:t>
+                        <a:t>6</a:t>
                       </a:r>
                     </a:p>
                   </a:txBody>
@@ -7157,7 +6455,7 @@
                           </a:solidFill>
                           <a:latin typeface="Calibri"/>
                         </a:rPr>
-                        <a:t>4</a:t>
+                        <a:t>6</a:t>
                       </a:r>
                     </a:p>
                   </a:txBody>
@@ -7180,7 +6478,7 @@
                           </a:solidFill>
                           <a:latin typeface="Calibri"/>
                         </a:rPr>
-                        <a:t>1</a:t>
+                        <a:t>0</a:t>
                       </a:r>
                     </a:p>
                   </a:txBody>
@@ -7203,7 +6501,7 @@
                           </a:solidFill>
                           <a:latin typeface="Calibri"/>
                         </a:rPr>
-                        <a:t>80.0%</a:t>
+                        <a:t>100.0%</a:t>
                       </a:r>
                     </a:p>
                   </a:txBody>
@@ -7226,7 +6524,7 @@
                           </a:solidFill>
                           <a:latin typeface="Calibri"/>
                         </a:rPr>
-                        <a:t>Atencao</a:t>
+                        <a:t>Excelente</a:t>
                       </a:r>
                     </a:p>
                   </a:txBody>
@@ -7274,7 +6572,7 @@
                           </a:solidFill>
                           <a:latin typeface="Calibri"/>
                         </a:rPr>
-                        <a:t>5</a:t>
+                        <a:t>4</a:t>
                       </a:r>
                     </a:p>
                   </a:txBody>
@@ -7297,7 +6595,7 @@
                           </a:solidFill>
                           <a:latin typeface="Calibri"/>
                         </a:rPr>
-                        <a:t>5</a:t>
+                        <a:t>4</a:t>
                       </a:r>
                     </a:p>
                   </a:txBody>
@@ -7391,7 +6689,7 @@
                           </a:solidFill>
                           <a:latin typeface="Calibri"/>
                         </a:rPr>
-                        <a:t>SC</a:t>
+                        <a:t>DF</a:t>
                       </a:r>
                     </a:p>
                   </a:txBody>
@@ -7414,7 +6712,7 @@
                           </a:solidFill>
                           <a:latin typeface="Calibri"/>
                         </a:rPr>
-                        <a:t>5</a:t>
+                        <a:t>3</a:t>
                       </a:r>
                     </a:p>
                   </a:txBody>
@@ -7437,7 +6735,7 @@
                           </a:solidFill>
                           <a:latin typeface="Calibri"/>
                         </a:rPr>
-                        <a:t>5</a:t>
+                        <a:t>3</a:t>
                       </a:r>
                     </a:p>
                   </a:txBody>
@@ -7577,82 +6875,222 @@
                           </a:solidFill>
                           <a:latin typeface="Calibri"/>
                         </a:rPr>
+                        <a:t>3</a:t>
+                      </a:r>
+                    </a:p>
+                  </a:txBody>
+                  <a:tcPr>
+                    <a:solidFill>
+                      <a:srgbClr val="F2F2F2"/>
+                    </a:solidFill>
+                  </a:tcPr>
+                </a:tc>
+                <a:tc>
+                  <a:txBody>
+                    <a:bodyPr/>
+                    <a:lstStyle/>
+                    <a:p>
+                      <a:pPr algn="l"/>
+                      <a:r>
+                        <a:rPr sz="1000" b="0">
+                          <a:solidFill>
+                            <a:srgbClr val="1D1B43"/>
+                          </a:solidFill>
+                          <a:latin typeface="Calibri"/>
+                        </a:rPr>
+                        <a:t>0</a:t>
+                      </a:r>
+                    </a:p>
+                  </a:txBody>
+                  <a:tcPr>
+                    <a:solidFill>
+                      <a:srgbClr val="F2F2F2"/>
+                    </a:solidFill>
+                  </a:tcPr>
+                </a:tc>
+                <a:tc>
+                  <a:txBody>
+                    <a:bodyPr/>
+                    <a:lstStyle/>
+                    <a:p>
+                      <a:pPr algn="l"/>
+                      <a:r>
+                        <a:rPr sz="1000" b="0">
+                          <a:solidFill>
+                            <a:srgbClr val="1D1B43"/>
+                          </a:solidFill>
+                          <a:latin typeface="Calibri"/>
+                        </a:rPr>
+                        <a:t>100.0%</a:t>
+                      </a:r>
+                    </a:p>
+                  </a:txBody>
+                  <a:tcPr>
+                    <a:solidFill>
+                      <a:srgbClr val="F2F2F2"/>
+                    </a:solidFill>
+                  </a:tcPr>
+                </a:tc>
+                <a:tc>
+                  <a:txBody>
+                    <a:bodyPr/>
+                    <a:lstStyle/>
+                    <a:p>
+                      <a:pPr algn="l"/>
+                      <a:r>
+                        <a:rPr sz="1000" b="0">
+                          <a:solidFill>
+                            <a:srgbClr val="1D1B43"/>
+                          </a:solidFill>
+                          <a:latin typeface="Calibri"/>
+                        </a:rPr>
+                        <a:t>Excelente</a:t>
+                      </a:r>
+                    </a:p>
+                  </a:txBody>
+                  <a:tcPr>
+                    <a:solidFill>
+                      <a:srgbClr val="F2F2F2"/>
+                    </a:solidFill>
+                  </a:tcPr>
+                </a:tc>
+              </a:tr>
+              <a:tr h="457200">
+                <a:tc>
+                  <a:txBody>
+                    <a:bodyPr/>
+                    <a:lstStyle/>
+                    <a:p>
+                      <a:pPr algn="l"/>
+                      <a:r>
+                        <a:rPr sz="1000" b="0">
+                          <a:solidFill>
+                            <a:srgbClr val="1D1B43"/>
+                          </a:solidFill>
+                          <a:latin typeface="Calibri"/>
+                        </a:rPr>
+                        <a:t>RJ</a:t>
+                      </a:r>
+                    </a:p>
+                  </a:txBody>
+                  <a:tcPr>
+                    <a:solidFill>
+                      <a:srgbClr val="FFFFFF"/>
+                    </a:solidFill>
+                  </a:tcPr>
+                </a:tc>
+                <a:tc>
+                  <a:txBody>
+                    <a:bodyPr/>
+                    <a:lstStyle/>
+                    <a:p>
+                      <a:pPr algn="l"/>
+                      <a:r>
+                        <a:rPr sz="1000" b="0">
+                          <a:solidFill>
+                            <a:srgbClr val="1D1B43"/>
+                          </a:solidFill>
+                          <a:latin typeface="Calibri"/>
+                        </a:rPr>
                         <a:t>2</a:t>
                       </a:r>
                     </a:p>
                   </a:txBody>
                   <a:tcPr>
                     <a:solidFill>
-                      <a:srgbClr val="F2F2F2"/>
-                    </a:solidFill>
-                  </a:tcPr>
-                </a:tc>
-                <a:tc>
-                  <a:txBody>
-                    <a:bodyPr/>
-                    <a:lstStyle/>
-                    <a:p>
-                      <a:pPr algn="l"/>
-                      <a:r>
-                        <a:rPr sz="1000" b="0">
-                          <a:solidFill>
-                            <a:srgbClr val="1D1B43"/>
-                          </a:solidFill>
-                          <a:latin typeface="Calibri"/>
-                        </a:rPr>
-                        <a:t>1</a:t>
-                      </a:r>
-                    </a:p>
-                  </a:txBody>
-                  <a:tcPr>
-                    <a:solidFill>
-                      <a:srgbClr val="F2F2F2"/>
-                    </a:solidFill>
-                  </a:tcPr>
-                </a:tc>
-                <a:tc>
-                  <a:txBody>
-                    <a:bodyPr/>
-                    <a:lstStyle/>
-                    <a:p>
-                      <a:pPr algn="l"/>
-                      <a:r>
-                        <a:rPr sz="1000" b="0">
-                          <a:solidFill>
-                            <a:srgbClr val="1D1B43"/>
-                          </a:solidFill>
-                          <a:latin typeface="Calibri"/>
-                        </a:rPr>
-                        <a:t>66.7%</a:t>
-                      </a:r>
-                    </a:p>
-                  </a:txBody>
-                  <a:tcPr>
-                    <a:solidFill>
-                      <a:srgbClr val="F2F2F2"/>
-                    </a:solidFill>
-                  </a:tcPr>
-                </a:tc>
-                <a:tc>
-                  <a:txBody>
-                    <a:bodyPr/>
-                    <a:lstStyle/>
-                    <a:p>
-                      <a:pPr algn="l"/>
-                      <a:r>
-                        <a:rPr sz="1000" b="0">
-                          <a:solidFill>
-                            <a:srgbClr val="1D1B43"/>
-                          </a:solidFill>
-                          <a:latin typeface="Calibri"/>
-                        </a:rPr>
-                        <a:t>Atencao</a:t>
-                      </a:r>
-                    </a:p>
-                  </a:txBody>
-                  <a:tcPr>
-                    <a:solidFill>
-                      <a:srgbClr val="F2F2F2"/>
+                      <a:srgbClr val="FFFFFF"/>
+                    </a:solidFill>
+                  </a:tcPr>
+                </a:tc>
+                <a:tc>
+                  <a:txBody>
+                    <a:bodyPr/>
+                    <a:lstStyle/>
+                    <a:p>
+                      <a:pPr algn="l"/>
+                      <a:r>
+                        <a:rPr sz="1000" b="0">
+                          <a:solidFill>
+                            <a:srgbClr val="1D1B43"/>
+                          </a:solidFill>
+                          <a:latin typeface="Calibri"/>
+                        </a:rPr>
+                        <a:t>2</a:t>
+                      </a:r>
+                    </a:p>
+                  </a:txBody>
+                  <a:tcPr>
+                    <a:solidFill>
+                      <a:srgbClr val="FFFFFF"/>
+                    </a:solidFill>
+                  </a:tcPr>
+                </a:tc>
+                <a:tc>
+                  <a:txBody>
+                    <a:bodyPr/>
+                    <a:lstStyle/>
+                    <a:p>
+                      <a:pPr algn="l"/>
+                      <a:r>
+                        <a:rPr sz="1000" b="0">
+                          <a:solidFill>
+                            <a:srgbClr val="1D1B43"/>
+                          </a:solidFill>
+                          <a:latin typeface="Calibri"/>
+                        </a:rPr>
+                        <a:t>0</a:t>
+                      </a:r>
+                    </a:p>
+                  </a:txBody>
+                  <a:tcPr>
+                    <a:solidFill>
+                      <a:srgbClr val="FFFFFF"/>
+                    </a:solidFill>
+                  </a:tcPr>
+                </a:tc>
+                <a:tc>
+                  <a:txBody>
+                    <a:bodyPr/>
+                    <a:lstStyle/>
+                    <a:p>
+                      <a:pPr algn="l"/>
+                      <a:r>
+                        <a:rPr sz="1000" b="0">
+                          <a:solidFill>
+                            <a:srgbClr val="1D1B43"/>
+                          </a:solidFill>
+                          <a:latin typeface="Calibri"/>
+                        </a:rPr>
+                        <a:t>100.0%</a:t>
+                      </a:r>
+                    </a:p>
+                  </a:txBody>
+                  <a:tcPr>
+                    <a:solidFill>
+                      <a:srgbClr val="FFFFFF"/>
+                    </a:solidFill>
+                  </a:tcPr>
+                </a:tc>
+                <a:tc>
+                  <a:txBody>
+                    <a:bodyPr/>
+                    <a:lstStyle/>
+                    <a:p>
+                      <a:pPr algn="l"/>
+                      <a:r>
+                        <a:rPr sz="1000" b="0">
+                          <a:solidFill>
+                            <a:srgbClr val="1D1B43"/>
+                          </a:solidFill>
+                          <a:latin typeface="Calibri"/>
+                        </a:rPr>
+                        <a:t>Excelente</a:t>
+                      </a:r>
+                    </a:p>
+                  </a:txBody>
+                  <a:tcPr>
+                    <a:solidFill>
+                      <a:srgbClr val="FFFFFF"/>
                     </a:solidFill>
                   </a:tcPr>
                 </a:tc>
@@ -7741,7 +7179,7 @@
                 </a:solidFill>
                 <a:latin typeface="Calibri"/>
               </a:rPr>
-              <a:t>TOP DESTINATARIOS (66 pontos)</a:t>
+              <a:t>TOP DESTINATARIOS (58 pontos)</a:t>
             </a:r>
           </a:p>
         </p:txBody>
@@ -8016,7 +7454,7 @@
                           </a:solidFill>
                           <a:latin typeface="Calibri"/>
                         </a:rPr>
-                        <a:t>TRANSNOBREGA - SAO PAULO / SP</a:t>
+                        <a:t>VELOCARGAS BRASIL E - GUARULHOS / SP</a:t>
                       </a:r>
                     </a:p>
                   </a:txBody>
@@ -8039,7 +7477,7 @@
                           </a:solidFill>
                           <a:latin typeface="Calibri"/>
                         </a:rPr>
-                        <a:t>3</a:t>
+                        <a:t>10</a:t>
                       </a:r>
                     </a:p>
                   </a:txBody>
@@ -8062,7 +7500,7 @@
                           </a:solidFill>
                           <a:latin typeface="Calibri"/>
                         </a:rPr>
-                        <a:t>3</a:t>
+                        <a:t>10</a:t>
                       </a:r>
                     </a:p>
                   </a:txBody>
@@ -8179,7 +7617,7 @@
                           </a:solidFill>
                           <a:latin typeface="Calibri"/>
                         </a:rPr>
-                        <a:t>WILSON LUIS TRANSPOR - GUARULHOS / SP</a:t>
+                        <a:t>VAILOG TRANSPORTES E - SAO PAULO / SP</a:t>
                       </a:r>
                     </a:p>
                   </a:txBody>
@@ -8202,7 +7640,7 @@
                           </a:solidFill>
                           <a:latin typeface="Calibri"/>
                         </a:rPr>
-                        <a:t>3</a:t>
+                        <a:t>6</a:t>
                       </a:r>
                     </a:p>
                   </a:txBody>
@@ -8225,7 +7663,7 @@
                           </a:solidFill>
                           <a:latin typeface="Calibri"/>
                         </a:rPr>
-                        <a:t>3</a:t>
+                        <a:t>6</a:t>
                       </a:r>
                     </a:p>
                   </a:txBody>
@@ -8365,7 +7803,7 @@
                           </a:solidFill>
                           <a:latin typeface="Calibri"/>
                         </a:rPr>
-                        <a:t>2</a:t>
+                        <a:t>4</a:t>
                       </a:r>
                     </a:p>
                   </a:txBody>
@@ -8388,7 +7826,7 @@
                           </a:solidFill>
                           <a:latin typeface="Calibri"/>
                         </a:rPr>
-                        <a:t>2</a:t>
+                        <a:t>4</a:t>
                       </a:r>
                     </a:p>
                   </a:txBody>
@@ -8505,7 +7943,7 @@
                           </a:solidFill>
                           <a:latin typeface="Calibri"/>
                         </a:rPr>
-                        <a:t>VAILOG TRANSPORTES E - SAO PAULO / SP</a:t>
+                        <a:t>WILSON LUIS TRANSPOR - GUARULHOS / SP</a:t>
                       </a:r>
                     </a:p>
                   </a:txBody>
@@ -8528,7 +7966,7 @@
                           </a:solidFill>
                           <a:latin typeface="Calibri"/>
                         </a:rPr>
-                        <a:t>2</a:t>
+                        <a:t>3</a:t>
                       </a:r>
                     </a:p>
                   </a:txBody>
@@ -8551,7 +7989,7 @@
                           </a:solidFill>
                           <a:latin typeface="Calibri"/>
                         </a:rPr>
-                        <a:t>2</a:t>
+                        <a:t>3</a:t>
                       </a:r>
                     </a:p>
                   </a:txBody>
@@ -8668,7 +8106,7 @@
                           </a:solidFill>
                           <a:latin typeface="Calibri"/>
                         </a:rPr>
-                        <a:t>LETICIA BABY - MONTE AZUL PAULISTA / SP</a:t>
+                        <a:t>SERAFIM TRANSPORTE D - GUARULHOS / SP</a:t>
                       </a:r>
                     </a:p>
                   </a:txBody>
@@ -8831,7 +8269,7 @@
                           </a:solidFill>
                           <a:latin typeface="Calibri"/>
                         </a:rPr>
-                        <a:t>REDE MAIS CALCADOS E - XANXERE / SC</a:t>
+                        <a:t>LANDRICO MINAS LTDA - SAO PAULO / SP</a:t>
                       </a:r>
                     </a:p>
                   </a:txBody>
@@ -8994,7 +8432,7 @@
                           </a:solidFill>
                           <a:latin typeface="Calibri"/>
                         </a:rPr>
-                        <a:t>56.969.922 CARLITO D - GOIANIA / GO</a:t>
+                        <a:t>ERF SILVA ACESSORIOS - SAO PAULO / SP</a:t>
                       </a:r>
                     </a:p>
                   </a:txBody>
@@ -9017,7 +8455,7 @@
                           </a:solidFill>
                           <a:latin typeface="Calibri"/>
                         </a:rPr>
-                        <a:t>1</a:t>
+                        <a:t>2</a:t>
                       </a:r>
                     </a:p>
                   </a:txBody>
@@ -9040,7 +8478,7 @@
                           </a:solidFill>
                           <a:latin typeface="Calibri"/>
                         </a:rPr>
-                        <a:t>1</a:t>
+                        <a:t>2</a:t>
                       </a:r>
                     </a:p>
                   </a:txBody>
@@ -9157,7 +8595,7 @@
                           </a:solidFill>
                           <a:latin typeface="Calibri"/>
                         </a:rPr>
-                        <a:t>3 IRMAOS BRINQ E VAR - URUACU / GO</a:t>
+                        <a:t>BATIKI COM IMPORT EX - SAO JOSE DO RIO PRETO / S</a:t>
                       </a:r>
                     </a:p>
                   </a:txBody>
@@ -9180,6 +8618,29 @@
                           </a:solidFill>
                           <a:latin typeface="Calibri"/>
                         </a:rPr>
+                        <a:t>2</a:t>
+                      </a:r>
+                    </a:p>
+                  </a:txBody>
+                  <a:tcPr>
+                    <a:solidFill>
+                      <a:srgbClr val="F2F2F2"/>
+                    </a:solidFill>
+                  </a:tcPr>
+                </a:tc>
+                <a:tc>
+                  <a:txBody>
+                    <a:bodyPr/>
+                    <a:lstStyle/>
+                    <a:p>
+                      <a:pPr algn="l"/>
+                      <a:r>
+                        <a:rPr sz="1000" b="0">
+                          <a:solidFill>
+                            <a:srgbClr val="1D1B43"/>
+                          </a:solidFill>
+                          <a:latin typeface="Calibri"/>
+                        </a:rPr>
                         <a:t>1</a:t>
                       </a:r>
                     </a:p>
@@ -9226,7 +8687,7 @@
                           </a:solidFill>
                           <a:latin typeface="Calibri"/>
                         </a:rPr>
-                        <a:t>0</a:t>
+                        <a:t>50.0%</a:t>
                       </a:r>
                     </a:p>
                   </a:txBody>
@@ -9249,30 +8710,7 @@
                           </a:solidFill>
                           <a:latin typeface="Calibri"/>
                         </a:rPr>
-                        <a:t>100.0%</a:t>
-                      </a:r>
-                    </a:p>
-                  </a:txBody>
-                  <a:tcPr>
-                    <a:solidFill>
-                      <a:srgbClr val="F2F2F2"/>
-                    </a:solidFill>
-                  </a:tcPr>
-                </a:tc>
-                <a:tc>
-                  <a:txBody>
-                    <a:bodyPr/>
-                    <a:lstStyle/>
-                    <a:p>
-                      <a:pPr algn="l"/>
-                      <a:r>
-                        <a:rPr sz="1000" b="0">
-                          <a:solidFill>
-                            <a:srgbClr val="1D1B43"/>
-                          </a:solidFill>
-                          <a:latin typeface="Calibri"/>
-                        </a:rPr>
-                        <a:t>Excelente</a:t>
+                        <a:t>Atencao</a:t>
                       </a:r>
                     </a:p>
                   </a:txBody>
@@ -9320,7 +8758,7 @@
                           </a:solidFill>
                           <a:latin typeface="Calibri"/>
                         </a:rPr>
-                        <a:t>AMIR NURELDIN EZBE A - JATAI / GO</a:t>
+                        <a:t>ADERALDO GONCALVES D - BRASILIA / DF</a:t>
                       </a:r>
                     </a:p>
                   </a:txBody>
@@ -9343,7 +8781,7 @@
                           </a:solidFill>
                           <a:latin typeface="Calibri"/>
                         </a:rPr>
-                        <a:t>1</a:t>
+                        <a:t>2</a:t>
                       </a:r>
                     </a:p>
                   </a:txBody>
@@ -9366,7 +8804,7 @@
                           </a:solidFill>
                           <a:latin typeface="Calibri"/>
                         </a:rPr>
-                        <a:t>1</a:t>
+                        <a:t>2</a:t>
                       </a:r>
                     </a:p>
                   </a:txBody>
@@ -9483,7 +8921,7 @@
                           </a:solidFill>
                           <a:latin typeface="Calibri"/>
                         </a:rPr>
-                        <a:t>ABC LAJEADO DISTRIBU - LAJEADO / RS</a:t>
+                        <a:t>ALEX IMMIANOVSKI - BRUSQUE / SC</a:t>
                       </a:r>
                     </a:p>
                   </a:txBody>
@@ -9646,7 +9084,7 @@
                           </a:solidFill>
                           <a:latin typeface="Calibri"/>
                         </a:rPr>
-                        <a:t>C TEIXEIRA E GALVAN - TERRA NOVA DO NORTE / MT</a:t>
+                        <a:t>CHRISTIANE GIRON ME - BAURU / SP</a:t>
                       </a:r>
                     </a:p>
                   </a:txBody>
@@ -9809,7 +9247,7 @@
                           </a:solidFill>
                           <a:latin typeface="Calibri"/>
                         </a:rPr>
-                        <a:t>CAPITAL BOLSAS E ACE - SOROCABA / SP</a:t>
+                        <a:t>CHUNLI - UBATUBA / SP</a:t>
                       </a:r>
                     </a:p>
                   </a:txBody>
@@ -9972,7 +9410,7 @@
                           </a:solidFill>
                           <a:latin typeface="Calibri"/>
                         </a:rPr>
-                        <a:t>CAROLINE KOTSAN ME - CURITIBA / PR</a:t>
+                        <a:t>DANIELA BARBOSA ME - OSORIO / RS</a:t>
                       </a:r>
                     </a:p>
                   </a:txBody>
@@ -10135,7 +9573,7 @@
                           </a:solidFill>
                           <a:latin typeface="Calibri"/>
                         </a:rPr>
-                        <a:t>ALESSANDRA DA SILVA - BARRA DO BUGRES / MT</a:t>
+                        <a:t>CIA BRASIL TRANSPORT - GUARULHOS / SP</a:t>
                       </a:r>
                     </a:p>
                   </a:txBody>

--- a/BATIKI_COM_IMPORT_EXPORT_LTDA.pptx
+++ b/BATIKI_COM_IMPORT_EXPORT_LTDA.pptx
@@ -143,29 +143,23 @@
           </c:spPr>
           <c:cat>
             <c:strRef>
-              <c:f>Sheet1!$A$2:$A$3</c:f>
+              <c:f>Sheet1!$A$2:$A$2</c:f>
               <c:strCache>
-                <c:ptCount val="2"/>
+                <c:ptCount val="1"/>
                 <c:pt idx="0">
                   <c:v>Abril 2026</c:v>
-                </c:pt>
-                <c:pt idx="1">
-                  <c:v>Maio 2026</c:v>
                 </c:pt>
               </c:strCache>
             </c:strRef>
           </c:cat>
           <c:val>
             <c:numRef>
-              <c:f>Sheet1!$B$2:$B$3</c:f>
+              <c:f>Sheet1!$B$2:$B$2</c:f>
               <c:numCache>
                 <c:formatCode>General</c:formatCode>
-                <c:ptCount val="2"/>
+                <c:ptCount val="1"/>
                 <c:pt idx="0">
                   <c:v>65</c:v>
-                </c:pt>
-                <c:pt idx="1">
-                  <c:v>79</c:v>
                 </c:pt>
               </c:numCache>
             </c:numRef>
@@ -192,29 +186,23 @@
           </c:spPr>
           <c:cat>
             <c:strRef>
-              <c:f>Sheet1!$A$2:$A$3</c:f>
+              <c:f>Sheet1!$A$2:$A$2</c:f>
               <c:strCache>
-                <c:ptCount val="2"/>
+                <c:ptCount val="1"/>
                 <c:pt idx="0">
                   <c:v>Abril 2026</c:v>
-                </c:pt>
-                <c:pt idx="1">
-                  <c:v>Maio 2026</c:v>
                 </c:pt>
               </c:strCache>
             </c:strRef>
           </c:cat>
           <c:val>
             <c:numRef>
-              <c:f>Sheet1!$C$2:$C$3</c:f>
+              <c:f>Sheet1!$C$2:$C$2</c:f>
               <c:numCache>
                 <c:formatCode>General</c:formatCode>
-                <c:ptCount val="2"/>
+                <c:ptCount val="1"/>
                 <c:pt idx="0">
                   <c:v>9</c:v>
-                </c:pt>
-                <c:pt idx="1">
-                  <c:v>3</c:v>
                 </c:pt>
               </c:numCache>
             </c:numRef>
@@ -3387,7 +3375,7 @@
                 </a:solidFill>
                 <a:latin typeface="Calibri"/>
               </a:rPr>
-              <a:t>INDICADORES MAIO 2026</a:t>
+              <a:t>INDICADORES ABRIL 2026</a:t>
             </a:r>
           </a:p>
         </p:txBody>
@@ -3494,14 +3482,13 @@
           <a:p>
             <a:pPr algn="ctr"/>
             <a:r>
-              <a:rPr sz="1600" b="1">
+              <a:rPr sz="1400" b="1">
                 <a:solidFill>
                   <a:srgbClr val="FFFFFF"/>
                 </a:solidFill>
                 <a:latin typeface="Calibri"/>
               </a:rPr>
-              <a:t>Nossa rota e ir alem das
-entregas!</a:t>
+              <a:t>Nossa rota e ir alem das entregas!</a:t>
             </a:r>
           </a:p>
         </p:txBody>
@@ -3709,7 +3696,7 @@
                 </a:solidFill>
                 <a:latin typeface="Calibri"/>
               </a:rPr>
-              <a:t>82</a:t>
+              <a:t>74</a:t>
             </a:r>
           </a:p>
         </p:txBody>
@@ -3824,7 +3811,7 @@
                 </a:solidFill>
                 <a:latin typeface="Calibri"/>
               </a:rPr>
-              <a:t>79</a:t>
+              <a:t>65</a:t>
             </a:r>
           </a:p>
         </p:txBody>
@@ -3939,7 +3926,7 @@
                 </a:solidFill>
                 <a:latin typeface="Calibri"/>
               </a:rPr>
-              <a:t>3</a:t>
+              <a:t>9</a:t>
             </a:r>
           </a:p>
         </p:txBody>
@@ -4050,11 +4037,11 @@
             <a:r>
               <a:rPr sz="2800" b="1">
                 <a:solidFill>
-                  <a:srgbClr val="10B981"/>
+                  <a:srgbClr val="F59E0B"/>
                 </a:solidFill>
                 <a:latin typeface="Calibri"/>
               </a:rPr>
-              <a:t>96.3%</a:t>
+              <a:t>87.8%</a:t>
             </a:r>
           </a:p>
         </p:txBody>
@@ -4155,30 +4142,30 @@
                           </a:solidFill>
                           <a:latin typeface="Calibri"/>
                         </a:rPr>
+                        <a:t>Marco 2026</a:t>
+                      </a:r>
+                    </a:p>
+                  </a:txBody>
+                  <a:tcPr>
+                    <a:solidFill>
+                      <a:srgbClr val="1D1B43"/>
+                    </a:solidFill>
+                  </a:tcPr>
+                </a:tc>
+                <a:tc>
+                  <a:txBody>
+                    <a:bodyPr/>
+                    <a:lstStyle/>
+                    <a:p>
+                      <a:pPr algn="ctr"/>
+                      <a:r>
+                        <a:rPr sz="1100" b="1">
+                          <a:solidFill>
+                            <a:srgbClr val="FFFFFF"/>
+                          </a:solidFill>
+                          <a:latin typeface="Calibri"/>
+                        </a:rPr>
                         <a:t>Abril 2026</a:t>
-                      </a:r>
-                    </a:p>
-                  </a:txBody>
-                  <a:tcPr>
-                    <a:solidFill>
-                      <a:srgbClr val="1D1B43"/>
-                    </a:solidFill>
-                  </a:tcPr>
-                </a:tc>
-                <a:tc>
-                  <a:txBody>
-                    <a:bodyPr/>
-                    <a:lstStyle/>
-                    <a:p>
-                      <a:pPr algn="ctr"/>
-                      <a:r>
-                        <a:rPr sz="1100" b="1">
-                          <a:solidFill>
-                            <a:srgbClr val="FFFFFF"/>
-                          </a:solidFill>
-                          <a:latin typeface="Calibri"/>
-                        </a:rPr>
-                        <a:t>Maio 2026</a:t>
                       </a:r>
                     </a:p>
                   </a:txBody>
@@ -4249,6 +4236,29 @@
                           </a:solidFill>
                           <a:latin typeface="Calibri"/>
                         </a:rPr>
+                        <a:t>-</a:t>
+                      </a:r>
+                    </a:p>
+                  </a:txBody>
+                  <a:tcPr>
+                    <a:solidFill>
+                      <a:srgbClr val="FFFFFF"/>
+                    </a:solidFill>
+                  </a:tcPr>
+                </a:tc>
+                <a:tc>
+                  <a:txBody>
+                    <a:bodyPr/>
+                    <a:lstStyle/>
+                    <a:p>
+                      <a:pPr algn="l"/>
+                      <a:r>
+                        <a:rPr sz="1000" b="0">
+                          <a:solidFill>
+                            <a:srgbClr val="1D1B43"/>
+                          </a:solidFill>
+                          <a:latin typeface="Calibri"/>
+                        </a:rPr>
                         <a:t>74</a:t>
                       </a:r>
                     </a:p>
@@ -4272,30 +4282,7 @@
                           </a:solidFill>
                           <a:latin typeface="Calibri"/>
                         </a:rPr>
-                        <a:t>82</a:t>
-                      </a:r>
-                    </a:p>
-                  </a:txBody>
-                  <a:tcPr>
-                    <a:solidFill>
-                      <a:srgbClr val="FFFFFF"/>
-                    </a:solidFill>
-                  </a:tcPr>
-                </a:tc>
-                <a:tc>
-                  <a:txBody>
-                    <a:bodyPr/>
-                    <a:lstStyle/>
-                    <a:p>
-                      <a:pPr algn="l"/>
-                      <a:r>
-                        <a:rPr sz="1000" b="0">
-                          <a:solidFill>
-                            <a:srgbClr val="1D1B43"/>
-                          </a:solidFill>
-                          <a:latin typeface="Calibri"/>
-                        </a:rPr>
-                        <a:t>+ 8</a:t>
+                        <a:t>-</a:t>
                       </a:r>
                     </a:p>
                   </a:txBody>
@@ -4343,6 +4330,29 @@
                           </a:solidFill>
                           <a:latin typeface="Calibri"/>
                         </a:rPr>
+                        <a:t>-</a:t>
+                      </a:r>
+                    </a:p>
+                  </a:txBody>
+                  <a:tcPr>
+                    <a:solidFill>
+                      <a:srgbClr val="F2F2F2"/>
+                    </a:solidFill>
+                  </a:tcPr>
+                </a:tc>
+                <a:tc>
+                  <a:txBody>
+                    <a:bodyPr/>
+                    <a:lstStyle/>
+                    <a:p>
+                      <a:pPr algn="l"/>
+                      <a:r>
+                        <a:rPr sz="1000" b="0">
+                          <a:solidFill>
+                            <a:srgbClr val="1D1B43"/>
+                          </a:solidFill>
+                          <a:latin typeface="Calibri"/>
+                        </a:rPr>
                         <a:t>65</a:t>
                       </a:r>
                     </a:p>
@@ -4366,30 +4376,7 @@
                           </a:solidFill>
                           <a:latin typeface="Calibri"/>
                         </a:rPr>
-                        <a:t>79</a:t>
-                      </a:r>
-                    </a:p>
-                  </a:txBody>
-                  <a:tcPr>
-                    <a:solidFill>
-                      <a:srgbClr val="F2F2F2"/>
-                    </a:solidFill>
-                  </a:tcPr>
-                </a:tc>
-                <a:tc>
-                  <a:txBody>
-                    <a:bodyPr/>
-                    <a:lstStyle/>
-                    <a:p>
-                      <a:pPr algn="l"/>
-                      <a:r>
-                        <a:rPr sz="1000" b="0">
-                          <a:solidFill>
-                            <a:srgbClr val="1D1B43"/>
-                          </a:solidFill>
-                          <a:latin typeface="Calibri"/>
-                        </a:rPr>
-                        <a:t>+ 14</a:t>
+                        <a:t>-</a:t>
                       </a:r>
                     </a:p>
                   </a:txBody>
@@ -4437,6 +4424,29 @@
                           </a:solidFill>
                           <a:latin typeface="Calibri"/>
                         </a:rPr>
+                        <a:t>-</a:t>
+                      </a:r>
+                    </a:p>
+                  </a:txBody>
+                  <a:tcPr>
+                    <a:solidFill>
+                      <a:srgbClr val="FFFFFF"/>
+                    </a:solidFill>
+                  </a:tcPr>
+                </a:tc>
+                <a:tc>
+                  <a:txBody>
+                    <a:bodyPr/>
+                    <a:lstStyle/>
+                    <a:p>
+                      <a:pPr algn="l"/>
+                      <a:r>
+                        <a:rPr sz="1000" b="0">
+                          <a:solidFill>
+                            <a:srgbClr val="1D1B43"/>
+                          </a:solidFill>
+                          <a:latin typeface="Calibri"/>
+                        </a:rPr>
                         <a:t>9</a:t>
                       </a:r>
                     </a:p>
@@ -4460,30 +4470,7 @@
                           </a:solidFill>
                           <a:latin typeface="Calibri"/>
                         </a:rPr>
-                        <a:t>3</a:t>
-                      </a:r>
-                    </a:p>
-                  </a:txBody>
-                  <a:tcPr>
-                    <a:solidFill>
-                      <a:srgbClr val="FFFFFF"/>
-                    </a:solidFill>
-                  </a:tcPr>
-                </a:tc>
-                <a:tc>
-                  <a:txBody>
-                    <a:bodyPr/>
-                    <a:lstStyle/>
-                    <a:p>
-                      <a:pPr algn="l"/>
-                      <a:r>
-                        <a:rPr sz="1000" b="0">
-                          <a:solidFill>
-                            <a:srgbClr val="1D1B43"/>
-                          </a:solidFill>
-                          <a:latin typeface="Calibri"/>
-                        </a:rPr>
-                        <a:t>- 6</a:t>
+                        <a:t>-</a:t>
                       </a:r>
                     </a:p>
                   </a:txBody>
@@ -4531,6 +4518,29 @@
                           </a:solidFill>
                           <a:latin typeface="Calibri"/>
                         </a:rPr>
+                        <a:t>-</a:t>
+                      </a:r>
+                    </a:p>
+                  </a:txBody>
+                  <a:tcPr>
+                    <a:solidFill>
+                      <a:srgbClr val="F2F2F2"/>
+                    </a:solidFill>
+                  </a:tcPr>
+                </a:tc>
+                <a:tc>
+                  <a:txBody>
+                    <a:bodyPr/>
+                    <a:lstStyle/>
+                    <a:p>
+                      <a:pPr algn="l"/>
+                      <a:r>
+                        <a:rPr sz="1000" b="0">
+                          <a:solidFill>
+                            <a:srgbClr val="1D1B43"/>
+                          </a:solidFill>
+                          <a:latin typeface="Calibri"/>
+                        </a:rPr>
                         <a:t>87.8%</a:t>
                       </a:r>
                     </a:p>
@@ -4554,30 +4564,7 @@
                           </a:solidFill>
                           <a:latin typeface="Calibri"/>
                         </a:rPr>
-                        <a:t>96.3%</a:t>
-                      </a:r>
-                    </a:p>
-                  </a:txBody>
-                  <a:tcPr>
-                    <a:solidFill>
-                      <a:srgbClr val="F2F2F2"/>
-                    </a:solidFill>
-                  </a:tcPr>
-                </a:tc>
-                <a:tc>
-                  <a:txBody>
-                    <a:bodyPr/>
-                    <a:lstStyle/>
-                    <a:p>
-                      <a:pPr algn="l"/>
-                      <a:r>
-                        <a:rPr sz="1000" b="0">
-                          <a:solidFill>
-                            <a:srgbClr val="1D1B43"/>
-                          </a:solidFill>
-                          <a:latin typeface="Calibri"/>
-                        </a:rPr>
-                        <a:t>+ 8.5pp</a:t>
+                        <a:t>-</a:t>
                       </a:r>
                     </a:p>
                   </a:txBody>
@@ -4748,7 +4735,7 @@
         </p:nvGraphicFramePr>
         <p:xfrm>
           <a:off x="7955279" y="2286000"/>
-          <a:ext cx="4480560" cy="1316736"/>
+          <a:ext cx="4480560" cy="877824"/>
         </p:xfrm>
         <a:graphic>
           <a:graphicData uri="http://schemas.openxmlformats.org/drawingml/2006/table">
@@ -4993,123 +4980,6 @@
                   <a:tcPr>
                     <a:solidFill>
                       <a:srgbClr val="FFFFFF"/>
-                    </a:solidFill>
-                  </a:tcPr>
-                </a:tc>
-              </a:tr>
-              <a:tr h="438912">
-                <a:tc>
-                  <a:txBody>
-                    <a:bodyPr/>
-                    <a:lstStyle/>
-                    <a:p>
-                      <a:pPr algn="l"/>
-                      <a:r>
-                        <a:rPr sz="1000" b="0">
-                          <a:solidFill>
-                            <a:srgbClr val="1D1B43"/>
-                          </a:solidFill>
-                          <a:latin typeface="Calibri"/>
-                        </a:rPr>
-                        <a:t>Maio 2026</a:t>
-                      </a:r>
-                    </a:p>
-                  </a:txBody>
-                  <a:tcPr>
-                    <a:solidFill>
-                      <a:srgbClr val="F2F2F2"/>
-                    </a:solidFill>
-                  </a:tcPr>
-                </a:tc>
-                <a:tc>
-                  <a:txBody>
-                    <a:bodyPr/>
-                    <a:lstStyle/>
-                    <a:p>
-                      <a:pPr algn="l"/>
-                      <a:r>
-                        <a:rPr sz="1000" b="0">
-                          <a:solidFill>
-                            <a:srgbClr val="1D1B43"/>
-                          </a:solidFill>
-                          <a:latin typeface="Calibri"/>
-                        </a:rPr>
-                        <a:t>82</a:t>
-                      </a:r>
-                    </a:p>
-                  </a:txBody>
-                  <a:tcPr>
-                    <a:solidFill>
-                      <a:srgbClr val="F2F2F2"/>
-                    </a:solidFill>
-                  </a:tcPr>
-                </a:tc>
-                <a:tc>
-                  <a:txBody>
-                    <a:bodyPr/>
-                    <a:lstStyle/>
-                    <a:p>
-                      <a:pPr algn="l"/>
-                      <a:r>
-                        <a:rPr sz="1000" b="0">
-                          <a:solidFill>
-                            <a:srgbClr val="1D1B43"/>
-                          </a:solidFill>
-                          <a:latin typeface="Calibri"/>
-                        </a:rPr>
-                        <a:t>79</a:t>
-                      </a:r>
-                    </a:p>
-                  </a:txBody>
-                  <a:tcPr>
-                    <a:solidFill>
-                      <a:srgbClr val="F2F2F2"/>
-                    </a:solidFill>
-                  </a:tcPr>
-                </a:tc>
-                <a:tc>
-                  <a:txBody>
-                    <a:bodyPr/>
-                    <a:lstStyle/>
-                    <a:p>
-                      <a:pPr algn="l"/>
-                      <a:r>
-                        <a:rPr sz="1000" b="0">
-                          <a:solidFill>
-                            <a:srgbClr val="1D1B43"/>
-                          </a:solidFill>
-                          <a:latin typeface="Calibri"/>
-                        </a:rPr>
-                        <a:t>3</a:t>
-                      </a:r>
-                    </a:p>
-                  </a:txBody>
-                  <a:tcPr>
-                    <a:solidFill>
-                      <a:srgbClr val="F2F2F2"/>
-                    </a:solidFill>
-                  </a:tcPr>
-                </a:tc>
-                <a:tc>
-                  <a:txBody>
-                    <a:bodyPr/>
-                    <a:lstStyle/>
-                    <a:p>
-                      <a:pPr algn="l"/>
-                      <a:r>
-                        <a:rPr sz="1000" b="0">
-                          <a:solidFill>
-                            <a:srgbClr val="1D1B43"/>
-                          </a:solidFill>
-                          <a:latin typeface="Calibri"/>
-                        </a:rPr>
-                        <a:t>96.3%</a:t>
-                      </a:r>
-                    </a:p>
-                  </a:txBody>
-                  <a:tcPr>
-                    <a:solidFill>
-                      <a:srgbClr val="F2F2F2"/>
                     </a:solidFill>
                   </a:tcPr>
                 </a:tc>
@@ -5191,7 +5061,7 @@
                 </a:solidFill>
                 <a:latin typeface="Calibri"/>
               </a:rPr>
-              <a:t>PERFORMANCE: 96.3% - EXCELENTE</a:t>
+              <a:t>PERFORMANCE: 87.8% - REGULAR</a:t>
             </a:r>
           </a:p>
         </p:txBody>
@@ -5276,7 +5146,7 @@
                 </a:solidFill>
                 <a:latin typeface="Calibri"/>
               </a:rPr>
-              <a:t>OCORRENCIAS FORA DO PRAZO (3)</a:t>
+              <a:t>OCORRENCIAS FORA DO PRAZO (9)</a:t>
             </a:r>
           </a:p>
         </p:txBody>
@@ -5334,7 +5204,7 @@
         </p:nvGraphicFramePr>
         <p:xfrm>
           <a:off x="457200" y="1828800"/>
-          <a:ext cx="11429999" cy="1536192"/>
+          <a:ext cx="11429999" cy="3840480"/>
         </p:xfrm>
         <a:graphic>
           <a:graphicData uri="http://schemas.openxmlformats.org/drawingml/2006/table">
@@ -5480,7 +5350,7 @@
                           </a:solidFill>
                           <a:latin typeface="Calibri"/>
                         </a:rPr>
-                        <a:t>282091</a:t>
+                        <a:t>275848</a:t>
                       </a:r>
                     </a:p>
                   </a:txBody>
@@ -5503,7 +5373,7 @@
                           </a:solidFill>
                           <a:latin typeface="Calibri"/>
                         </a:rPr>
-                        <a:t>BATIKI COM IMPORT EX - SAO JOSE DO RIO PRETO / S</a:t>
+                        <a:t>ANTONIO MARCOS DA SI - NAZARIO / GO</a:t>
                       </a:r>
                     </a:p>
                   </a:txBody>
@@ -5526,7 +5396,7 @@
                           </a:solidFill>
                           <a:latin typeface="Calibri"/>
                         </a:rPr>
-                        <a:t>SAO JOSE DO RIO PRETO/SP</a:t>
+                        <a:t>NAZARIO/GO</a:t>
                       </a:r>
                     </a:p>
                   </a:txBody>
@@ -5549,7 +5419,7 @@
                           </a:solidFill>
                           <a:latin typeface="Calibri"/>
                         </a:rPr>
-                        <a:t>13/05/2026</a:t>
+                        <a:t>06/04/2026</a:t>
                       </a:r>
                     </a:p>
                   </a:txBody>
@@ -5572,7 +5442,7 @@
                           </a:solidFill>
                           <a:latin typeface="Calibri"/>
                         </a:rPr>
-                        <a:t>FORA DO PRAZO</a:t>
+                        <a:t>ENTREGUE FORA DO PRAZO</a:t>
                       </a:r>
                     </a:p>
                   </a:txBody>
@@ -5597,7 +5467,7 @@
                           </a:solidFill>
                           <a:latin typeface="Calibri"/>
                         </a:rPr>
-                        <a:t>282113</a:t>
+                        <a:t>275849</a:t>
                       </a:r>
                     </a:p>
                   </a:txBody>
@@ -5620,7 +5490,7 @@
                           </a:solidFill>
                           <a:latin typeface="Calibri"/>
                         </a:rPr>
-                        <a:t>TCB COMERCIO DE ARTI - SAO PAULO / SP</a:t>
+                        <a:t>LEO MOVEIS LTDA ME - ARUANA / GO</a:t>
                       </a:r>
                     </a:p>
                   </a:txBody>
@@ -5643,7 +5513,7 @@
                           </a:solidFill>
                           <a:latin typeface="Calibri"/>
                         </a:rPr>
-                        <a:t>SAO PAULO/SP</a:t>
+                        <a:t>ARUANA/GO</a:t>
                       </a:r>
                     </a:p>
                   </a:txBody>
@@ -5666,7 +5536,7 @@
                           </a:solidFill>
                           <a:latin typeface="Calibri"/>
                         </a:rPr>
-                        <a:t>12/05/2026</a:t>
+                        <a:t>06/04/2026</a:t>
                       </a:r>
                     </a:p>
                   </a:txBody>
@@ -5714,7 +5584,7 @@
                           </a:solidFill>
                           <a:latin typeface="Calibri"/>
                         </a:rPr>
-                        <a:t>282115</a:t>
+                        <a:t>275851</a:t>
                       </a:r>
                     </a:p>
                   </a:txBody>
@@ -5737,7 +5607,7 @@
                           </a:solidFill>
                           <a:latin typeface="Calibri"/>
                         </a:rPr>
-                        <a:t>CHRISTIANE GIRON ME - ARARAQUARA / SP</a:t>
+                        <a:t>CELSO JERONIMO DE OL - EDEIA / GO</a:t>
                       </a:r>
                     </a:p>
                   </a:txBody>
@@ -5760,7 +5630,7 @@
                           </a:solidFill>
                           <a:latin typeface="Calibri"/>
                         </a:rPr>
-                        <a:t>ARARAQUARA/SP</a:t>
+                        <a:t>EDEIA/GO</a:t>
                       </a:r>
                     </a:p>
                   </a:txBody>
@@ -5783,7 +5653,709 @@
                           </a:solidFill>
                           <a:latin typeface="Calibri"/>
                         </a:rPr>
-                        <a:t>13/05/2026</a:t>
+                        <a:t>06/04/2026</a:t>
+                      </a:r>
+                    </a:p>
+                  </a:txBody>
+                  <a:tcPr>
+                    <a:solidFill>
+                      <a:srgbClr val="FFFFFF"/>
+                    </a:solidFill>
+                  </a:tcPr>
+                </a:tc>
+                <a:tc>
+                  <a:txBody>
+                    <a:bodyPr/>
+                    <a:lstStyle/>
+                    <a:p>
+                      <a:pPr algn="l"/>
+                      <a:r>
+                        <a:rPr sz="1000" b="0">
+                          <a:solidFill>
+                            <a:srgbClr val="1D1B43"/>
+                          </a:solidFill>
+                          <a:latin typeface="Calibri"/>
+                        </a:rPr>
+                        <a:t>ENTREGUE FORA DO PRAZO</a:t>
+                      </a:r>
+                    </a:p>
+                  </a:txBody>
+                  <a:tcPr>
+                    <a:solidFill>
+                      <a:srgbClr val="FFFFFF"/>
+                    </a:solidFill>
+                  </a:tcPr>
+                </a:tc>
+              </a:tr>
+              <a:tr h="384048">
+                <a:tc>
+                  <a:txBody>
+                    <a:bodyPr/>
+                    <a:lstStyle/>
+                    <a:p>
+                      <a:pPr algn="l"/>
+                      <a:r>
+                        <a:rPr sz="1000" b="0">
+                          <a:solidFill>
+                            <a:srgbClr val="1D1B43"/>
+                          </a:solidFill>
+                          <a:latin typeface="Calibri"/>
+                        </a:rPr>
+                        <a:t>276913</a:t>
+                      </a:r>
+                    </a:p>
+                  </a:txBody>
+                  <a:tcPr>
+                    <a:solidFill>
+                      <a:srgbClr val="F2F2F2"/>
+                    </a:solidFill>
+                  </a:tcPr>
+                </a:tc>
+                <a:tc>
+                  <a:txBody>
+                    <a:bodyPr/>
+                    <a:lstStyle/>
+                    <a:p>
+                      <a:pPr algn="l"/>
+                      <a:r>
+                        <a:rPr sz="1000" b="0">
+                          <a:solidFill>
+                            <a:srgbClr val="1D1B43"/>
+                          </a:solidFill>
+                          <a:latin typeface="Calibri"/>
+                        </a:rPr>
+                        <a:t>CSG RODRIGUESVARIEDA - GOIANESIA / GO</a:t>
+                      </a:r>
+                    </a:p>
+                  </a:txBody>
+                  <a:tcPr>
+                    <a:solidFill>
+                      <a:srgbClr val="F2F2F2"/>
+                    </a:solidFill>
+                  </a:tcPr>
+                </a:tc>
+                <a:tc>
+                  <a:txBody>
+                    <a:bodyPr/>
+                    <a:lstStyle/>
+                    <a:p>
+                      <a:pPr algn="l"/>
+                      <a:r>
+                        <a:rPr sz="1000" b="0">
+                          <a:solidFill>
+                            <a:srgbClr val="1D1B43"/>
+                          </a:solidFill>
+                          <a:latin typeface="Calibri"/>
+                        </a:rPr>
+                        <a:t>GOIANESIA/GO</a:t>
+                      </a:r>
+                    </a:p>
+                  </a:txBody>
+                  <a:tcPr>
+                    <a:solidFill>
+                      <a:srgbClr val="F2F2F2"/>
+                    </a:solidFill>
+                  </a:tcPr>
+                </a:tc>
+                <a:tc>
+                  <a:txBody>
+                    <a:bodyPr/>
+                    <a:lstStyle/>
+                    <a:p>
+                      <a:pPr algn="l"/>
+                      <a:r>
+                        <a:rPr sz="1000" b="0">
+                          <a:solidFill>
+                            <a:srgbClr val="1D1B43"/>
+                          </a:solidFill>
+                          <a:latin typeface="Calibri"/>
+                        </a:rPr>
+                        <a:t>06/04/2026</a:t>
+                      </a:r>
+                    </a:p>
+                  </a:txBody>
+                  <a:tcPr>
+                    <a:solidFill>
+                      <a:srgbClr val="F2F2F2"/>
+                    </a:solidFill>
+                  </a:tcPr>
+                </a:tc>
+                <a:tc>
+                  <a:txBody>
+                    <a:bodyPr/>
+                    <a:lstStyle/>
+                    <a:p>
+                      <a:pPr algn="l"/>
+                      <a:r>
+                        <a:rPr sz="1000" b="0">
+                          <a:solidFill>
+                            <a:srgbClr val="1D1B43"/>
+                          </a:solidFill>
+                          <a:latin typeface="Calibri"/>
+                        </a:rPr>
+                        <a:t>ENTREGUE FORA DO PRAZO</a:t>
+                      </a:r>
+                    </a:p>
+                  </a:txBody>
+                  <a:tcPr>
+                    <a:solidFill>
+                      <a:srgbClr val="F2F2F2"/>
+                    </a:solidFill>
+                  </a:tcPr>
+                </a:tc>
+              </a:tr>
+              <a:tr h="384048">
+                <a:tc>
+                  <a:txBody>
+                    <a:bodyPr/>
+                    <a:lstStyle/>
+                    <a:p>
+                      <a:pPr algn="l"/>
+                      <a:r>
+                        <a:rPr sz="1000" b="0">
+                          <a:solidFill>
+                            <a:srgbClr val="1D1B43"/>
+                          </a:solidFill>
+                          <a:latin typeface="Calibri"/>
+                        </a:rPr>
+                        <a:t>276918</a:t>
+                      </a:r>
+                    </a:p>
+                  </a:txBody>
+                  <a:tcPr>
+                    <a:solidFill>
+                      <a:srgbClr val="FFFFFF"/>
+                    </a:solidFill>
+                  </a:tcPr>
+                </a:tc>
+                <a:tc>
+                  <a:txBody>
+                    <a:bodyPr/>
+                    <a:lstStyle/>
+                    <a:p>
+                      <a:pPr algn="l"/>
+                      <a:r>
+                        <a:rPr sz="1000" b="0">
+                          <a:solidFill>
+                            <a:srgbClr val="1D1B43"/>
+                          </a:solidFill>
+                          <a:latin typeface="Calibri"/>
+                        </a:rPr>
+                        <a:t>ELETROCENTER MOVEIS - CARMO DO RIO VERDE / GO</a:t>
+                      </a:r>
+                    </a:p>
+                  </a:txBody>
+                  <a:tcPr>
+                    <a:solidFill>
+                      <a:srgbClr val="FFFFFF"/>
+                    </a:solidFill>
+                  </a:tcPr>
+                </a:tc>
+                <a:tc>
+                  <a:txBody>
+                    <a:bodyPr/>
+                    <a:lstStyle/>
+                    <a:p>
+                      <a:pPr algn="l"/>
+                      <a:r>
+                        <a:rPr sz="1000" b="0">
+                          <a:solidFill>
+                            <a:srgbClr val="1D1B43"/>
+                          </a:solidFill>
+                          <a:latin typeface="Calibri"/>
+                        </a:rPr>
+                        <a:t>CARMO DO RIO VERDE/GO</a:t>
+                      </a:r>
+                    </a:p>
+                  </a:txBody>
+                  <a:tcPr>
+                    <a:solidFill>
+                      <a:srgbClr val="FFFFFF"/>
+                    </a:solidFill>
+                  </a:tcPr>
+                </a:tc>
+                <a:tc>
+                  <a:txBody>
+                    <a:bodyPr/>
+                    <a:lstStyle/>
+                    <a:p>
+                      <a:pPr algn="l"/>
+                      <a:r>
+                        <a:rPr sz="1000" b="0">
+                          <a:solidFill>
+                            <a:srgbClr val="1D1B43"/>
+                          </a:solidFill>
+                          <a:latin typeface="Calibri"/>
+                        </a:rPr>
+                        <a:t>06/04/2026</a:t>
+                      </a:r>
+                    </a:p>
+                  </a:txBody>
+                  <a:tcPr>
+                    <a:solidFill>
+                      <a:srgbClr val="FFFFFF"/>
+                    </a:solidFill>
+                  </a:tcPr>
+                </a:tc>
+                <a:tc>
+                  <a:txBody>
+                    <a:bodyPr/>
+                    <a:lstStyle/>
+                    <a:p>
+                      <a:pPr algn="l"/>
+                      <a:r>
+                        <a:rPr sz="1000" b="0">
+                          <a:solidFill>
+                            <a:srgbClr val="1D1B43"/>
+                          </a:solidFill>
+                          <a:latin typeface="Calibri"/>
+                        </a:rPr>
+                        <a:t>ENTREGUE FORA DO PRAZO</a:t>
+                      </a:r>
+                    </a:p>
+                  </a:txBody>
+                  <a:tcPr>
+                    <a:solidFill>
+                      <a:srgbClr val="FFFFFF"/>
+                    </a:solidFill>
+                  </a:tcPr>
+                </a:tc>
+              </a:tr>
+              <a:tr h="384048">
+                <a:tc>
+                  <a:txBody>
+                    <a:bodyPr/>
+                    <a:lstStyle/>
+                    <a:p>
+                      <a:pPr algn="l"/>
+                      <a:r>
+                        <a:rPr sz="1000" b="0">
+                          <a:solidFill>
+                            <a:srgbClr val="1D1B43"/>
+                          </a:solidFill>
+                          <a:latin typeface="Calibri"/>
+                        </a:rPr>
+                        <a:t>276999</a:t>
+                      </a:r>
+                    </a:p>
+                  </a:txBody>
+                  <a:tcPr>
+                    <a:solidFill>
+                      <a:srgbClr val="F2F2F2"/>
+                    </a:solidFill>
+                  </a:tcPr>
+                </a:tc>
+                <a:tc>
+                  <a:txBody>
+                    <a:bodyPr/>
+                    <a:lstStyle/>
+                    <a:p>
+                      <a:pPr algn="l"/>
+                      <a:r>
+                        <a:rPr sz="1000" b="0">
+                          <a:solidFill>
+                            <a:srgbClr val="1D1B43"/>
+                          </a:solidFill>
+                          <a:latin typeface="Calibri"/>
+                        </a:rPr>
+                        <a:t>MARIA AUGUSTA SILVEI - FELIZ NATAL / MT</a:t>
+                      </a:r>
+                    </a:p>
+                  </a:txBody>
+                  <a:tcPr>
+                    <a:solidFill>
+                      <a:srgbClr val="F2F2F2"/>
+                    </a:solidFill>
+                  </a:tcPr>
+                </a:tc>
+                <a:tc>
+                  <a:txBody>
+                    <a:bodyPr/>
+                    <a:lstStyle/>
+                    <a:p>
+                      <a:pPr algn="l"/>
+                      <a:r>
+                        <a:rPr sz="1000" b="0">
+                          <a:solidFill>
+                            <a:srgbClr val="1D1B43"/>
+                          </a:solidFill>
+                          <a:latin typeface="Calibri"/>
+                        </a:rPr>
+                        <a:t>FELIZ NATAL/MT</a:t>
+                      </a:r>
+                    </a:p>
+                  </a:txBody>
+                  <a:tcPr>
+                    <a:solidFill>
+                      <a:srgbClr val="F2F2F2"/>
+                    </a:solidFill>
+                  </a:tcPr>
+                </a:tc>
+                <a:tc>
+                  <a:txBody>
+                    <a:bodyPr/>
+                    <a:lstStyle/>
+                    <a:p>
+                      <a:pPr algn="l"/>
+                      <a:r>
+                        <a:rPr sz="1000" b="0">
+                          <a:solidFill>
+                            <a:srgbClr val="1D1B43"/>
+                          </a:solidFill>
+                          <a:latin typeface="Calibri"/>
+                        </a:rPr>
+                        <a:t>14/04/2026</a:t>
+                      </a:r>
+                    </a:p>
+                  </a:txBody>
+                  <a:tcPr>
+                    <a:solidFill>
+                      <a:srgbClr val="F2F2F2"/>
+                    </a:solidFill>
+                  </a:tcPr>
+                </a:tc>
+                <a:tc>
+                  <a:txBody>
+                    <a:bodyPr/>
+                    <a:lstStyle/>
+                    <a:p>
+                      <a:pPr algn="l"/>
+                      <a:r>
+                        <a:rPr sz="1000" b="0">
+                          <a:solidFill>
+                            <a:srgbClr val="1D1B43"/>
+                          </a:solidFill>
+                          <a:latin typeface="Calibri"/>
+                        </a:rPr>
+                        <a:t>ENTREGUE FORA DO PRAZO</a:t>
+                      </a:r>
+                    </a:p>
+                  </a:txBody>
+                  <a:tcPr>
+                    <a:solidFill>
+                      <a:srgbClr val="F2F2F2"/>
+                    </a:solidFill>
+                  </a:tcPr>
+                </a:tc>
+              </a:tr>
+              <a:tr h="384048">
+                <a:tc>
+                  <a:txBody>
+                    <a:bodyPr/>
+                    <a:lstStyle/>
+                    <a:p>
+                      <a:pPr algn="l"/>
+                      <a:r>
+                        <a:rPr sz="1000" b="0">
+                          <a:solidFill>
+                            <a:srgbClr val="1D1B43"/>
+                          </a:solidFill>
+                          <a:latin typeface="Calibri"/>
+                        </a:rPr>
+                        <a:t>277092</a:t>
+                      </a:r>
+                    </a:p>
+                  </a:txBody>
+                  <a:tcPr>
+                    <a:solidFill>
+                      <a:srgbClr val="FFFFFF"/>
+                    </a:solidFill>
+                  </a:tcPr>
+                </a:tc>
+                <a:tc>
+                  <a:txBody>
+                    <a:bodyPr/>
+                    <a:lstStyle/>
+                    <a:p>
+                      <a:pPr algn="l"/>
+                      <a:r>
+                        <a:rPr sz="1000" b="0">
+                          <a:solidFill>
+                            <a:srgbClr val="1D1B43"/>
+                          </a:solidFill>
+                          <a:latin typeface="Calibri"/>
+                        </a:rPr>
+                        <a:t>J.R. VAZ CARNEIRO - GOIANESIA / GO</a:t>
+                      </a:r>
+                    </a:p>
+                  </a:txBody>
+                  <a:tcPr>
+                    <a:solidFill>
+                      <a:srgbClr val="FFFFFF"/>
+                    </a:solidFill>
+                  </a:tcPr>
+                </a:tc>
+                <a:tc>
+                  <a:txBody>
+                    <a:bodyPr/>
+                    <a:lstStyle/>
+                    <a:p>
+                      <a:pPr algn="l"/>
+                      <a:r>
+                        <a:rPr sz="1000" b="0">
+                          <a:solidFill>
+                            <a:srgbClr val="1D1B43"/>
+                          </a:solidFill>
+                          <a:latin typeface="Calibri"/>
+                        </a:rPr>
+                        <a:t>GOIANESIA/GO</a:t>
+                      </a:r>
+                    </a:p>
+                  </a:txBody>
+                  <a:tcPr>
+                    <a:solidFill>
+                      <a:srgbClr val="FFFFFF"/>
+                    </a:solidFill>
+                  </a:tcPr>
+                </a:tc>
+                <a:tc>
+                  <a:txBody>
+                    <a:bodyPr/>
+                    <a:lstStyle/>
+                    <a:p>
+                      <a:pPr algn="l"/>
+                      <a:r>
+                        <a:rPr sz="1000" b="0">
+                          <a:solidFill>
+                            <a:srgbClr val="1D1B43"/>
+                          </a:solidFill>
+                          <a:latin typeface="Calibri"/>
+                        </a:rPr>
+                        <a:t>10/04/2026</a:t>
+                      </a:r>
+                    </a:p>
+                  </a:txBody>
+                  <a:tcPr>
+                    <a:solidFill>
+                      <a:srgbClr val="FFFFFF"/>
+                    </a:solidFill>
+                  </a:tcPr>
+                </a:tc>
+                <a:tc>
+                  <a:txBody>
+                    <a:bodyPr/>
+                    <a:lstStyle/>
+                    <a:p>
+                      <a:pPr algn="l"/>
+                      <a:r>
+                        <a:rPr sz="1000" b="0">
+                          <a:solidFill>
+                            <a:srgbClr val="1D1B43"/>
+                          </a:solidFill>
+                          <a:latin typeface="Calibri"/>
+                        </a:rPr>
+                        <a:t>ENTREGUE FORA DO PRAZO</a:t>
+                      </a:r>
+                    </a:p>
+                  </a:txBody>
+                  <a:tcPr>
+                    <a:solidFill>
+                      <a:srgbClr val="FFFFFF"/>
+                    </a:solidFill>
+                  </a:tcPr>
+                </a:tc>
+              </a:tr>
+              <a:tr h="384048">
+                <a:tc>
+                  <a:txBody>
+                    <a:bodyPr/>
+                    <a:lstStyle/>
+                    <a:p>
+                      <a:pPr algn="l"/>
+                      <a:r>
+                        <a:rPr sz="1000" b="0">
+                          <a:solidFill>
+                            <a:srgbClr val="1D1B43"/>
+                          </a:solidFill>
+                          <a:latin typeface="Calibri"/>
+                        </a:rPr>
+                        <a:t>277552</a:t>
+                      </a:r>
+                    </a:p>
+                  </a:txBody>
+                  <a:tcPr>
+                    <a:solidFill>
+                      <a:srgbClr val="F2F2F2"/>
+                    </a:solidFill>
+                  </a:tcPr>
+                </a:tc>
+                <a:tc>
+                  <a:txBody>
+                    <a:bodyPr/>
+                    <a:lstStyle/>
+                    <a:p>
+                      <a:pPr algn="l"/>
+                      <a:r>
+                        <a:rPr sz="1000" b="0">
+                          <a:solidFill>
+                            <a:srgbClr val="1D1B43"/>
+                          </a:solidFill>
+                          <a:latin typeface="Calibri"/>
+                        </a:rPr>
+                        <a:t>O S NOGUEIRA - CACU / GO</a:t>
+                      </a:r>
+                    </a:p>
+                  </a:txBody>
+                  <a:tcPr>
+                    <a:solidFill>
+                      <a:srgbClr val="F2F2F2"/>
+                    </a:solidFill>
+                  </a:tcPr>
+                </a:tc>
+                <a:tc>
+                  <a:txBody>
+                    <a:bodyPr/>
+                    <a:lstStyle/>
+                    <a:p>
+                      <a:pPr algn="l"/>
+                      <a:r>
+                        <a:rPr sz="1000" b="0">
+                          <a:solidFill>
+                            <a:srgbClr val="1D1B43"/>
+                          </a:solidFill>
+                          <a:latin typeface="Calibri"/>
+                        </a:rPr>
+                        <a:t>CACU/GO</a:t>
+                      </a:r>
+                    </a:p>
+                  </a:txBody>
+                  <a:tcPr>
+                    <a:solidFill>
+                      <a:srgbClr val="F2F2F2"/>
+                    </a:solidFill>
+                  </a:tcPr>
+                </a:tc>
+                <a:tc>
+                  <a:txBody>
+                    <a:bodyPr/>
+                    <a:lstStyle/>
+                    <a:p>
+                      <a:pPr algn="l"/>
+                      <a:r>
+                        <a:rPr sz="1000" b="0">
+                          <a:solidFill>
+                            <a:srgbClr val="1D1B43"/>
+                          </a:solidFill>
+                          <a:latin typeface="Calibri"/>
+                        </a:rPr>
+                        <a:t>15/04/2026</a:t>
+                      </a:r>
+                    </a:p>
+                  </a:txBody>
+                  <a:tcPr>
+                    <a:solidFill>
+                      <a:srgbClr val="F2F2F2"/>
+                    </a:solidFill>
+                  </a:tcPr>
+                </a:tc>
+                <a:tc>
+                  <a:txBody>
+                    <a:bodyPr/>
+                    <a:lstStyle/>
+                    <a:p>
+                      <a:pPr algn="l"/>
+                      <a:r>
+                        <a:rPr sz="1000" b="0">
+                          <a:solidFill>
+                            <a:srgbClr val="1D1B43"/>
+                          </a:solidFill>
+                          <a:latin typeface="Calibri"/>
+                        </a:rPr>
+                        <a:t>ENTREGUE FORA DO PRAZO</a:t>
+                      </a:r>
+                    </a:p>
+                  </a:txBody>
+                  <a:tcPr>
+                    <a:solidFill>
+                      <a:srgbClr val="F2F2F2"/>
+                    </a:solidFill>
+                  </a:tcPr>
+                </a:tc>
+              </a:tr>
+              <a:tr h="384048">
+                <a:tc>
+                  <a:txBody>
+                    <a:bodyPr/>
+                    <a:lstStyle/>
+                    <a:p>
+                      <a:pPr algn="l"/>
+                      <a:r>
+                        <a:rPr sz="1000" b="0">
+                          <a:solidFill>
+                            <a:srgbClr val="1D1B43"/>
+                          </a:solidFill>
+                          <a:latin typeface="Calibri"/>
+                        </a:rPr>
+                        <a:t>278355</a:t>
+                      </a:r>
+                    </a:p>
+                  </a:txBody>
+                  <a:tcPr>
+                    <a:solidFill>
+                      <a:srgbClr val="FFFFFF"/>
+                    </a:solidFill>
+                  </a:tcPr>
+                </a:tc>
+                <a:tc>
+                  <a:txBody>
+                    <a:bodyPr/>
+                    <a:lstStyle/>
+                    <a:p>
+                      <a:pPr algn="l"/>
+                      <a:r>
+                        <a:rPr sz="1000" b="0">
+                          <a:solidFill>
+                            <a:srgbClr val="1D1B43"/>
+                          </a:solidFill>
+                          <a:latin typeface="Calibri"/>
+                        </a:rPr>
+                        <a:t>ROSEMERI HEPP EIRELL - MARECHAL CANDIDO RONDON /</a:t>
+                      </a:r>
+                    </a:p>
+                  </a:txBody>
+                  <a:tcPr>
+                    <a:solidFill>
+                      <a:srgbClr val="FFFFFF"/>
+                    </a:solidFill>
+                  </a:tcPr>
+                </a:tc>
+                <a:tc>
+                  <a:txBody>
+                    <a:bodyPr/>
+                    <a:lstStyle/>
+                    <a:p>
+                      <a:pPr algn="l"/>
+                      <a:r>
+                        <a:rPr sz="1000" b="0">
+                          <a:solidFill>
+                            <a:srgbClr val="1D1B43"/>
+                          </a:solidFill>
+                          <a:latin typeface="Calibri"/>
+                        </a:rPr>
+                        <a:t>MARECHAL CANDIDO RONDON/PR</a:t>
+                      </a:r>
+                    </a:p>
+                  </a:txBody>
+                  <a:tcPr>
+                    <a:solidFill>
+                      <a:srgbClr val="FFFFFF"/>
+                    </a:solidFill>
+                  </a:tcPr>
+                </a:tc>
+                <a:tc>
+                  <a:txBody>
+                    <a:bodyPr/>
+                    <a:lstStyle/>
+                    <a:p>
+                      <a:pPr algn="l"/>
+                      <a:r>
+                        <a:rPr sz="1000" b="0">
+                          <a:solidFill>
+                            <a:srgbClr val="1D1B43"/>
+                          </a:solidFill>
+                          <a:latin typeface="Calibri"/>
+                        </a:rPr>
+                        <a:t>14/04/2026</a:t>
                       </a:r>
                     </a:p>
                   </a:txBody>
@@ -5959,7 +6531,7 @@
         </p:nvGraphicFramePr>
         <p:xfrm>
           <a:off x="731520" y="1920240"/>
-          <a:ext cx="10698480" cy="3657600"/>
+          <a:ext cx="10698480" cy="3200400"/>
         </p:xfrm>
         <a:graphic>
           <a:graphicData uri="http://schemas.openxmlformats.org/drawingml/2006/table">
@@ -6152,7 +6724,7 @@
                           </a:solidFill>
                           <a:latin typeface="Calibri"/>
                         </a:rPr>
-                        <a:t>56</a:t>
+                        <a:t>30</a:t>
                       </a:r>
                     </a:p>
                   </a:txBody>
@@ -6175,7 +6747,7 @@
                           </a:solidFill>
                           <a:latin typeface="Calibri"/>
                         </a:rPr>
-                        <a:t>53</a:t>
+                        <a:t>30</a:t>
                       </a:r>
                     </a:p>
                   </a:txBody>
@@ -6198,7 +6770,7 @@
                           </a:solidFill>
                           <a:latin typeface="Calibri"/>
                         </a:rPr>
-                        <a:t>3</a:t>
+                        <a:t>0</a:t>
                       </a:r>
                     </a:p>
                   </a:txBody>
@@ -6221,7 +6793,7 @@
                           </a:solidFill>
                           <a:latin typeface="Calibri"/>
                         </a:rPr>
-                        <a:t>94.6%</a:t>
+                        <a:t>100.0%</a:t>
                       </a:r>
                     </a:p>
                   </a:txBody>
@@ -6244,7 +6816,7 @@
                           </a:solidFill>
                           <a:latin typeface="Calibri"/>
                         </a:rPr>
-                        <a:t>Regular</a:t>
+                        <a:t>Excelente</a:t>
                       </a:r>
                     </a:p>
                   </a:txBody>
@@ -6292,7 +6864,7 @@
                           </a:solidFill>
                           <a:latin typeface="Calibri"/>
                         </a:rPr>
-                        <a:t>8</a:t>
+                        <a:t>26</a:t>
                       </a:r>
                     </a:p>
                   </a:txBody>
@@ -6315,7 +6887,7 @@
                           </a:solidFill>
                           <a:latin typeface="Calibri"/>
                         </a:rPr>
-                        <a:t>8</a:t>
+                        <a:t>19</a:t>
                       </a:r>
                     </a:p>
                   </a:txBody>
@@ -6338,7 +6910,7 @@
                           </a:solidFill>
                           <a:latin typeface="Calibri"/>
                         </a:rPr>
-                        <a:t>0</a:t>
+                        <a:t>7</a:t>
                       </a:r>
                     </a:p>
                   </a:txBody>
@@ -6361,7 +6933,7 @@
                           </a:solidFill>
                           <a:latin typeface="Calibri"/>
                         </a:rPr>
-                        <a:t>100.0%</a:t>
+                        <a:t>73.1%</a:t>
                       </a:r>
                     </a:p>
                   </a:txBody>
@@ -6384,7 +6956,7 @@
                           </a:solidFill>
                           <a:latin typeface="Calibri"/>
                         </a:rPr>
-                        <a:t>Excelente</a:t>
+                        <a:t>Atencao</a:t>
                       </a:r>
                     </a:p>
                   </a:txBody>
@@ -6409,7 +6981,7 @@
                           </a:solidFill>
                           <a:latin typeface="Calibri"/>
                         </a:rPr>
-                        <a:t>SC</a:t>
+                        <a:t>MT</a:t>
                       </a:r>
                     </a:p>
                   </a:txBody>
@@ -6432,7 +7004,7 @@
                           </a:solidFill>
                           <a:latin typeface="Calibri"/>
                         </a:rPr>
-                        <a:t>6</a:t>
+                        <a:t>5</a:t>
                       </a:r>
                     </a:p>
                   </a:txBody>
@@ -6455,7 +7027,7 @@
                           </a:solidFill>
                           <a:latin typeface="Calibri"/>
                         </a:rPr>
-                        <a:t>6</a:t>
+                        <a:t>4</a:t>
                       </a:r>
                     </a:p>
                   </a:txBody>
@@ -6478,7 +7050,7 @@
                           </a:solidFill>
                           <a:latin typeface="Calibri"/>
                         </a:rPr>
-                        <a:t>0</a:t>
+                        <a:t>1</a:t>
                       </a:r>
                     </a:p>
                   </a:txBody>
@@ -6501,7 +7073,7 @@
                           </a:solidFill>
                           <a:latin typeface="Calibri"/>
                         </a:rPr>
-                        <a:t>100.0%</a:t>
+                        <a:t>80.0%</a:t>
                       </a:r>
                     </a:p>
                   </a:txBody>
@@ -6524,7 +7096,7 @@
                           </a:solidFill>
                           <a:latin typeface="Calibri"/>
                         </a:rPr>
-                        <a:t>Excelente</a:t>
+                        <a:t>Atencao</a:t>
                       </a:r>
                     </a:p>
                   </a:txBody>
@@ -6572,7 +7144,7 @@
                           </a:solidFill>
                           <a:latin typeface="Calibri"/>
                         </a:rPr>
-                        <a:t>4</a:t>
+                        <a:t>5</a:t>
                       </a:r>
                     </a:p>
                   </a:txBody>
@@ -6595,7 +7167,7 @@
                           </a:solidFill>
                           <a:latin typeface="Calibri"/>
                         </a:rPr>
-                        <a:t>4</a:t>
+                        <a:t>5</a:t>
                       </a:r>
                     </a:p>
                   </a:txBody>
@@ -6689,7 +7261,7 @@
                           </a:solidFill>
                           <a:latin typeface="Calibri"/>
                         </a:rPr>
-                        <a:t>DF</a:t>
+                        <a:t>SC</a:t>
                       </a:r>
                     </a:p>
                   </a:txBody>
@@ -6712,7 +7284,7 @@
                           </a:solidFill>
                           <a:latin typeface="Calibri"/>
                         </a:rPr>
-                        <a:t>3</a:t>
+                        <a:t>5</a:t>
                       </a:r>
                     </a:p>
                   </a:txBody>
@@ -6735,7 +7307,7 @@
                           </a:solidFill>
                           <a:latin typeface="Calibri"/>
                         </a:rPr>
-                        <a:t>3</a:t>
+                        <a:t>5</a:t>
                       </a:r>
                     </a:p>
                   </a:txBody>
@@ -6875,7 +7447,7 @@
                           </a:solidFill>
                           <a:latin typeface="Calibri"/>
                         </a:rPr>
-                        <a:t>3</a:t>
+                        <a:t>2</a:t>
                       </a:r>
                     </a:p>
                   </a:txBody>
@@ -6898,7 +7470,7 @@
                           </a:solidFill>
                           <a:latin typeface="Calibri"/>
                         </a:rPr>
-                        <a:t>0</a:t>
+                        <a:t>1</a:t>
                       </a:r>
                     </a:p>
                   </a:txBody>
@@ -6921,7 +7493,7 @@
                           </a:solidFill>
                           <a:latin typeface="Calibri"/>
                         </a:rPr>
-                        <a:t>100.0%</a:t>
+                        <a:t>66.7%</a:t>
                       </a:r>
                     </a:p>
                   </a:txBody>
@@ -6944,153 +7516,13 @@
                           </a:solidFill>
                           <a:latin typeface="Calibri"/>
                         </a:rPr>
-                        <a:t>Excelente</a:t>
+                        <a:t>Atencao</a:t>
                       </a:r>
                     </a:p>
                   </a:txBody>
                   <a:tcPr>
                     <a:solidFill>
                       <a:srgbClr val="F2F2F2"/>
-                    </a:solidFill>
-                  </a:tcPr>
-                </a:tc>
-              </a:tr>
-              <a:tr h="457200">
-                <a:tc>
-                  <a:txBody>
-                    <a:bodyPr/>
-                    <a:lstStyle/>
-                    <a:p>
-                      <a:pPr algn="l"/>
-                      <a:r>
-                        <a:rPr sz="1000" b="0">
-                          <a:solidFill>
-                            <a:srgbClr val="1D1B43"/>
-                          </a:solidFill>
-                          <a:latin typeface="Calibri"/>
-                        </a:rPr>
-                        <a:t>RJ</a:t>
-                      </a:r>
-                    </a:p>
-                  </a:txBody>
-                  <a:tcPr>
-                    <a:solidFill>
-                      <a:srgbClr val="FFFFFF"/>
-                    </a:solidFill>
-                  </a:tcPr>
-                </a:tc>
-                <a:tc>
-                  <a:txBody>
-                    <a:bodyPr/>
-                    <a:lstStyle/>
-                    <a:p>
-                      <a:pPr algn="l"/>
-                      <a:r>
-                        <a:rPr sz="1000" b="0">
-                          <a:solidFill>
-                            <a:srgbClr val="1D1B43"/>
-                          </a:solidFill>
-                          <a:latin typeface="Calibri"/>
-                        </a:rPr>
-                        <a:t>2</a:t>
-                      </a:r>
-                    </a:p>
-                  </a:txBody>
-                  <a:tcPr>
-                    <a:solidFill>
-                      <a:srgbClr val="FFFFFF"/>
-                    </a:solidFill>
-                  </a:tcPr>
-                </a:tc>
-                <a:tc>
-                  <a:txBody>
-                    <a:bodyPr/>
-                    <a:lstStyle/>
-                    <a:p>
-                      <a:pPr algn="l"/>
-                      <a:r>
-                        <a:rPr sz="1000" b="0">
-                          <a:solidFill>
-                            <a:srgbClr val="1D1B43"/>
-                          </a:solidFill>
-                          <a:latin typeface="Calibri"/>
-                        </a:rPr>
-                        <a:t>2</a:t>
-                      </a:r>
-                    </a:p>
-                  </a:txBody>
-                  <a:tcPr>
-                    <a:solidFill>
-                      <a:srgbClr val="FFFFFF"/>
-                    </a:solidFill>
-                  </a:tcPr>
-                </a:tc>
-                <a:tc>
-                  <a:txBody>
-                    <a:bodyPr/>
-                    <a:lstStyle/>
-                    <a:p>
-                      <a:pPr algn="l"/>
-                      <a:r>
-                        <a:rPr sz="1000" b="0">
-                          <a:solidFill>
-                            <a:srgbClr val="1D1B43"/>
-                          </a:solidFill>
-                          <a:latin typeface="Calibri"/>
-                        </a:rPr>
-                        <a:t>0</a:t>
-                      </a:r>
-                    </a:p>
-                  </a:txBody>
-                  <a:tcPr>
-                    <a:solidFill>
-                      <a:srgbClr val="FFFFFF"/>
-                    </a:solidFill>
-                  </a:tcPr>
-                </a:tc>
-                <a:tc>
-                  <a:txBody>
-                    <a:bodyPr/>
-                    <a:lstStyle/>
-                    <a:p>
-                      <a:pPr algn="l"/>
-                      <a:r>
-                        <a:rPr sz="1000" b="0">
-                          <a:solidFill>
-                            <a:srgbClr val="1D1B43"/>
-                          </a:solidFill>
-                          <a:latin typeface="Calibri"/>
-                        </a:rPr>
-                        <a:t>100.0%</a:t>
-                      </a:r>
-                    </a:p>
-                  </a:txBody>
-                  <a:tcPr>
-                    <a:solidFill>
-                      <a:srgbClr val="FFFFFF"/>
-                    </a:solidFill>
-                  </a:tcPr>
-                </a:tc>
-                <a:tc>
-                  <a:txBody>
-                    <a:bodyPr/>
-                    <a:lstStyle/>
-                    <a:p>
-                      <a:pPr algn="l"/>
-                      <a:r>
-                        <a:rPr sz="1000" b="0">
-                          <a:solidFill>
-                            <a:srgbClr val="1D1B43"/>
-                          </a:solidFill>
-                          <a:latin typeface="Calibri"/>
-                        </a:rPr>
-                        <a:t>Excelente</a:t>
-                      </a:r>
-                    </a:p>
-                  </a:txBody>
-                  <a:tcPr>
-                    <a:solidFill>
-                      <a:srgbClr val="FFFFFF"/>
                     </a:solidFill>
                   </a:tcPr>
                 </a:tc>
@@ -7179,7 +7611,7 @@
                 </a:solidFill>
                 <a:latin typeface="Calibri"/>
               </a:rPr>
-              <a:t>TOP DESTINATARIOS (58 pontos)</a:t>
+              <a:t>TOP DESTINATARIOS (66 pontos)</a:t>
             </a:r>
           </a:p>
         </p:txBody>
@@ -7454,7 +7886,7 @@
                           </a:solidFill>
                           <a:latin typeface="Calibri"/>
                         </a:rPr>
-                        <a:t>VELOCARGAS BRASIL E - GUARULHOS / SP</a:t>
+                        <a:t>TRANSNOBREGA - SAO PAULO / SP</a:t>
                       </a:r>
                     </a:p>
                   </a:txBody>
@@ -7477,7 +7909,7 @@
                           </a:solidFill>
                           <a:latin typeface="Calibri"/>
                         </a:rPr>
-                        <a:t>10</a:t>
+                        <a:t>3</a:t>
                       </a:r>
                     </a:p>
                   </a:txBody>
@@ -7500,7 +7932,7 @@
                           </a:solidFill>
                           <a:latin typeface="Calibri"/>
                         </a:rPr>
-                        <a:t>10</a:t>
+                        <a:t>3</a:t>
                       </a:r>
                     </a:p>
                   </a:txBody>
@@ -7617,7 +8049,7 @@
                           </a:solidFill>
                           <a:latin typeface="Calibri"/>
                         </a:rPr>
-                        <a:t>VAILOG TRANSPORTES E - SAO PAULO / SP</a:t>
+                        <a:t>WILSON LUIS TRANSPOR - GUARULHOS / SP</a:t>
                       </a:r>
                     </a:p>
                   </a:txBody>
@@ -7640,7 +8072,7 @@
                           </a:solidFill>
                           <a:latin typeface="Calibri"/>
                         </a:rPr>
-                        <a:t>6</a:t>
+                        <a:t>3</a:t>
                       </a:r>
                     </a:p>
                   </a:txBody>
@@ -7663,7 +8095,7 @@
                           </a:solidFill>
                           <a:latin typeface="Calibri"/>
                         </a:rPr>
-                        <a:t>6</a:t>
+                        <a:t>3</a:t>
                       </a:r>
                     </a:p>
                   </a:txBody>
@@ -7803,7 +8235,7 @@
                           </a:solidFill>
                           <a:latin typeface="Calibri"/>
                         </a:rPr>
-                        <a:t>4</a:t>
+                        <a:t>2</a:t>
                       </a:r>
                     </a:p>
                   </a:txBody>
@@ -7826,7 +8258,7 @@
                           </a:solidFill>
                           <a:latin typeface="Calibri"/>
                         </a:rPr>
-                        <a:t>4</a:t>
+                        <a:t>2</a:t>
                       </a:r>
                     </a:p>
                   </a:txBody>
@@ -7943,7 +8375,7 @@
                           </a:solidFill>
                           <a:latin typeface="Calibri"/>
                         </a:rPr>
-                        <a:t>WILSON LUIS TRANSPOR - GUARULHOS / SP</a:t>
+                        <a:t>VAILOG TRANSPORTES E - SAO PAULO / SP</a:t>
                       </a:r>
                     </a:p>
                   </a:txBody>
@@ -7966,7 +8398,7 @@
                           </a:solidFill>
                           <a:latin typeface="Calibri"/>
                         </a:rPr>
-                        <a:t>3</a:t>
+                        <a:t>2</a:t>
                       </a:r>
                     </a:p>
                   </a:txBody>
@@ -7989,7 +8421,7 @@
                           </a:solidFill>
                           <a:latin typeface="Calibri"/>
                         </a:rPr>
-                        <a:t>3</a:t>
+                        <a:t>2</a:t>
                       </a:r>
                     </a:p>
                   </a:txBody>
@@ -8106,7 +8538,7 @@
                           </a:solidFill>
                           <a:latin typeface="Calibri"/>
                         </a:rPr>
-                        <a:t>SERAFIM TRANSPORTE D - GUARULHOS / SP</a:t>
+                        <a:t>LETICIA BABY - MONTE AZUL PAULISTA / SP</a:t>
                       </a:r>
                     </a:p>
                   </a:txBody>
@@ -8269,7 +8701,7 @@
                           </a:solidFill>
                           <a:latin typeface="Calibri"/>
                         </a:rPr>
-                        <a:t>LANDRICO MINAS LTDA - SAO PAULO / SP</a:t>
+                        <a:t>REDE MAIS CALCADOS E - XANXERE / SC</a:t>
                       </a:r>
                     </a:p>
                   </a:txBody>
@@ -8432,7 +8864,7 @@
                           </a:solidFill>
                           <a:latin typeface="Calibri"/>
                         </a:rPr>
-                        <a:t>ERF SILVA ACESSORIOS - SAO PAULO / SP</a:t>
+                        <a:t>56.969.922 CARLITO D - GOIANIA / GO</a:t>
                       </a:r>
                     </a:p>
                   </a:txBody>
@@ -8455,7 +8887,7 @@
                           </a:solidFill>
                           <a:latin typeface="Calibri"/>
                         </a:rPr>
-                        <a:t>2</a:t>
+                        <a:t>1</a:t>
                       </a:r>
                     </a:p>
                   </a:txBody>
@@ -8478,7 +8910,7 @@
                           </a:solidFill>
                           <a:latin typeface="Calibri"/>
                         </a:rPr>
-                        <a:t>2</a:t>
+                        <a:t>1</a:t>
                       </a:r>
                     </a:p>
                   </a:txBody>
@@ -8595,7 +9027,7 @@
                           </a:solidFill>
                           <a:latin typeface="Calibri"/>
                         </a:rPr>
-                        <a:t>BATIKI COM IMPORT EX - SAO JOSE DO RIO PRETO / S</a:t>
+                        <a:t>3 IRMAOS BRINQ E VAR - URUACU / GO</a:t>
                       </a:r>
                     </a:p>
                   </a:txBody>
@@ -8618,7 +9050,7 @@
                           </a:solidFill>
                           <a:latin typeface="Calibri"/>
                         </a:rPr>
-                        <a:t>2</a:t>
+                        <a:t>1</a:t>
                       </a:r>
                     </a:p>
                   </a:txBody>
@@ -8664,7 +9096,7 @@
                           </a:solidFill>
                           <a:latin typeface="Calibri"/>
                         </a:rPr>
-                        <a:t>1</a:t>
+                        <a:t>0</a:t>
                       </a:r>
                     </a:p>
                   </a:txBody>
@@ -8687,7 +9119,7 @@
                           </a:solidFill>
                           <a:latin typeface="Calibri"/>
                         </a:rPr>
-                        <a:t>50.0%</a:t>
+                        <a:t>100.0%</a:t>
                       </a:r>
                     </a:p>
                   </a:txBody>
@@ -8710,7 +9142,7 @@
                           </a:solidFill>
                           <a:latin typeface="Calibri"/>
                         </a:rPr>
-                        <a:t>Atencao</a:t>
+                        <a:t>Excelente</a:t>
                       </a:r>
                     </a:p>
                   </a:txBody>
@@ -8758,7 +9190,7 @@
                           </a:solidFill>
                           <a:latin typeface="Calibri"/>
                         </a:rPr>
-                        <a:t>ADERALDO GONCALVES D - BRASILIA / DF</a:t>
+                        <a:t>AMIR NURELDIN EZBE A - JATAI / GO</a:t>
                       </a:r>
                     </a:p>
                   </a:txBody>
@@ -8781,7 +9213,7 @@
                           </a:solidFill>
                           <a:latin typeface="Calibri"/>
                         </a:rPr>
-                        <a:t>2</a:t>
+                        <a:t>1</a:t>
                       </a:r>
                     </a:p>
                   </a:txBody>
@@ -8804,7 +9236,7 @@
                           </a:solidFill>
                           <a:latin typeface="Calibri"/>
                         </a:rPr>
-                        <a:t>2</a:t>
+                        <a:t>1</a:t>
                       </a:r>
                     </a:p>
                   </a:txBody>
@@ -8921,7 +9353,7 @@
                           </a:solidFill>
                           <a:latin typeface="Calibri"/>
                         </a:rPr>
-                        <a:t>ALEX IMMIANOVSKI - BRUSQUE / SC</a:t>
+                        <a:t>ABC LAJEADO DISTRIBU - LAJEADO / RS</a:t>
                       </a:r>
                     </a:p>
                   </a:txBody>
@@ -9084,7 +9516,7 @@
                           </a:solidFill>
                           <a:latin typeface="Calibri"/>
                         </a:rPr>
-                        <a:t>CHRISTIANE GIRON ME - BAURU / SP</a:t>
+                        <a:t>C TEIXEIRA E GALVAN - TERRA NOVA DO NORTE / MT</a:t>
                       </a:r>
                     </a:p>
                   </a:txBody>
@@ -9247,7 +9679,7 @@
                           </a:solidFill>
                           <a:latin typeface="Calibri"/>
                         </a:rPr>
-                        <a:t>CHUNLI - UBATUBA / SP</a:t>
+                        <a:t>CAPITAL BOLSAS E ACE - SOROCABA / SP</a:t>
                       </a:r>
                     </a:p>
                   </a:txBody>
@@ -9410,7 +9842,7 @@
                           </a:solidFill>
                           <a:latin typeface="Calibri"/>
                         </a:rPr>
-                        <a:t>DANIELA BARBOSA ME - OSORIO / RS</a:t>
+                        <a:t>CAROLINE KOTSAN ME - CURITIBA / PR</a:t>
                       </a:r>
                     </a:p>
                   </a:txBody>
@@ -9573,7 +10005,7 @@
                           </a:solidFill>
                           <a:latin typeface="Calibri"/>
                         </a:rPr>
-                        <a:t>CIA BRASIL TRANSPORT - GUARULHOS / SP</a:t>
+                        <a:t>ALESSANDRA DA SILVA - BARRA DO BUGRES / MT</a:t>
                       </a:r>
                     </a:p>
                   </a:txBody>

--- a/BATIKI_COM_IMPORT_EXPORT_LTDA.pptx
+++ b/BATIKI_COM_IMPORT_EXPORT_LTDA.pptx
@@ -143,10 +143,13 @@
           </c:spPr>
           <c:cat>
             <c:strRef>
-              <c:f>Sheet1!$A$2:$A$2</c:f>
+              <c:f>Sheet1!$A$2:$A$3</c:f>
               <c:strCache>
-                <c:ptCount val="1"/>
+                <c:ptCount val="2"/>
                 <c:pt idx="0">
+                  <c:v>Maio 2026</c:v>
+                </c:pt>
+                <c:pt idx="1">
                   <c:v>Abril 2026</c:v>
                 </c:pt>
               </c:strCache>
@@ -154,11 +157,14 @@
           </c:cat>
           <c:val>
             <c:numRef>
-              <c:f>Sheet1!$B$2:$B$2</c:f>
+              <c:f>Sheet1!$B$2:$B$3</c:f>
               <c:numCache>
                 <c:formatCode>General</c:formatCode>
-                <c:ptCount val="1"/>
+                <c:ptCount val="2"/>
                 <c:pt idx="0">
+                  <c:v>79</c:v>
+                </c:pt>
+                <c:pt idx="1">
                   <c:v>65</c:v>
                 </c:pt>
               </c:numCache>
@@ -186,10 +192,13 @@
           </c:spPr>
           <c:cat>
             <c:strRef>
-              <c:f>Sheet1!$A$2:$A$2</c:f>
+              <c:f>Sheet1!$A$2:$A$3</c:f>
               <c:strCache>
-                <c:ptCount val="1"/>
+                <c:ptCount val="2"/>
                 <c:pt idx="0">
+                  <c:v>Maio 2026</c:v>
+                </c:pt>
+                <c:pt idx="1">
                   <c:v>Abril 2026</c:v>
                 </c:pt>
               </c:strCache>
@@ -197,11 +206,14 @@
           </c:cat>
           <c:val>
             <c:numRef>
-              <c:f>Sheet1!$C$2:$C$2</c:f>
+              <c:f>Sheet1!$C$2:$C$3</c:f>
               <c:numCache>
                 <c:formatCode>General</c:formatCode>
-                <c:ptCount val="1"/>
+                <c:ptCount val="2"/>
                 <c:pt idx="0">
+                  <c:v>3</c:v>
+                </c:pt>
+                <c:pt idx="1">
                   <c:v>9</c:v>
                 </c:pt>
               </c:numCache>
@@ -4142,7 +4154,7 @@
                           </a:solidFill>
                           <a:latin typeface="Calibri"/>
                         </a:rPr>
-                        <a:t>Marco 2026</a:t>
+                        <a:t>Maio 2026</a:t>
                       </a:r>
                     </a:p>
                   </a:txBody>
@@ -4236,7 +4248,7 @@
                           </a:solidFill>
                           <a:latin typeface="Calibri"/>
                         </a:rPr>
-                        <a:t>-</a:t>
+                        <a:t>82</a:t>
                       </a:r>
                     </a:p>
                   </a:txBody>
@@ -4282,7 +4294,7 @@
                           </a:solidFill>
                           <a:latin typeface="Calibri"/>
                         </a:rPr>
-                        <a:t>-</a:t>
+                        <a:t>- 8</a:t>
                       </a:r>
                     </a:p>
                   </a:txBody>
@@ -4330,7 +4342,7 @@
                           </a:solidFill>
                           <a:latin typeface="Calibri"/>
                         </a:rPr>
-                        <a:t>-</a:t>
+                        <a:t>79</a:t>
                       </a:r>
                     </a:p>
                   </a:txBody>
@@ -4376,7 +4388,7 @@
                           </a:solidFill>
                           <a:latin typeface="Calibri"/>
                         </a:rPr>
-                        <a:t>-</a:t>
+                        <a:t>- 14</a:t>
                       </a:r>
                     </a:p>
                   </a:txBody>
@@ -4424,7 +4436,7 @@
                           </a:solidFill>
                           <a:latin typeface="Calibri"/>
                         </a:rPr>
-                        <a:t>-</a:t>
+                        <a:t>3</a:t>
                       </a:r>
                     </a:p>
                   </a:txBody>
@@ -4470,7 +4482,7 @@
                           </a:solidFill>
                           <a:latin typeface="Calibri"/>
                         </a:rPr>
-                        <a:t>-</a:t>
+                        <a:t>+ 6</a:t>
                       </a:r>
                     </a:p>
                   </a:txBody>
@@ -4518,7 +4530,7 @@
                           </a:solidFill>
                           <a:latin typeface="Calibri"/>
                         </a:rPr>
-                        <a:t>-</a:t>
+                        <a:t>96.3%</a:t>
                       </a:r>
                     </a:p>
                   </a:txBody>
@@ -4564,7 +4576,7 @@
                           </a:solidFill>
                           <a:latin typeface="Calibri"/>
                         </a:rPr>
-                        <a:t>-</a:t>
+                        <a:t>- 8.5pp</a:t>
                       </a:r>
                     </a:p>
                   </a:txBody>
@@ -4735,7 +4747,7 @@
         </p:nvGraphicFramePr>
         <p:xfrm>
           <a:off x="7955279" y="2286000"/>
-          <a:ext cx="4480560" cy="877824"/>
+          <a:ext cx="4480560" cy="1316736"/>
         </p:xfrm>
         <a:graphic>
           <a:graphicData uri="http://schemas.openxmlformats.org/drawingml/2006/table">
@@ -4881,13 +4893,130 @@
                           </a:solidFill>
                           <a:latin typeface="Calibri"/>
                         </a:rPr>
+                        <a:t>Maio 2026</a:t>
+                      </a:r>
+                    </a:p>
+                  </a:txBody>
+                  <a:tcPr>
+                    <a:solidFill>
+                      <a:srgbClr val="FFFFFF"/>
+                    </a:solidFill>
+                  </a:tcPr>
+                </a:tc>
+                <a:tc>
+                  <a:txBody>
+                    <a:bodyPr/>
+                    <a:lstStyle/>
+                    <a:p>
+                      <a:pPr algn="l"/>
+                      <a:r>
+                        <a:rPr sz="1000" b="0">
+                          <a:solidFill>
+                            <a:srgbClr val="1D1B43"/>
+                          </a:solidFill>
+                          <a:latin typeface="Calibri"/>
+                        </a:rPr>
+                        <a:t>82</a:t>
+                      </a:r>
+                    </a:p>
+                  </a:txBody>
+                  <a:tcPr>
+                    <a:solidFill>
+                      <a:srgbClr val="FFFFFF"/>
+                    </a:solidFill>
+                  </a:tcPr>
+                </a:tc>
+                <a:tc>
+                  <a:txBody>
+                    <a:bodyPr/>
+                    <a:lstStyle/>
+                    <a:p>
+                      <a:pPr algn="l"/>
+                      <a:r>
+                        <a:rPr sz="1000" b="0">
+                          <a:solidFill>
+                            <a:srgbClr val="1D1B43"/>
+                          </a:solidFill>
+                          <a:latin typeface="Calibri"/>
+                        </a:rPr>
+                        <a:t>79</a:t>
+                      </a:r>
+                    </a:p>
+                  </a:txBody>
+                  <a:tcPr>
+                    <a:solidFill>
+                      <a:srgbClr val="FFFFFF"/>
+                    </a:solidFill>
+                  </a:tcPr>
+                </a:tc>
+                <a:tc>
+                  <a:txBody>
+                    <a:bodyPr/>
+                    <a:lstStyle/>
+                    <a:p>
+                      <a:pPr algn="l"/>
+                      <a:r>
+                        <a:rPr sz="1000" b="0">
+                          <a:solidFill>
+                            <a:srgbClr val="1D1B43"/>
+                          </a:solidFill>
+                          <a:latin typeface="Calibri"/>
+                        </a:rPr>
+                        <a:t>3</a:t>
+                      </a:r>
+                    </a:p>
+                  </a:txBody>
+                  <a:tcPr>
+                    <a:solidFill>
+                      <a:srgbClr val="FFFFFF"/>
+                    </a:solidFill>
+                  </a:tcPr>
+                </a:tc>
+                <a:tc>
+                  <a:txBody>
+                    <a:bodyPr/>
+                    <a:lstStyle/>
+                    <a:p>
+                      <a:pPr algn="l"/>
+                      <a:r>
+                        <a:rPr sz="1000" b="0">
+                          <a:solidFill>
+                            <a:srgbClr val="1D1B43"/>
+                          </a:solidFill>
+                          <a:latin typeface="Calibri"/>
+                        </a:rPr>
+                        <a:t>96.3%</a:t>
+                      </a:r>
+                    </a:p>
+                  </a:txBody>
+                  <a:tcPr>
+                    <a:solidFill>
+                      <a:srgbClr val="FFFFFF"/>
+                    </a:solidFill>
+                  </a:tcPr>
+                </a:tc>
+              </a:tr>
+              <a:tr h="438912">
+                <a:tc>
+                  <a:txBody>
+                    <a:bodyPr/>
+                    <a:lstStyle/>
+                    <a:p>
+                      <a:pPr algn="l"/>
+                      <a:r>
+                        <a:rPr sz="1000" b="0">
+                          <a:solidFill>
+                            <a:srgbClr val="1D1B43"/>
+                          </a:solidFill>
+                          <a:latin typeface="Calibri"/>
+                        </a:rPr>
                         <a:t>Abril 2026</a:t>
                       </a:r>
                     </a:p>
                   </a:txBody>
                   <a:tcPr>
                     <a:solidFill>
-                      <a:srgbClr val="FFFFFF"/>
+                      <a:srgbClr val="F2F2F2"/>
                     </a:solidFill>
                   </a:tcPr>
                 </a:tc>
@@ -4910,7 +5039,7 @@
                   </a:txBody>
                   <a:tcPr>
                     <a:solidFill>
-                      <a:srgbClr val="FFFFFF"/>
+                      <a:srgbClr val="F2F2F2"/>
                     </a:solidFill>
                   </a:tcPr>
                 </a:tc>
@@ -4933,7 +5062,7 @@
                   </a:txBody>
                   <a:tcPr>
                     <a:solidFill>
-                      <a:srgbClr val="FFFFFF"/>
+                      <a:srgbClr val="F2F2F2"/>
                     </a:solidFill>
                   </a:tcPr>
                 </a:tc>
@@ -4956,7 +5085,7 @@
                   </a:txBody>
                   <a:tcPr>
                     <a:solidFill>
-                      <a:srgbClr val="FFFFFF"/>
+                      <a:srgbClr val="F2F2F2"/>
                     </a:solidFill>
                   </a:tcPr>
                 </a:tc>
@@ -4979,7 +5108,7 @@
                   </a:txBody>
                   <a:tcPr>
                     <a:solidFill>
-                      <a:srgbClr val="FFFFFF"/>
+                      <a:srgbClr val="F2F2F2"/>
                     </a:solidFill>
                   </a:tcPr>
                 </a:tc>

--- a/BATIKI_COM_IMPORT_EXPORT_LTDA.pptx
+++ b/BATIKI_COM_IMPORT_EXPORT_LTDA.pptx
@@ -162,7 +162,7 @@
                 <c:formatCode>General</c:formatCode>
                 <c:ptCount val="2"/>
                 <c:pt idx="0">
-                  <c:v>79</c:v>
+                  <c:v>96</c:v>
                 </c:pt>
                 <c:pt idx="1">
                   <c:v>65</c:v>
@@ -211,7 +211,7 @@
                 <c:formatCode>General</c:formatCode>
                 <c:ptCount val="2"/>
                 <c:pt idx="0">
-                  <c:v>3</c:v>
+                  <c:v>12</c:v>
                 </c:pt>
                 <c:pt idx="1">
                   <c:v>9</c:v>
@@ -4248,7 +4248,7 @@
                           </a:solidFill>
                           <a:latin typeface="Calibri"/>
                         </a:rPr>
-                        <a:t>82</a:t>
+                        <a:t>108</a:t>
                       </a:r>
                     </a:p>
                   </a:txBody>
@@ -4294,7 +4294,7 @@
                           </a:solidFill>
                           <a:latin typeface="Calibri"/>
                         </a:rPr>
-                        <a:t>- 8</a:t>
+                        <a:t>- 34</a:t>
                       </a:r>
                     </a:p>
                   </a:txBody>
@@ -4342,7 +4342,7 @@
                           </a:solidFill>
                           <a:latin typeface="Calibri"/>
                         </a:rPr>
-                        <a:t>79</a:t>
+                        <a:t>96</a:t>
                       </a:r>
                     </a:p>
                   </a:txBody>
@@ -4388,7 +4388,7 @@
                           </a:solidFill>
                           <a:latin typeface="Calibri"/>
                         </a:rPr>
-                        <a:t>- 14</a:t>
+                        <a:t>- 31</a:t>
                       </a:r>
                     </a:p>
                   </a:txBody>
@@ -4436,7 +4436,7 @@
                           </a:solidFill>
                           <a:latin typeface="Calibri"/>
                         </a:rPr>
-                        <a:t>3</a:t>
+                        <a:t>12</a:t>
                       </a:r>
                     </a:p>
                   </a:txBody>
@@ -4482,7 +4482,7 @@
                           </a:solidFill>
                           <a:latin typeface="Calibri"/>
                         </a:rPr>
-                        <a:t>+ 6</a:t>
+                        <a:t>- 3</a:t>
                       </a:r>
                     </a:p>
                   </a:txBody>
@@ -4530,7 +4530,7 @@
                           </a:solidFill>
                           <a:latin typeface="Calibri"/>
                         </a:rPr>
-                        <a:t>96.3%</a:t>
+                        <a:t>88.9%</a:t>
                       </a:r>
                     </a:p>
                   </a:txBody>
@@ -4576,7 +4576,7 @@
                           </a:solidFill>
                           <a:latin typeface="Calibri"/>
                         </a:rPr>
-                        <a:t>- 8.5pp</a:t>
+                        <a:t>- 1.1pp</a:t>
                       </a:r>
                     </a:p>
                   </a:txBody>
@@ -4916,7 +4916,7 @@
                           </a:solidFill>
                           <a:latin typeface="Calibri"/>
                         </a:rPr>
-                        <a:t>82</a:t>
+                        <a:t>108</a:t>
                       </a:r>
                     </a:p>
                   </a:txBody>
@@ -4939,7 +4939,7 @@
                           </a:solidFill>
                           <a:latin typeface="Calibri"/>
                         </a:rPr>
-                        <a:t>79</a:t>
+                        <a:t>96</a:t>
                       </a:r>
                     </a:p>
                   </a:txBody>
@@ -4962,7 +4962,7 @@
                           </a:solidFill>
                           <a:latin typeface="Calibri"/>
                         </a:rPr>
-                        <a:t>3</a:t>
+                        <a:t>12</a:t>
                       </a:r>
                     </a:p>
                   </a:txBody>
@@ -4985,7 +4985,7 @@
                           </a:solidFill>
                           <a:latin typeface="Calibri"/>
                         </a:rPr>
-                        <a:t>96.3%</a:t>
+                        <a:t>88.9%</a:t>
                       </a:r>
                     </a:p>
                   </a:txBody>

--- a/BATIKI_COM_IMPORT_EXPORT_LTDA.pptx
+++ b/BATIKI_COM_IMPORT_EXPORT_LTDA.pptx
@@ -147,10 +147,10 @@
               <c:strCache>
                 <c:ptCount val="2"/>
                 <c:pt idx="0">
-                  <c:v>Maio 2026</c:v>
+                  <c:v>Abril 2026</c:v>
                 </c:pt>
                 <c:pt idx="1">
-                  <c:v>Abril 2026</c:v>
+                  <c:v>Maio 2026</c:v>
                 </c:pt>
               </c:strCache>
             </c:strRef>
@@ -162,10 +162,10 @@
                 <c:formatCode>General</c:formatCode>
                 <c:ptCount val="2"/>
                 <c:pt idx="0">
-                  <c:v>96</c:v>
+                  <c:v>65</c:v>
                 </c:pt>
                 <c:pt idx="1">
-                  <c:v>65</c:v>
+                  <c:v>102</c:v>
                 </c:pt>
               </c:numCache>
             </c:numRef>
@@ -196,10 +196,10 @@
               <c:strCache>
                 <c:ptCount val="2"/>
                 <c:pt idx="0">
-                  <c:v>Maio 2026</c:v>
+                  <c:v>Abril 2026</c:v>
                 </c:pt>
                 <c:pt idx="1">
-                  <c:v>Abril 2026</c:v>
+                  <c:v>Maio 2026</c:v>
                 </c:pt>
               </c:strCache>
             </c:strRef>
@@ -211,10 +211,10 @@
                 <c:formatCode>General</c:formatCode>
                 <c:ptCount val="2"/>
                 <c:pt idx="0">
-                  <c:v>12</c:v>
+                  <c:v>9</c:v>
                 </c:pt>
                 <c:pt idx="1">
-                  <c:v>9</c:v>
+                  <c:v>11</c:v>
                 </c:pt>
               </c:numCache>
             </c:numRef>
@@ -3387,7 +3387,7 @@
                 </a:solidFill>
                 <a:latin typeface="Calibri"/>
               </a:rPr>
-              <a:t>INDICADORES ABRIL 2026</a:t>
+              <a:t>INDICADORES MAIO 2026</a:t>
             </a:r>
           </a:p>
         </p:txBody>
@@ -3708,7 +3708,7 @@
                 </a:solidFill>
                 <a:latin typeface="Calibri"/>
               </a:rPr>
-              <a:t>74</a:t>
+              <a:t>113</a:t>
             </a:r>
           </a:p>
         </p:txBody>
@@ -3823,7 +3823,7 @@
                 </a:solidFill>
                 <a:latin typeface="Calibri"/>
               </a:rPr>
-              <a:t>65</a:t>
+              <a:t>102</a:t>
             </a:r>
           </a:p>
         </p:txBody>
@@ -3938,7 +3938,7 @@
                 </a:solidFill>
                 <a:latin typeface="Calibri"/>
               </a:rPr>
-              <a:t>9</a:t>
+              <a:t>11</a:t>
             </a:r>
           </a:p>
         </p:txBody>
@@ -4053,7 +4053,7 @@
                 </a:solidFill>
                 <a:latin typeface="Calibri"/>
               </a:rPr>
-              <a:t>87.8%</a:t>
+              <a:t>90.3%</a:t>
             </a:r>
           </a:p>
         </p:txBody>
@@ -4154,30 +4154,30 @@
                           </a:solidFill>
                           <a:latin typeface="Calibri"/>
                         </a:rPr>
+                        <a:t>Abril 2026</a:t>
+                      </a:r>
+                    </a:p>
+                  </a:txBody>
+                  <a:tcPr>
+                    <a:solidFill>
+                      <a:srgbClr val="1D1B43"/>
+                    </a:solidFill>
+                  </a:tcPr>
+                </a:tc>
+                <a:tc>
+                  <a:txBody>
+                    <a:bodyPr/>
+                    <a:lstStyle/>
+                    <a:p>
+                      <a:pPr algn="ctr"/>
+                      <a:r>
+                        <a:rPr sz="1100" b="1">
+                          <a:solidFill>
+                            <a:srgbClr val="FFFFFF"/>
+                          </a:solidFill>
+                          <a:latin typeface="Calibri"/>
+                        </a:rPr>
                         <a:t>Maio 2026</a:t>
-                      </a:r>
-                    </a:p>
-                  </a:txBody>
-                  <a:tcPr>
-                    <a:solidFill>
-                      <a:srgbClr val="1D1B43"/>
-                    </a:solidFill>
-                  </a:tcPr>
-                </a:tc>
-                <a:tc>
-                  <a:txBody>
-                    <a:bodyPr/>
-                    <a:lstStyle/>
-                    <a:p>
-                      <a:pPr algn="ctr"/>
-                      <a:r>
-                        <a:rPr sz="1100" b="1">
-                          <a:solidFill>
-                            <a:srgbClr val="FFFFFF"/>
-                          </a:solidFill>
-                          <a:latin typeface="Calibri"/>
-                        </a:rPr>
-                        <a:t>Abril 2026</a:t>
                       </a:r>
                     </a:p>
                   </a:txBody>
@@ -4248,29 +4248,6 @@
                           </a:solidFill>
                           <a:latin typeface="Calibri"/>
                         </a:rPr>
-                        <a:t>108</a:t>
-                      </a:r>
-                    </a:p>
-                  </a:txBody>
-                  <a:tcPr>
-                    <a:solidFill>
-                      <a:srgbClr val="FFFFFF"/>
-                    </a:solidFill>
-                  </a:tcPr>
-                </a:tc>
-                <a:tc>
-                  <a:txBody>
-                    <a:bodyPr/>
-                    <a:lstStyle/>
-                    <a:p>
-                      <a:pPr algn="l"/>
-                      <a:r>
-                        <a:rPr sz="1000" b="0">
-                          <a:solidFill>
-                            <a:srgbClr val="1D1B43"/>
-                          </a:solidFill>
-                          <a:latin typeface="Calibri"/>
-                        </a:rPr>
                         <a:t>74</a:t>
                       </a:r>
                     </a:p>
@@ -4294,7 +4271,30 @@
                           </a:solidFill>
                           <a:latin typeface="Calibri"/>
                         </a:rPr>
-                        <a:t>- 34</a:t>
+                        <a:t>113</a:t>
+                      </a:r>
+                    </a:p>
+                  </a:txBody>
+                  <a:tcPr>
+                    <a:solidFill>
+                      <a:srgbClr val="FFFFFF"/>
+                    </a:solidFill>
+                  </a:tcPr>
+                </a:tc>
+                <a:tc>
+                  <a:txBody>
+                    <a:bodyPr/>
+                    <a:lstStyle/>
+                    <a:p>
+                      <a:pPr algn="l"/>
+                      <a:r>
+                        <a:rPr sz="1000" b="0">
+                          <a:solidFill>
+                            <a:srgbClr val="1D1B43"/>
+                          </a:solidFill>
+                          <a:latin typeface="Calibri"/>
+                        </a:rPr>
+                        <a:t>+ 39</a:t>
                       </a:r>
                     </a:p>
                   </a:txBody>
@@ -4342,7 +4342,7 @@
                           </a:solidFill>
                           <a:latin typeface="Calibri"/>
                         </a:rPr>
-                        <a:t>96</a:t>
+                        <a:t>65</a:t>
                       </a:r>
                     </a:p>
                   </a:txBody>
@@ -4365,7 +4365,7 @@
                           </a:solidFill>
                           <a:latin typeface="Calibri"/>
                         </a:rPr>
-                        <a:t>65</a:t>
+                        <a:t>102</a:t>
                       </a:r>
                     </a:p>
                   </a:txBody>
@@ -4388,7 +4388,7 @@
                           </a:solidFill>
                           <a:latin typeface="Calibri"/>
                         </a:rPr>
-                        <a:t>- 31</a:t>
+                        <a:t>+ 37</a:t>
                       </a:r>
                     </a:p>
                   </a:txBody>
@@ -4436,29 +4436,6 @@
                           </a:solidFill>
                           <a:latin typeface="Calibri"/>
                         </a:rPr>
-                        <a:t>12</a:t>
-                      </a:r>
-                    </a:p>
-                  </a:txBody>
-                  <a:tcPr>
-                    <a:solidFill>
-                      <a:srgbClr val="FFFFFF"/>
-                    </a:solidFill>
-                  </a:tcPr>
-                </a:tc>
-                <a:tc>
-                  <a:txBody>
-                    <a:bodyPr/>
-                    <a:lstStyle/>
-                    <a:p>
-                      <a:pPr algn="l"/>
-                      <a:r>
-                        <a:rPr sz="1000" b="0">
-                          <a:solidFill>
-                            <a:srgbClr val="1D1B43"/>
-                          </a:solidFill>
-                          <a:latin typeface="Calibri"/>
-                        </a:rPr>
                         <a:t>9</a:t>
                       </a:r>
                     </a:p>
@@ -4482,7 +4459,30 @@
                           </a:solidFill>
                           <a:latin typeface="Calibri"/>
                         </a:rPr>
-                        <a:t>- 3</a:t>
+                        <a:t>11</a:t>
+                      </a:r>
+                    </a:p>
+                  </a:txBody>
+                  <a:tcPr>
+                    <a:solidFill>
+                      <a:srgbClr val="FFFFFF"/>
+                    </a:solidFill>
+                  </a:tcPr>
+                </a:tc>
+                <a:tc>
+                  <a:txBody>
+                    <a:bodyPr/>
+                    <a:lstStyle/>
+                    <a:p>
+                      <a:pPr algn="l"/>
+                      <a:r>
+                        <a:rPr sz="1000" b="0">
+                          <a:solidFill>
+                            <a:srgbClr val="1D1B43"/>
+                          </a:solidFill>
+                          <a:latin typeface="Calibri"/>
+                        </a:rPr>
+                        <a:t>+ 2</a:t>
                       </a:r>
                     </a:p>
                   </a:txBody>
@@ -4530,7 +4530,7 @@
                           </a:solidFill>
                           <a:latin typeface="Calibri"/>
                         </a:rPr>
-                        <a:t>88.9%</a:t>
+                        <a:t>87.8%</a:t>
                       </a:r>
                     </a:p>
                   </a:txBody>
@@ -4553,7 +4553,7 @@
                           </a:solidFill>
                           <a:latin typeface="Calibri"/>
                         </a:rPr>
-                        <a:t>87.8%</a:t>
+                        <a:t>90.3%</a:t>
                       </a:r>
                     </a:p>
                   </a:txBody>
@@ -4576,7 +4576,7 @@
                           </a:solidFill>
                           <a:latin typeface="Calibri"/>
                         </a:rPr>
-                        <a:t>- 1.1pp</a:t>
+                        <a:t>+ 2.5pp</a:t>
                       </a:r>
                     </a:p>
                   </a:txBody>
@@ -4893,99 +4893,99 @@
                           </a:solidFill>
                           <a:latin typeface="Calibri"/>
                         </a:rPr>
-                        <a:t>Maio 2026</a:t>
-                      </a:r>
-                    </a:p>
-                  </a:txBody>
-                  <a:tcPr>
-                    <a:solidFill>
-                      <a:srgbClr val="FFFFFF"/>
-                    </a:solidFill>
-                  </a:tcPr>
-                </a:tc>
-                <a:tc>
-                  <a:txBody>
-                    <a:bodyPr/>
-                    <a:lstStyle/>
-                    <a:p>
-                      <a:pPr algn="l"/>
-                      <a:r>
-                        <a:rPr sz="1000" b="0">
-                          <a:solidFill>
-                            <a:srgbClr val="1D1B43"/>
-                          </a:solidFill>
-                          <a:latin typeface="Calibri"/>
-                        </a:rPr>
-                        <a:t>108</a:t>
-                      </a:r>
-                    </a:p>
-                  </a:txBody>
-                  <a:tcPr>
-                    <a:solidFill>
-                      <a:srgbClr val="FFFFFF"/>
-                    </a:solidFill>
-                  </a:tcPr>
-                </a:tc>
-                <a:tc>
-                  <a:txBody>
-                    <a:bodyPr/>
-                    <a:lstStyle/>
-                    <a:p>
-                      <a:pPr algn="l"/>
-                      <a:r>
-                        <a:rPr sz="1000" b="0">
-                          <a:solidFill>
-                            <a:srgbClr val="1D1B43"/>
-                          </a:solidFill>
-                          <a:latin typeface="Calibri"/>
-                        </a:rPr>
-                        <a:t>96</a:t>
-                      </a:r>
-                    </a:p>
-                  </a:txBody>
-                  <a:tcPr>
-                    <a:solidFill>
-                      <a:srgbClr val="FFFFFF"/>
-                    </a:solidFill>
-                  </a:tcPr>
-                </a:tc>
-                <a:tc>
-                  <a:txBody>
-                    <a:bodyPr/>
-                    <a:lstStyle/>
-                    <a:p>
-                      <a:pPr algn="l"/>
-                      <a:r>
-                        <a:rPr sz="1000" b="0">
-                          <a:solidFill>
-                            <a:srgbClr val="1D1B43"/>
-                          </a:solidFill>
-                          <a:latin typeface="Calibri"/>
-                        </a:rPr>
-                        <a:t>12</a:t>
-                      </a:r>
-                    </a:p>
-                  </a:txBody>
-                  <a:tcPr>
-                    <a:solidFill>
-                      <a:srgbClr val="FFFFFF"/>
-                    </a:solidFill>
-                  </a:tcPr>
-                </a:tc>
-                <a:tc>
-                  <a:txBody>
-                    <a:bodyPr/>
-                    <a:lstStyle/>
-                    <a:p>
-                      <a:pPr algn="l"/>
-                      <a:r>
-                        <a:rPr sz="1000" b="0">
-                          <a:solidFill>
-                            <a:srgbClr val="1D1B43"/>
-                          </a:solidFill>
-                          <a:latin typeface="Calibri"/>
-                        </a:rPr>
-                        <a:t>88.9%</a:t>
+                        <a:t>Abril 2026</a:t>
+                      </a:r>
+                    </a:p>
+                  </a:txBody>
+                  <a:tcPr>
+                    <a:solidFill>
+                      <a:srgbClr val="FFFFFF"/>
+                    </a:solidFill>
+                  </a:tcPr>
+                </a:tc>
+                <a:tc>
+                  <a:txBody>
+                    <a:bodyPr/>
+                    <a:lstStyle/>
+                    <a:p>
+                      <a:pPr algn="l"/>
+                      <a:r>
+                        <a:rPr sz="1000" b="0">
+                          <a:solidFill>
+                            <a:srgbClr val="1D1B43"/>
+                          </a:solidFill>
+                          <a:latin typeface="Calibri"/>
+                        </a:rPr>
+                        <a:t>74</a:t>
+                      </a:r>
+                    </a:p>
+                  </a:txBody>
+                  <a:tcPr>
+                    <a:solidFill>
+                      <a:srgbClr val="FFFFFF"/>
+                    </a:solidFill>
+                  </a:tcPr>
+                </a:tc>
+                <a:tc>
+                  <a:txBody>
+                    <a:bodyPr/>
+                    <a:lstStyle/>
+                    <a:p>
+                      <a:pPr algn="l"/>
+                      <a:r>
+                        <a:rPr sz="1000" b="0">
+                          <a:solidFill>
+                            <a:srgbClr val="1D1B43"/>
+                          </a:solidFill>
+                          <a:latin typeface="Calibri"/>
+                        </a:rPr>
+                        <a:t>65</a:t>
+                      </a:r>
+                    </a:p>
+                  </a:txBody>
+                  <a:tcPr>
+                    <a:solidFill>
+                      <a:srgbClr val="FFFFFF"/>
+                    </a:solidFill>
+                  </a:tcPr>
+                </a:tc>
+                <a:tc>
+                  <a:txBody>
+                    <a:bodyPr/>
+                    <a:lstStyle/>
+                    <a:p>
+                      <a:pPr algn="l"/>
+                      <a:r>
+                        <a:rPr sz="1000" b="0">
+                          <a:solidFill>
+                            <a:srgbClr val="1D1B43"/>
+                          </a:solidFill>
+                          <a:latin typeface="Calibri"/>
+                        </a:rPr>
+                        <a:t>9</a:t>
+                      </a:r>
+                    </a:p>
+                  </a:txBody>
+                  <a:tcPr>
+                    <a:solidFill>
+                      <a:srgbClr val="FFFFFF"/>
+                    </a:solidFill>
+                  </a:tcPr>
+                </a:tc>
+                <a:tc>
+                  <a:txBody>
+                    <a:bodyPr/>
+                    <a:lstStyle/>
+                    <a:p>
+                      <a:pPr algn="l"/>
+                      <a:r>
+                        <a:rPr sz="1000" b="0">
+                          <a:solidFill>
+                            <a:srgbClr val="1D1B43"/>
+                          </a:solidFill>
+                          <a:latin typeface="Calibri"/>
+                        </a:rPr>
+                        <a:t>87.8%</a:t>
                       </a:r>
                     </a:p>
                   </a:txBody>
@@ -5010,7 +5010,7 @@
                           </a:solidFill>
                           <a:latin typeface="Calibri"/>
                         </a:rPr>
-                        <a:t>Abril 2026</a:t>
+                        <a:t>Maio 2026</a:t>
                       </a:r>
                     </a:p>
                   </a:txBody>
@@ -5033,7 +5033,7 @@
                           </a:solidFill>
                           <a:latin typeface="Calibri"/>
                         </a:rPr>
-                        <a:t>74</a:t>
+                        <a:t>113</a:t>
                       </a:r>
                     </a:p>
                   </a:txBody>
@@ -5056,7 +5056,7 @@
                           </a:solidFill>
                           <a:latin typeface="Calibri"/>
                         </a:rPr>
-                        <a:t>65</a:t>
+                        <a:t>102</a:t>
                       </a:r>
                     </a:p>
                   </a:txBody>
@@ -5079,7 +5079,7 @@
                           </a:solidFill>
                           <a:latin typeface="Calibri"/>
                         </a:rPr>
-                        <a:t>9</a:t>
+                        <a:t>11</a:t>
                       </a:r>
                     </a:p>
                   </a:txBody>
@@ -5102,7 +5102,7 @@
                           </a:solidFill>
                           <a:latin typeface="Calibri"/>
                         </a:rPr>
-                        <a:t>87.8%</a:t>
+                        <a:t>90.3%</a:t>
                       </a:r>
                     </a:p>
                   </a:txBody>
@@ -5190,7 +5190,7 @@
                 </a:solidFill>
                 <a:latin typeface="Calibri"/>
               </a:rPr>
-              <a:t>PERFORMANCE: 87.8% - REGULAR</a:t>
+              <a:t>PERFORMANCE: 90.3% - REGULAR</a:t>
             </a:r>
           </a:p>
         </p:txBody>
@@ -5275,7 +5275,7 @@
                 </a:solidFill>
                 <a:latin typeface="Calibri"/>
               </a:rPr>
-              <a:t>OCORRENCIAS FORA DO PRAZO (9)</a:t>
+              <a:t>OCORRENCIAS FORA DO PRAZO (11)</a:t>
             </a:r>
           </a:p>
         </p:txBody>
@@ -5333,7 +5333,7 @@
         </p:nvGraphicFramePr>
         <p:xfrm>
           <a:off x="457200" y="1828800"/>
-          <a:ext cx="11429999" cy="3840480"/>
+          <a:ext cx="11429999" cy="4572000"/>
         </p:xfrm>
         <a:graphic>
           <a:graphicData uri="http://schemas.openxmlformats.org/drawingml/2006/table">
@@ -5348,7 +5348,7 @@
                 <a:gridCol w="1554480"/>
                 <a:gridCol w="2743200"/>
               </a:tblGrid>
-              <a:tr h="384048">
+              <a:tr h="381000">
                 <a:tc>
                   <a:txBody>
                     <a:bodyPr/>
@@ -5465,90 +5465,90 @@
                   </a:tcPr>
                 </a:tc>
               </a:tr>
-              <a:tr h="384048">
-                <a:tc>
-                  <a:txBody>
-                    <a:bodyPr/>
-                    <a:lstStyle/>
-                    <a:p>
-                      <a:pPr algn="l"/>
-                      <a:r>
-                        <a:rPr sz="1000" b="0">
-                          <a:solidFill>
-                            <a:srgbClr val="1D1B43"/>
-                          </a:solidFill>
-                          <a:latin typeface="Calibri"/>
-                        </a:rPr>
-                        <a:t>275848</a:t>
-                      </a:r>
-                    </a:p>
-                  </a:txBody>
-                  <a:tcPr>
-                    <a:solidFill>
-                      <a:srgbClr val="FFFFFF"/>
-                    </a:solidFill>
-                  </a:tcPr>
-                </a:tc>
-                <a:tc>
-                  <a:txBody>
-                    <a:bodyPr/>
-                    <a:lstStyle/>
-                    <a:p>
-                      <a:pPr algn="l"/>
-                      <a:r>
-                        <a:rPr sz="1000" b="0">
-                          <a:solidFill>
-                            <a:srgbClr val="1D1B43"/>
-                          </a:solidFill>
-                          <a:latin typeface="Calibri"/>
-                        </a:rPr>
-                        <a:t>ANTONIO MARCOS DA SI - NAZARIO / GO</a:t>
-                      </a:r>
-                    </a:p>
-                  </a:txBody>
-                  <a:tcPr>
-                    <a:solidFill>
-                      <a:srgbClr val="FFFFFF"/>
-                    </a:solidFill>
-                  </a:tcPr>
-                </a:tc>
-                <a:tc>
-                  <a:txBody>
-                    <a:bodyPr/>
-                    <a:lstStyle/>
-                    <a:p>
-                      <a:pPr algn="l"/>
-                      <a:r>
-                        <a:rPr sz="1000" b="0">
-                          <a:solidFill>
-                            <a:srgbClr val="1D1B43"/>
-                          </a:solidFill>
-                          <a:latin typeface="Calibri"/>
-                        </a:rPr>
-                        <a:t>NAZARIO/GO</a:t>
-                      </a:r>
-                    </a:p>
-                  </a:txBody>
-                  <a:tcPr>
-                    <a:solidFill>
-                      <a:srgbClr val="FFFFFF"/>
-                    </a:solidFill>
-                  </a:tcPr>
-                </a:tc>
-                <a:tc>
-                  <a:txBody>
-                    <a:bodyPr/>
-                    <a:lstStyle/>
-                    <a:p>
-                      <a:pPr algn="l"/>
-                      <a:r>
-                        <a:rPr sz="1000" b="0">
-                          <a:solidFill>
-                            <a:srgbClr val="1D1B43"/>
-                          </a:solidFill>
-                          <a:latin typeface="Calibri"/>
-                        </a:rPr>
-                        <a:t>06/04/2026</a:t>
+              <a:tr h="381000">
+                <a:tc>
+                  <a:txBody>
+                    <a:bodyPr/>
+                    <a:lstStyle/>
+                    <a:p>
+                      <a:pPr algn="l"/>
+                      <a:r>
+                        <a:rPr sz="1000" b="0">
+                          <a:solidFill>
+                            <a:srgbClr val="1D1B43"/>
+                          </a:solidFill>
+                          <a:latin typeface="Calibri"/>
+                        </a:rPr>
+                        <a:t>282113</a:t>
+                      </a:r>
+                    </a:p>
+                  </a:txBody>
+                  <a:tcPr>
+                    <a:solidFill>
+                      <a:srgbClr val="FFFFFF"/>
+                    </a:solidFill>
+                  </a:tcPr>
+                </a:tc>
+                <a:tc>
+                  <a:txBody>
+                    <a:bodyPr/>
+                    <a:lstStyle/>
+                    <a:p>
+                      <a:pPr algn="l"/>
+                      <a:r>
+                        <a:rPr sz="1000" b="0">
+                          <a:solidFill>
+                            <a:srgbClr val="1D1B43"/>
+                          </a:solidFill>
+                          <a:latin typeface="Calibri"/>
+                        </a:rPr>
+                        <a:t>TCB COMERCIO DE ARTI - SAO PAULO / SP</a:t>
+                      </a:r>
+                    </a:p>
+                  </a:txBody>
+                  <a:tcPr>
+                    <a:solidFill>
+                      <a:srgbClr val="FFFFFF"/>
+                    </a:solidFill>
+                  </a:tcPr>
+                </a:tc>
+                <a:tc>
+                  <a:txBody>
+                    <a:bodyPr/>
+                    <a:lstStyle/>
+                    <a:p>
+                      <a:pPr algn="l"/>
+                      <a:r>
+                        <a:rPr sz="1000" b="0">
+                          <a:solidFill>
+                            <a:srgbClr val="1D1B43"/>
+                          </a:solidFill>
+                          <a:latin typeface="Calibri"/>
+                        </a:rPr>
+                        <a:t>SAO PAULO/SP</a:t>
+                      </a:r>
+                    </a:p>
+                  </a:txBody>
+                  <a:tcPr>
+                    <a:solidFill>
+                      <a:srgbClr val="FFFFFF"/>
+                    </a:solidFill>
+                  </a:tcPr>
+                </a:tc>
+                <a:tc>
+                  <a:txBody>
+                    <a:bodyPr/>
+                    <a:lstStyle/>
+                    <a:p>
+                      <a:pPr algn="l"/>
+                      <a:r>
+                        <a:rPr sz="1000" b="0">
+                          <a:solidFill>
+                            <a:srgbClr val="1D1B43"/>
+                          </a:solidFill>
+                          <a:latin typeface="Calibri"/>
+                        </a:rPr>
+                        <a:t>12/05/2026</a:t>
                       </a:r>
                     </a:p>
                   </a:txBody>
@@ -5582,21 +5582,21 @@
                   </a:tcPr>
                 </a:tc>
               </a:tr>
-              <a:tr h="384048">
-                <a:tc>
-                  <a:txBody>
-                    <a:bodyPr/>
-                    <a:lstStyle/>
-                    <a:p>
-                      <a:pPr algn="l"/>
-                      <a:r>
-                        <a:rPr sz="1000" b="0">
-                          <a:solidFill>
-                            <a:srgbClr val="1D1B43"/>
-                          </a:solidFill>
-                          <a:latin typeface="Calibri"/>
-                        </a:rPr>
-                        <a:t>275849</a:t>
+              <a:tr h="381000">
+                <a:tc>
+                  <a:txBody>
+                    <a:bodyPr/>
+                    <a:lstStyle/>
+                    <a:p>
+                      <a:pPr algn="l"/>
+                      <a:r>
+                        <a:rPr sz="1000" b="0">
+                          <a:solidFill>
+                            <a:srgbClr val="1D1B43"/>
+                          </a:solidFill>
+                          <a:latin typeface="Calibri"/>
+                        </a:rPr>
+                        <a:t>282115</a:t>
                       </a:r>
                     </a:p>
                   </a:txBody>
@@ -5619,7 +5619,7 @@
                           </a:solidFill>
                           <a:latin typeface="Calibri"/>
                         </a:rPr>
-                        <a:t>LEO MOVEIS LTDA ME - ARUANA / GO</a:t>
+                        <a:t>CHRISTIANE GIRON ME - ARARAQUARA / SP</a:t>
                       </a:r>
                     </a:p>
                   </a:txBody>
@@ -5642,7 +5642,7 @@
                           </a:solidFill>
                           <a:latin typeface="Calibri"/>
                         </a:rPr>
-                        <a:t>ARUANA/GO</a:t>
+                        <a:t>ARARAQUARA/SP</a:t>
                       </a:r>
                     </a:p>
                   </a:txBody>
@@ -5665,7 +5665,7 @@
                           </a:solidFill>
                           <a:latin typeface="Calibri"/>
                         </a:rPr>
-                        <a:t>06/04/2026</a:t>
+                        <a:t>13/05/2026</a:t>
                       </a:r>
                     </a:p>
                   </a:txBody>
@@ -5699,90 +5699,90 @@
                   </a:tcPr>
                 </a:tc>
               </a:tr>
-              <a:tr h="384048">
-                <a:tc>
-                  <a:txBody>
-                    <a:bodyPr/>
-                    <a:lstStyle/>
-                    <a:p>
-                      <a:pPr algn="l"/>
-                      <a:r>
-                        <a:rPr sz="1000" b="0">
-                          <a:solidFill>
-                            <a:srgbClr val="1D1B43"/>
-                          </a:solidFill>
-                          <a:latin typeface="Calibri"/>
-                        </a:rPr>
-                        <a:t>275851</a:t>
-                      </a:r>
-                    </a:p>
-                  </a:txBody>
-                  <a:tcPr>
-                    <a:solidFill>
-                      <a:srgbClr val="FFFFFF"/>
-                    </a:solidFill>
-                  </a:tcPr>
-                </a:tc>
-                <a:tc>
-                  <a:txBody>
-                    <a:bodyPr/>
-                    <a:lstStyle/>
-                    <a:p>
-                      <a:pPr algn="l"/>
-                      <a:r>
-                        <a:rPr sz="1000" b="0">
-                          <a:solidFill>
-                            <a:srgbClr val="1D1B43"/>
-                          </a:solidFill>
-                          <a:latin typeface="Calibri"/>
-                        </a:rPr>
-                        <a:t>CELSO JERONIMO DE OL - EDEIA / GO</a:t>
-                      </a:r>
-                    </a:p>
-                  </a:txBody>
-                  <a:tcPr>
-                    <a:solidFill>
-                      <a:srgbClr val="FFFFFF"/>
-                    </a:solidFill>
-                  </a:tcPr>
-                </a:tc>
-                <a:tc>
-                  <a:txBody>
-                    <a:bodyPr/>
-                    <a:lstStyle/>
-                    <a:p>
-                      <a:pPr algn="l"/>
-                      <a:r>
-                        <a:rPr sz="1000" b="0">
-                          <a:solidFill>
-                            <a:srgbClr val="1D1B43"/>
-                          </a:solidFill>
-                          <a:latin typeface="Calibri"/>
-                        </a:rPr>
-                        <a:t>EDEIA/GO</a:t>
-                      </a:r>
-                    </a:p>
-                  </a:txBody>
-                  <a:tcPr>
-                    <a:solidFill>
-                      <a:srgbClr val="FFFFFF"/>
-                    </a:solidFill>
-                  </a:tcPr>
-                </a:tc>
-                <a:tc>
-                  <a:txBody>
-                    <a:bodyPr/>
-                    <a:lstStyle/>
-                    <a:p>
-                      <a:pPr algn="l"/>
-                      <a:r>
-                        <a:rPr sz="1000" b="0">
-                          <a:solidFill>
-                            <a:srgbClr val="1D1B43"/>
-                          </a:solidFill>
-                          <a:latin typeface="Calibri"/>
-                        </a:rPr>
-                        <a:t>06/04/2026</a:t>
+              <a:tr h="381000">
+                <a:tc>
+                  <a:txBody>
+                    <a:bodyPr/>
+                    <a:lstStyle/>
+                    <a:p>
+                      <a:pPr algn="l"/>
+                      <a:r>
+                        <a:rPr sz="1000" b="0">
+                          <a:solidFill>
+                            <a:srgbClr val="1D1B43"/>
+                          </a:solidFill>
+                          <a:latin typeface="Calibri"/>
+                        </a:rPr>
+                        <a:t>282128</a:t>
+                      </a:r>
+                    </a:p>
+                  </a:txBody>
+                  <a:tcPr>
+                    <a:solidFill>
+                      <a:srgbClr val="FFFFFF"/>
+                    </a:solidFill>
+                  </a:tcPr>
+                </a:tc>
+                <a:tc>
+                  <a:txBody>
+                    <a:bodyPr/>
+                    <a:lstStyle/>
+                    <a:p>
+                      <a:pPr algn="l"/>
+                      <a:r>
+                        <a:rPr sz="1000" b="0">
+                          <a:solidFill>
+                            <a:srgbClr val="1D1B43"/>
+                          </a:solidFill>
+                          <a:latin typeface="Calibri"/>
+                        </a:rPr>
+                        <a:t>DISTRIBUIDORA DE TAP - GOIANIA / GO</a:t>
+                      </a:r>
+                    </a:p>
+                  </a:txBody>
+                  <a:tcPr>
+                    <a:solidFill>
+                      <a:srgbClr val="FFFFFF"/>
+                    </a:solidFill>
+                  </a:tcPr>
+                </a:tc>
+                <a:tc>
+                  <a:txBody>
+                    <a:bodyPr/>
+                    <a:lstStyle/>
+                    <a:p>
+                      <a:pPr algn="l"/>
+                      <a:r>
+                        <a:rPr sz="1000" b="0">
+                          <a:solidFill>
+                            <a:srgbClr val="1D1B43"/>
+                          </a:solidFill>
+                          <a:latin typeface="Calibri"/>
+                        </a:rPr>
+                        <a:t>GOIANIA/GO</a:t>
+                      </a:r>
+                    </a:p>
+                  </a:txBody>
+                  <a:tcPr>
+                    <a:solidFill>
+                      <a:srgbClr val="FFFFFF"/>
+                    </a:solidFill>
+                  </a:tcPr>
+                </a:tc>
+                <a:tc>
+                  <a:txBody>
+                    <a:bodyPr/>
+                    <a:lstStyle/>
+                    <a:p>
+                      <a:pPr algn="l"/>
+                      <a:r>
+                        <a:rPr sz="1000" b="0">
+                          <a:solidFill>
+                            <a:srgbClr val="1D1B43"/>
+                          </a:solidFill>
+                          <a:latin typeface="Calibri"/>
+                        </a:rPr>
+                        <a:t>20/05/2026</a:t>
                       </a:r>
                     </a:p>
                   </a:txBody>
@@ -5816,21 +5816,21 @@
                   </a:tcPr>
                 </a:tc>
               </a:tr>
-              <a:tr h="384048">
-                <a:tc>
-                  <a:txBody>
-                    <a:bodyPr/>
-                    <a:lstStyle/>
-                    <a:p>
-                      <a:pPr algn="l"/>
-                      <a:r>
-                        <a:rPr sz="1000" b="0">
-                          <a:solidFill>
-                            <a:srgbClr val="1D1B43"/>
-                          </a:solidFill>
-                          <a:latin typeface="Calibri"/>
-                        </a:rPr>
-                        <a:t>276913</a:t>
+              <a:tr h="381000">
+                <a:tc>
+                  <a:txBody>
+                    <a:bodyPr/>
+                    <a:lstStyle/>
+                    <a:p>
+                      <a:pPr algn="l"/>
+                      <a:r>
+                        <a:rPr sz="1000" b="0">
+                          <a:solidFill>
+                            <a:srgbClr val="1D1B43"/>
+                          </a:solidFill>
+                          <a:latin typeface="Calibri"/>
+                        </a:rPr>
+                        <a:t>282389</a:t>
                       </a:r>
                     </a:p>
                   </a:txBody>
@@ -5853,7 +5853,7 @@
                           </a:solidFill>
                           <a:latin typeface="Calibri"/>
                         </a:rPr>
-                        <a:t>CSG RODRIGUESVARIEDA - GOIANESIA / GO</a:t>
+                        <a:t>J. ANTUNES PIMENTEL - PORTO ALEGRE DO TOCANTINS </a:t>
                       </a:r>
                     </a:p>
                   </a:txBody>
@@ -5876,7 +5876,7 @@
                           </a:solidFill>
                           <a:latin typeface="Calibri"/>
                         </a:rPr>
-                        <a:t>GOIANESIA/GO</a:t>
+                        <a:t>PORTO ALEGRE DO TOCANTINS/TO</a:t>
                       </a:r>
                     </a:p>
                   </a:txBody>
@@ -5899,7 +5899,7 @@
                           </a:solidFill>
                           <a:latin typeface="Calibri"/>
                         </a:rPr>
-                        <a:t>06/04/2026</a:t>
+                        <a:t>25/05/2026</a:t>
                       </a:r>
                     </a:p>
                   </a:txBody>
@@ -5933,90 +5933,324 @@
                   </a:tcPr>
                 </a:tc>
               </a:tr>
-              <a:tr h="384048">
-                <a:tc>
-                  <a:txBody>
-                    <a:bodyPr/>
-                    <a:lstStyle/>
-                    <a:p>
-                      <a:pPr algn="l"/>
-                      <a:r>
-                        <a:rPr sz="1000" b="0">
-                          <a:solidFill>
-                            <a:srgbClr val="1D1B43"/>
-                          </a:solidFill>
-                          <a:latin typeface="Calibri"/>
-                        </a:rPr>
-                        <a:t>276918</a:t>
-                      </a:r>
-                    </a:p>
-                  </a:txBody>
-                  <a:tcPr>
-                    <a:solidFill>
-                      <a:srgbClr val="FFFFFF"/>
-                    </a:solidFill>
-                  </a:tcPr>
-                </a:tc>
-                <a:tc>
-                  <a:txBody>
-                    <a:bodyPr/>
-                    <a:lstStyle/>
-                    <a:p>
-                      <a:pPr algn="l"/>
-                      <a:r>
-                        <a:rPr sz="1000" b="0">
-                          <a:solidFill>
-                            <a:srgbClr val="1D1B43"/>
-                          </a:solidFill>
-                          <a:latin typeface="Calibri"/>
-                        </a:rPr>
-                        <a:t>ELETROCENTER MOVEIS - CARMO DO RIO VERDE / GO</a:t>
-                      </a:r>
-                    </a:p>
-                  </a:txBody>
-                  <a:tcPr>
-                    <a:solidFill>
-                      <a:srgbClr val="FFFFFF"/>
-                    </a:solidFill>
-                  </a:tcPr>
-                </a:tc>
-                <a:tc>
-                  <a:txBody>
-                    <a:bodyPr/>
-                    <a:lstStyle/>
-                    <a:p>
-                      <a:pPr algn="l"/>
-                      <a:r>
-                        <a:rPr sz="1000" b="0">
-                          <a:solidFill>
-                            <a:srgbClr val="1D1B43"/>
-                          </a:solidFill>
-                          <a:latin typeface="Calibri"/>
-                        </a:rPr>
-                        <a:t>CARMO DO RIO VERDE/GO</a:t>
-                      </a:r>
-                    </a:p>
-                  </a:txBody>
-                  <a:tcPr>
-                    <a:solidFill>
-                      <a:srgbClr val="FFFFFF"/>
-                    </a:solidFill>
-                  </a:tcPr>
-                </a:tc>
-                <a:tc>
-                  <a:txBody>
-                    <a:bodyPr/>
-                    <a:lstStyle/>
-                    <a:p>
-                      <a:pPr algn="l"/>
-                      <a:r>
-                        <a:rPr sz="1000" b="0">
-                          <a:solidFill>
-                            <a:srgbClr val="1D1B43"/>
-                          </a:solidFill>
-                          <a:latin typeface="Calibri"/>
-                        </a:rPr>
-                        <a:t>06/04/2026</a:t>
+              <a:tr h="381000">
+                <a:tc>
+                  <a:txBody>
+                    <a:bodyPr/>
+                    <a:lstStyle/>
+                    <a:p>
+                      <a:pPr algn="l"/>
+                      <a:r>
+                        <a:rPr sz="1000" b="0">
+                          <a:solidFill>
+                            <a:srgbClr val="1D1B43"/>
+                          </a:solidFill>
+                          <a:latin typeface="Calibri"/>
+                        </a:rPr>
+                        <a:t>282390</a:t>
+                      </a:r>
+                    </a:p>
+                  </a:txBody>
+                  <a:tcPr>
+                    <a:solidFill>
+                      <a:srgbClr val="FFFFFF"/>
+                    </a:solidFill>
+                  </a:tcPr>
+                </a:tc>
+                <a:tc>
+                  <a:txBody>
+                    <a:bodyPr/>
+                    <a:lstStyle/>
+                    <a:p>
+                      <a:pPr algn="l"/>
+                      <a:r>
+                        <a:rPr sz="1000" b="0">
+                          <a:solidFill>
+                            <a:srgbClr val="1D1B43"/>
+                          </a:solidFill>
+                          <a:latin typeface="Calibri"/>
+                        </a:rPr>
+                        <a:t>A A DE S FERREIRA LT - CONFRESA / MT</a:t>
+                      </a:r>
+                    </a:p>
+                  </a:txBody>
+                  <a:tcPr>
+                    <a:solidFill>
+                      <a:srgbClr val="FFFFFF"/>
+                    </a:solidFill>
+                  </a:tcPr>
+                </a:tc>
+                <a:tc>
+                  <a:txBody>
+                    <a:bodyPr/>
+                    <a:lstStyle/>
+                    <a:p>
+                      <a:pPr algn="l"/>
+                      <a:r>
+                        <a:rPr sz="1000" b="0">
+                          <a:solidFill>
+                            <a:srgbClr val="1D1B43"/>
+                          </a:solidFill>
+                          <a:latin typeface="Calibri"/>
+                        </a:rPr>
+                        <a:t>CONFRESA/MT</a:t>
+                      </a:r>
+                    </a:p>
+                  </a:txBody>
+                  <a:tcPr>
+                    <a:solidFill>
+                      <a:srgbClr val="FFFFFF"/>
+                    </a:solidFill>
+                  </a:tcPr>
+                </a:tc>
+                <a:tc>
+                  <a:txBody>
+                    <a:bodyPr/>
+                    <a:lstStyle/>
+                    <a:p>
+                      <a:pPr algn="l"/>
+                      <a:r>
+                        <a:rPr sz="1000" b="0">
+                          <a:solidFill>
+                            <a:srgbClr val="1D1B43"/>
+                          </a:solidFill>
+                          <a:latin typeface="Calibri"/>
+                        </a:rPr>
+                        <a:t>20/05/2026</a:t>
+                      </a:r>
+                    </a:p>
+                  </a:txBody>
+                  <a:tcPr>
+                    <a:solidFill>
+                      <a:srgbClr val="FFFFFF"/>
+                    </a:solidFill>
+                  </a:tcPr>
+                </a:tc>
+                <a:tc>
+                  <a:txBody>
+                    <a:bodyPr/>
+                    <a:lstStyle/>
+                    <a:p>
+                      <a:pPr algn="l"/>
+                      <a:r>
+                        <a:rPr sz="1000" b="0">
+                          <a:solidFill>
+                            <a:srgbClr val="1D1B43"/>
+                          </a:solidFill>
+                          <a:latin typeface="Calibri"/>
+                        </a:rPr>
+                        <a:t>FORA DO PRAZO</a:t>
+                      </a:r>
+                    </a:p>
+                  </a:txBody>
+                  <a:tcPr>
+                    <a:solidFill>
+                      <a:srgbClr val="FFFFFF"/>
+                    </a:solidFill>
+                  </a:tcPr>
+                </a:tc>
+              </a:tr>
+              <a:tr h="381000">
+                <a:tc>
+                  <a:txBody>
+                    <a:bodyPr/>
+                    <a:lstStyle/>
+                    <a:p>
+                      <a:pPr algn="l"/>
+                      <a:r>
+                        <a:rPr sz="1000" b="0">
+                          <a:solidFill>
+                            <a:srgbClr val="1D1B43"/>
+                          </a:solidFill>
+                          <a:latin typeface="Calibri"/>
+                        </a:rPr>
+                        <a:t>283876</a:t>
+                      </a:r>
+                    </a:p>
+                  </a:txBody>
+                  <a:tcPr>
+                    <a:solidFill>
+                      <a:srgbClr val="F2F2F2"/>
+                    </a:solidFill>
+                  </a:tcPr>
+                </a:tc>
+                <a:tc>
+                  <a:txBody>
+                    <a:bodyPr/>
+                    <a:lstStyle/>
+                    <a:p>
+                      <a:pPr algn="l"/>
+                      <a:r>
+                        <a:rPr sz="1000" b="0">
+                          <a:solidFill>
+                            <a:srgbClr val="1D1B43"/>
+                          </a:solidFill>
+                          <a:latin typeface="Calibri"/>
+                        </a:rPr>
+                        <a:t>TRANSPORTADORA BELA - SAO PAULO / SP</a:t>
+                      </a:r>
+                    </a:p>
+                  </a:txBody>
+                  <a:tcPr>
+                    <a:solidFill>
+                      <a:srgbClr val="F2F2F2"/>
+                    </a:solidFill>
+                  </a:tcPr>
+                </a:tc>
+                <a:tc>
+                  <a:txBody>
+                    <a:bodyPr/>
+                    <a:lstStyle/>
+                    <a:p>
+                      <a:pPr algn="l"/>
+                      <a:r>
+                        <a:rPr sz="1000" b="0">
+                          <a:solidFill>
+                            <a:srgbClr val="1D1B43"/>
+                          </a:solidFill>
+                          <a:latin typeface="Calibri"/>
+                        </a:rPr>
+                        <a:t>SAO PAULO/SP</a:t>
+                      </a:r>
+                    </a:p>
+                  </a:txBody>
+                  <a:tcPr>
+                    <a:solidFill>
+                      <a:srgbClr val="F2F2F2"/>
+                    </a:solidFill>
+                  </a:tcPr>
+                </a:tc>
+                <a:tc>
+                  <a:txBody>
+                    <a:bodyPr/>
+                    <a:lstStyle/>
+                    <a:p>
+                      <a:pPr algn="l"/>
+                      <a:r>
+                        <a:rPr sz="1000" b="0">
+                          <a:solidFill>
+                            <a:srgbClr val="1D1B43"/>
+                          </a:solidFill>
+                          <a:latin typeface="Calibri"/>
+                        </a:rPr>
+                        <a:t>25/05/2026</a:t>
+                      </a:r>
+                    </a:p>
+                  </a:txBody>
+                  <a:tcPr>
+                    <a:solidFill>
+                      <a:srgbClr val="F2F2F2"/>
+                    </a:solidFill>
+                  </a:tcPr>
+                </a:tc>
+                <a:tc>
+                  <a:txBody>
+                    <a:bodyPr/>
+                    <a:lstStyle/>
+                    <a:p>
+                      <a:pPr algn="l"/>
+                      <a:r>
+                        <a:rPr sz="1000" b="0">
+                          <a:solidFill>
+                            <a:srgbClr val="1D1B43"/>
+                          </a:solidFill>
+                          <a:latin typeface="Calibri"/>
+                        </a:rPr>
+                        <a:t>FORA DO PRAZO</a:t>
+                      </a:r>
+                    </a:p>
+                  </a:txBody>
+                  <a:tcPr>
+                    <a:solidFill>
+                      <a:srgbClr val="F2F2F2"/>
+                    </a:solidFill>
+                  </a:tcPr>
+                </a:tc>
+              </a:tr>
+              <a:tr h="381000">
+                <a:tc>
+                  <a:txBody>
+                    <a:bodyPr/>
+                    <a:lstStyle/>
+                    <a:p>
+                      <a:pPr algn="l"/>
+                      <a:r>
+                        <a:rPr sz="1000" b="0">
+                          <a:solidFill>
+                            <a:srgbClr val="1D1B43"/>
+                          </a:solidFill>
+                          <a:latin typeface="Calibri"/>
+                        </a:rPr>
+                        <a:t>283879</a:t>
+                      </a:r>
+                    </a:p>
+                  </a:txBody>
+                  <a:tcPr>
+                    <a:solidFill>
+                      <a:srgbClr val="FFFFFF"/>
+                    </a:solidFill>
+                  </a:tcPr>
+                </a:tc>
+                <a:tc>
+                  <a:txBody>
+                    <a:bodyPr/>
+                    <a:lstStyle/>
+                    <a:p>
+                      <a:pPr algn="l"/>
+                      <a:r>
+                        <a:rPr sz="1000" b="0">
+                          <a:solidFill>
+                            <a:srgbClr val="1D1B43"/>
+                          </a:solidFill>
+                          <a:latin typeface="Calibri"/>
+                        </a:rPr>
+                        <a:t>TRANSPRESS TRANSPORT - GUARULHOS / SP</a:t>
+                      </a:r>
+                    </a:p>
+                  </a:txBody>
+                  <a:tcPr>
+                    <a:solidFill>
+                      <a:srgbClr val="FFFFFF"/>
+                    </a:solidFill>
+                  </a:tcPr>
+                </a:tc>
+                <a:tc>
+                  <a:txBody>
+                    <a:bodyPr/>
+                    <a:lstStyle/>
+                    <a:p>
+                      <a:pPr algn="l"/>
+                      <a:r>
+                        <a:rPr sz="1000" b="0">
+                          <a:solidFill>
+                            <a:srgbClr val="1D1B43"/>
+                          </a:solidFill>
+                          <a:latin typeface="Calibri"/>
+                        </a:rPr>
+                        <a:t>GUARULHOS/SP</a:t>
+                      </a:r>
+                    </a:p>
+                  </a:txBody>
+                  <a:tcPr>
+                    <a:solidFill>
+                      <a:srgbClr val="FFFFFF"/>
+                    </a:solidFill>
+                  </a:tcPr>
+                </a:tc>
+                <a:tc>
+                  <a:txBody>
+                    <a:bodyPr/>
+                    <a:lstStyle/>
+                    <a:p>
+                      <a:pPr algn="l"/>
+                      <a:r>
+                        <a:rPr sz="1000" b="0">
+                          <a:solidFill>
+                            <a:srgbClr val="1D1B43"/>
+                          </a:solidFill>
+                          <a:latin typeface="Calibri"/>
+                        </a:rPr>
+                        <a:t>22/05/2026</a:t>
                       </a:r>
                     </a:p>
                   </a:txBody>
@@ -6050,21 +6284,21 @@
                   </a:tcPr>
                 </a:tc>
               </a:tr>
-              <a:tr h="384048">
-                <a:tc>
-                  <a:txBody>
-                    <a:bodyPr/>
-                    <a:lstStyle/>
-                    <a:p>
-                      <a:pPr algn="l"/>
-                      <a:r>
-                        <a:rPr sz="1000" b="0">
-                          <a:solidFill>
-                            <a:srgbClr val="1D1B43"/>
-                          </a:solidFill>
-                          <a:latin typeface="Calibri"/>
-                        </a:rPr>
-                        <a:t>276999</a:t>
+              <a:tr h="381000">
+                <a:tc>
+                  <a:txBody>
+                    <a:bodyPr/>
+                    <a:lstStyle/>
+                    <a:p>
+                      <a:pPr algn="l"/>
+                      <a:r>
+                        <a:rPr sz="1000" b="0">
+                          <a:solidFill>
+                            <a:srgbClr val="1D1B43"/>
+                          </a:solidFill>
+                          <a:latin typeface="Calibri"/>
+                        </a:rPr>
+                        <a:t>283880</a:t>
                       </a:r>
                     </a:p>
                   </a:txBody>
@@ -6087,7 +6321,7 @@
                           </a:solidFill>
                           <a:latin typeface="Calibri"/>
                         </a:rPr>
-                        <a:t>MARIA AUGUSTA SILVEI - FELIZ NATAL / MT</a:t>
+                        <a:t>TRANSPRESS TRANSPORT - GUARULHOS / SP</a:t>
                       </a:r>
                     </a:p>
                   </a:txBody>
@@ -6110,7 +6344,7 @@
                           </a:solidFill>
                           <a:latin typeface="Calibri"/>
                         </a:rPr>
-                        <a:t>FELIZ NATAL/MT</a:t>
+                        <a:t>GUARULHOS/SP</a:t>
                       </a:r>
                     </a:p>
                   </a:txBody>
@@ -6133,7 +6367,7 @@
                           </a:solidFill>
                           <a:latin typeface="Calibri"/>
                         </a:rPr>
-                        <a:t>14/04/2026</a:t>
+                        <a:t>22/05/2026</a:t>
                       </a:r>
                     </a:p>
                   </a:txBody>
@@ -6156,7 +6390,7 @@
                           </a:solidFill>
                           <a:latin typeface="Calibri"/>
                         </a:rPr>
-                        <a:t>ENTREGUE FORA DO PRAZO</a:t>
+                        <a:t>FORA DO PRAZO</a:t>
                       </a:r>
                     </a:p>
                   </a:txBody>
@@ -6167,113 +6401,113 @@
                   </a:tcPr>
                 </a:tc>
               </a:tr>
-              <a:tr h="384048">
-                <a:tc>
-                  <a:txBody>
-                    <a:bodyPr/>
-                    <a:lstStyle/>
-                    <a:p>
-                      <a:pPr algn="l"/>
-                      <a:r>
-                        <a:rPr sz="1000" b="0">
-                          <a:solidFill>
-                            <a:srgbClr val="1D1B43"/>
-                          </a:solidFill>
-                          <a:latin typeface="Calibri"/>
-                        </a:rPr>
-                        <a:t>277092</a:t>
-                      </a:r>
-                    </a:p>
-                  </a:txBody>
-                  <a:tcPr>
-                    <a:solidFill>
-                      <a:srgbClr val="FFFFFF"/>
-                    </a:solidFill>
-                  </a:tcPr>
-                </a:tc>
-                <a:tc>
-                  <a:txBody>
-                    <a:bodyPr/>
-                    <a:lstStyle/>
-                    <a:p>
-                      <a:pPr algn="l"/>
-                      <a:r>
-                        <a:rPr sz="1000" b="0">
-                          <a:solidFill>
-                            <a:srgbClr val="1D1B43"/>
-                          </a:solidFill>
-                          <a:latin typeface="Calibri"/>
-                        </a:rPr>
-                        <a:t>J.R. VAZ CARNEIRO - GOIANESIA / GO</a:t>
-                      </a:r>
-                    </a:p>
-                  </a:txBody>
-                  <a:tcPr>
-                    <a:solidFill>
-                      <a:srgbClr val="FFFFFF"/>
-                    </a:solidFill>
-                  </a:tcPr>
-                </a:tc>
-                <a:tc>
-                  <a:txBody>
-                    <a:bodyPr/>
-                    <a:lstStyle/>
-                    <a:p>
-                      <a:pPr algn="l"/>
-                      <a:r>
-                        <a:rPr sz="1000" b="0">
-                          <a:solidFill>
-                            <a:srgbClr val="1D1B43"/>
-                          </a:solidFill>
-                          <a:latin typeface="Calibri"/>
-                        </a:rPr>
-                        <a:t>GOIANESIA/GO</a:t>
-                      </a:r>
-                    </a:p>
-                  </a:txBody>
-                  <a:tcPr>
-                    <a:solidFill>
-                      <a:srgbClr val="FFFFFF"/>
-                    </a:solidFill>
-                  </a:tcPr>
-                </a:tc>
-                <a:tc>
-                  <a:txBody>
-                    <a:bodyPr/>
-                    <a:lstStyle/>
-                    <a:p>
-                      <a:pPr algn="l"/>
-                      <a:r>
-                        <a:rPr sz="1000" b="0">
-                          <a:solidFill>
-                            <a:srgbClr val="1D1B43"/>
-                          </a:solidFill>
-                          <a:latin typeface="Calibri"/>
-                        </a:rPr>
-                        <a:t>10/04/2026</a:t>
-                      </a:r>
-                    </a:p>
-                  </a:txBody>
-                  <a:tcPr>
-                    <a:solidFill>
-                      <a:srgbClr val="FFFFFF"/>
-                    </a:solidFill>
-                  </a:tcPr>
-                </a:tc>
-                <a:tc>
-                  <a:txBody>
-                    <a:bodyPr/>
-                    <a:lstStyle/>
-                    <a:p>
-                      <a:pPr algn="l"/>
-                      <a:r>
-                        <a:rPr sz="1000" b="0">
-                          <a:solidFill>
-                            <a:srgbClr val="1D1B43"/>
-                          </a:solidFill>
-                          <a:latin typeface="Calibri"/>
-                        </a:rPr>
-                        <a:t>ENTREGUE FORA DO PRAZO</a:t>
+              <a:tr h="381000">
+                <a:tc>
+                  <a:txBody>
+                    <a:bodyPr/>
+                    <a:lstStyle/>
+                    <a:p>
+                      <a:pPr algn="l"/>
+                      <a:r>
+                        <a:rPr sz="1000" b="0">
+                          <a:solidFill>
+                            <a:srgbClr val="1D1B43"/>
+                          </a:solidFill>
+                          <a:latin typeface="Calibri"/>
+                        </a:rPr>
+                        <a:t>283881</a:t>
+                      </a:r>
+                    </a:p>
+                  </a:txBody>
+                  <a:tcPr>
+                    <a:solidFill>
+                      <a:srgbClr val="FFFFFF"/>
+                    </a:solidFill>
+                  </a:tcPr>
+                </a:tc>
+                <a:tc>
+                  <a:txBody>
+                    <a:bodyPr/>
+                    <a:lstStyle/>
+                    <a:p>
+                      <a:pPr algn="l"/>
+                      <a:r>
+                        <a:rPr sz="1000" b="0">
+                          <a:solidFill>
+                            <a:srgbClr val="1D1B43"/>
+                          </a:solidFill>
+                          <a:latin typeface="Calibri"/>
+                        </a:rPr>
+                        <a:t>TRANSPRESS TRANSPORT - GUARULHOS / SP</a:t>
+                      </a:r>
+                    </a:p>
+                  </a:txBody>
+                  <a:tcPr>
+                    <a:solidFill>
+                      <a:srgbClr val="FFFFFF"/>
+                    </a:solidFill>
+                  </a:tcPr>
+                </a:tc>
+                <a:tc>
+                  <a:txBody>
+                    <a:bodyPr/>
+                    <a:lstStyle/>
+                    <a:p>
+                      <a:pPr algn="l"/>
+                      <a:r>
+                        <a:rPr sz="1000" b="0">
+                          <a:solidFill>
+                            <a:srgbClr val="1D1B43"/>
+                          </a:solidFill>
+                          <a:latin typeface="Calibri"/>
+                        </a:rPr>
+                        <a:t>GUARULHOS/SP</a:t>
+                      </a:r>
+                    </a:p>
+                  </a:txBody>
+                  <a:tcPr>
+                    <a:solidFill>
+                      <a:srgbClr val="FFFFFF"/>
+                    </a:solidFill>
+                  </a:tcPr>
+                </a:tc>
+                <a:tc>
+                  <a:txBody>
+                    <a:bodyPr/>
+                    <a:lstStyle/>
+                    <a:p>
+                      <a:pPr algn="l"/>
+                      <a:r>
+                        <a:rPr sz="1000" b="0">
+                          <a:solidFill>
+                            <a:srgbClr val="1D1B43"/>
+                          </a:solidFill>
+                          <a:latin typeface="Calibri"/>
+                        </a:rPr>
+                        <a:t>22/05/2026</a:t>
+                      </a:r>
+                    </a:p>
+                  </a:txBody>
+                  <a:tcPr>
+                    <a:solidFill>
+                      <a:srgbClr val="FFFFFF"/>
+                    </a:solidFill>
+                  </a:tcPr>
+                </a:tc>
+                <a:tc>
+                  <a:txBody>
+                    <a:bodyPr/>
+                    <a:lstStyle/>
+                    <a:p>
+                      <a:pPr algn="l"/>
+                      <a:r>
+                        <a:rPr sz="1000" b="0">
+                          <a:solidFill>
+                            <a:srgbClr val="1D1B43"/>
+                          </a:solidFill>
+                          <a:latin typeface="Calibri"/>
+                        </a:rPr>
+                        <a:t>FORA DO PRAZO</a:t>
                       </a:r>
                     </a:p>
                   </a:txBody>
@@ -6284,21 +6518,21 @@
                   </a:tcPr>
                 </a:tc>
               </a:tr>
-              <a:tr h="384048">
-                <a:tc>
-                  <a:txBody>
-                    <a:bodyPr/>
-                    <a:lstStyle/>
-                    <a:p>
-                      <a:pPr algn="l"/>
-                      <a:r>
-                        <a:rPr sz="1000" b="0">
-                          <a:solidFill>
-                            <a:srgbClr val="1D1B43"/>
-                          </a:solidFill>
-                          <a:latin typeface="Calibri"/>
-                        </a:rPr>
-                        <a:t>277552</a:t>
+              <a:tr h="381000">
+                <a:tc>
+                  <a:txBody>
+                    <a:bodyPr/>
+                    <a:lstStyle/>
+                    <a:p>
+                      <a:pPr algn="l"/>
+                      <a:r>
+                        <a:rPr sz="1000" b="0">
+                          <a:solidFill>
+                            <a:srgbClr val="1D1B43"/>
+                          </a:solidFill>
+                          <a:latin typeface="Calibri"/>
+                        </a:rPr>
+                        <a:t>283882</a:t>
                       </a:r>
                     </a:p>
                   </a:txBody>
@@ -6321,7 +6555,7 @@
                           </a:solidFill>
                           <a:latin typeface="Calibri"/>
                         </a:rPr>
-                        <a:t>O S NOGUEIRA - CACU / GO</a:t>
+                        <a:t>TITANIO TRANSPORTES - GUARULHOS / SP</a:t>
                       </a:r>
                     </a:p>
                   </a:txBody>
@@ -6344,7 +6578,7 @@
                           </a:solidFill>
                           <a:latin typeface="Calibri"/>
                         </a:rPr>
-                        <a:t>CACU/GO</a:t>
+                        <a:t>GUARULHOS/SP</a:t>
                       </a:r>
                     </a:p>
                   </a:txBody>
@@ -6367,7 +6601,7 @@
                           </a:solidFill>
                           <a:latin typeface="Calibri"/>
                         </a:rPr>
-                        <a:t>15/04/2026</a:t>
+                        <a:t>22/05/2026</a:t>
                       </a:r>
                     </a:p>
                   </a:txBody>
@@ -6390,7 +6624,7 @@
                           </a:solidFill>
                           <a:latin typeface="Calibri"/>
                         </a:rPr>
-                        <a:t>ENTREGUE FORA DO PRAZO</a:t>
+                        <a:t>FORA DO PRAZO</a:t>
                       </a:r>
                     </a:p>
                   </a:txBody>
@@ -6401,113 +6635,113 @@
                   </a:tcPr>
                 </a:tc>
               </a:tr>
-              <a:tr h="384048">
-                <a:tc>
-                  <a:txBody>
-                    <a:bodyPr/>
-                    <a:lstStyle/>
-                    <a:p>
-                      <a:pPr algn="l"/>
-                      <a:r>
-                        <a:rPr sz="1000" b="0">
-                          <a:solidFill>
-                            <a:srgbClr val="1D1B43"/>
-                          </a:solidFill>
-                          <a:latin typeface="Calibri"/>
-                        </a:rPr>
-                        <a:t>278355</a:t>
-                      </a:r>
-                    </a:p>
-                  </a:txBody>
-                  <a:tcPr>
-                    <a:solidFill>
-                      <a:srgbClr val="FFFFFF"/>
-                    </a:solidFill>
-                  </a:tcPr>
-                </a:tc>
-                <a:tc>
-                  <a:txBody>
-                    <a:bodyPr/>
-                    <a:lstStyle/>
-                    <a:p>
-                      <a:pPr algn="l"/>
-                      <a:r>
-                        <a:rPr sz="1000" b="0">
-                          <a:solidFill>
-                            <a:srgbClr val="1D1B43"/>
-                          </a:solidFill>
-                          <a:latin typeface="Calibri"/>
-                        </a:rPr>
-                        <a:t>ROSEMERI HEPP EIRELL - MARECHAL CANDIDO RONDON /</a:t>
-                      </a:r>
-                    </a:p>
-                  </a:txBody>
-                  <a:tcPr>
-                    <a:solidFill>
-                      <a:srgbClr val="FFFFFF"/>
-                    </a:solidFill>
-                  </a:tcPr>
-                </a:tc>
-                <a:tc>
-                  <a:txBody>
-                    <a:bodyPr/>
-                    <a:lstStyle/>
-                    <a:p>
-                      <a:pPr algn="l"/>
-                      <a:r>
-                        <a:rPr sz="1000" b="0">
-                          <a:solidFill>
-                            <a:srgbClr val="1D1B43"/>
-                          </a:solidFill>
-                          <a:latin typeface="Calibri"/>
-                        </a:rPr>
-                        <a:t>MARECHAL CANDIDO RONDON/PR</a:t>
-                      </a:r>
-                    </a:p>
-                  </a:txBody>
-                  <a:tcPr>
-                    <a:solidFill>
-                      <a:srgbClr val="FFFFFF"/>
-                    </a:solidFill>
-                  </a:tcPr>
-                </a:tc>
-                <a:tc>
-                  <a:txBody>
-                    <a:bodyPr/>
-                    <a:lstStyle/>
-                    <a:p>
-                      <a:pPr algn="l"/>
-                      <a:r>
-                        <a:rPr sz="1000" b="0">
-                          <a:solidFill>
-                            <a:srgbClr val="1D1B43"/>
-                          </a:solidFill>
-                          <a:latin typeface="Calibri"/>
-                        </a:rPr>
-                        <a:t>14/04/2026</a:t>
-                      </a:r>
-                    </a:p>
-                  </a:txBody>
-                  <a:tcPr>
-                    <a:solidFill>
-                      <a:srgbClr val="FFFFFF"/>
-                    </a:solidFill>
-                  </a:tcPr>
-                </a:tc>
-                <a:tc>
-                  <a:txBody>
-                    <a:bodyPr/>
-                    <a:lstStyle/>
-                    <a:p>
-                      <a:pPr algn="l"/>
-                      <a:r>
-                        <a:rPr sz="1000" b="0">
-                          <a:solidFill>
-                            <a:srgbClr val="1D1B43"/>
-                          </a:solidFill>
-                          <a:latin typeface="Calibri"/>
-                        </a:rPr>
-                        <a:t>ENTREGUE FORA DO PRAZO</a:t>
+              <a:tr h="381000">
+                <a:tc>
+                  <a:txBody>
+                    <a:bodyPr/>
+                    <a:lstStyle/>
+                    <a:p>
+                      <a:pPr algn="l"/>
+                      <a:r>
+                        <a:rPr sz="1000" b="0">
+                          <a:solidFill>
+                            <a:srgbClr val="1D1B43"/>
+                          </a:solidFill>
+                          <a:latin typeface="Calibri"/>
+                        </a:rPr>
+                        <a:t>284337</a:t>
+                      </a:r>
+                    </a:p>
+                  </a:txBody>
+                  <a:tcPr>
+                    <a:solidFill>
+                      <a:srgbClr val="FFFFFF"/>
+                    </a:solidFill>
+                  </a:tcPr>
+                </a:tc>
+                <a:tc>
+                  <a:txBody>
+                    <a:bodyPr/>
+                    <a:lstStyle/>
+                    <a:p>
+                      <a:pPr algn="l"/>
+                      <a:r>
+                        <a:rPr sz="1000" b="0">
+                          <a:solidFill>
+                            <a:srgbClr val="1D1B43"/>
+                          </a:solidFill>
+                          <a:latin typeface="Calibri"/>
+                        </a:rPr>
+                        <a:t>BORDONALE MOVEIS E E - ORLANDIA / SP</a:t>
+                      </a:r>
+                    </a:p>
+                  </a:txBody>
+                  <a:tcPr>
+                    <a:solidFill>
+                      <a:srgbClr val="FFFFFF"/>
+                    </a:solidFill>
+                  </a:tcPr>
+                </a:tc>
+                <a:tc>
+                  <a:txBody>
+                    <a:bodyPr/>
+                    <a:lstStyle/>
+                    <a:p>
+                      <a:pPr algn="l"/>
+                      <a:r>
+                        <a:rPr sz="1000" b="0">
+                          <a:solidFill>
+                            <a:srgbClr val="1D1B43"/>
+                          </a:solidFill>
+                          <a:latin typeface="Calibri"/>
+                        </a:rPr>
+                        <a:t>ORLANDIA/SP</a:t>
+                      </a:r>
+                    </a:p>
+                  </a:txBody>
+                  <a:tcPr>
+                    <a:solidFill>
+                      <a:srgbClr val="FFFFFF"/>
+                    </a:solidFill>
+                  </a:tcPr>
+                </a:tc>
+                <a:tc>
+                  <a:txBody>
+                    <a:bodyPr/>
+                    <a:lstStyle/>
+                    <a:p>
+                      <a:pPr algn="l"/>
+                      <a:r>
+                        <a:rPr sz="1000" b="0">
+                          <a:solidFill>
+                            <a:srgbClr val="1D1B43"/>
+                          </a:solidFill>
+                          <a:latin typeface="Calibri"/>
+                        </a:rPr>
+                        <a:t>28/05/2026</a:t>
+                      </a:r>
+                    </a:p>
+                  </a:txBody>
+                  <a:tcPr>
+                    <a:solidFill>
+                      <a:srgbClr val="FFFFFF"/>
+                    </a:solidFill>
+                  </a:tcPr>
+                </a:tc>
+                <a:tc>
+                  <a:txBody>
+                    <a:bodyPr/>
+                    <a:lstStyle/>
+                    <a:p>
+                      <a:pPr algn="l"/>
+                      <a:r>
+                        <a:rPr sz="1000" b="0">
+                          <a:solidFill>
+                            <a:srgbClr val="1D1B43"/>
+                          </a:solidFill>
+                          <a:latin typeface="Calibri"/>
+                        </a:rPr>
+                        <a:t>FORA DO PRAZO</a:t>
                       </a:r>
                     </a:p>
                   </a:txBody>
@@ -6660,7 +6894,7 @@
         </p:nvGraphicFramePr>
         <p:xfrm>
           <a:off x="731520" y="1920240"/>
-          <a:ext cx="10698480" cy="3200400"/>
+          <a:ext cx="10698480" cy="4389120"/>
         </p:xfrm>
         <a:graphic>
           <a:graphicData uri="http://schemas.openxmlformats.org/drawingml/2006/table">
@@ -6676,7 +6910,7 @@
                 <a:gridCol w="1554480"/>
                 <a:gridCol w="3108960"/>
               </a:tblGrid>
-              <a:tr h="457200">
+              <a:tr h="438912">
                 <a:tc>
                   <a:txBody>
                     <a:bodyPr/>
@@ -6816,7 +7050,7 @@
                   </a:tcPr>
                 </a:tc>
               </a:tr>
-              <a:tr h="457200">
+              <a:tr h="438912">
                 <a:tc>
                   <a:txBody>
                     <a:bodyPr/>
@@ -6853,30 +7087,310 @@
                           </a:solidFill>
                           <a:latin typeface="Calibri"/>
                         </a:rPr>
-                        <a:t>30</a:t>
-                      </a:r>
-                    </a:p>
-                  </a:txBody>
-                  <a:tcPr>
-                    <a:solidFill>
-                      <a:srgbClr val="FFFFFF"/>
-                    </a:solidFill>
-                  </a:tcPr>
-                </a:tc>
-                <a:tc>
-                  <a:txBody>
-                    <a:bodyPr/>
-                    <a:lstStyle/>
-                    <a:p>
-                      <a:pPr algn="l"/>
-                      <a:r>
-                        <a:rPr sz="1000" b="0">
-                          <a:solidFill>
-                            <a:srgbClr val="1D1B43"/>
-                          </a:solidFill>
-                          <a:latin typeface="Calibri"/>
-                        </a:rPr>
-                        <a:t>30</a:t>
+                        <a:t>73</a:t>
+                      </a:r>
+                    </a:p>
+                  </a:txBody>
+                  <a:tcPr>
+                    <a:solidFill>
+                      <a:srgbClr val="FFFFFF"/>
+                    </a:solidFill>
+                  </a:tcPr>
+                </a:tc>
+                <a:tc>
+                  <a:txBody>
+                    <a:bodyPr/>
+                    <a:lstStyle/>
+                    <a:p>
+                      <a:pPr algn="l"/>
+                      <a:r>
+                        <a:rPr sz="1000" b="0">
+                          <a:solidFill>
+                            <a:srgbClr val="1D1B43"/>
+                          </a:solidFill>
+                          <a:latin typeface="Calibri"/>
+                        </a:rPr>
+                        <a:t>65</a:t>
+                      </a:r>
+                    </a:p>
+                  </a:txBody>
+                  <a:tcPr>
+                    <a:solidFill>
+                      <a:srgbClr val="FFFFFF"/>
+                    </a:solidFill>
+                  </a:tcPr>
+                </a:tc>
+                <a:tc>
+                  <a:txBody>
+                    <a:bodyPr/>
+                    <a:lstStyle/>
+                    <a:p>
+                      <a:pPr algn="l"/>
+                      <a:r>
+                        <a:rPr sz="1000" b="0">
+                          <a:solidFill>
+                            <a:srgbClr val="1D1B43"/>
+                          </a:solidFill>
+                          <a:latin typeface="Calibri"/>
+                        </a:rPr>
+                        <a:t>8</a:t>
+                      </a:r>
+                    </a:p>
+                  </a:txBody>
+                  <a:tcPr>
+                    <a:solidFill>
+                      <a:srgbClr val="FFFFFF"/>
+                    </a:solidFill>
+                  </a:tcPr>
+                </a:tc>
+                <a:tc>
+                  <a:txBody>
+                    <a:bodyPr/>
+                    <a:lstStyle/>
+                    <a:p>
+                      <a:pPr algn="l"/>
+                      <a:r>
+                        <a:rPr sz="1000" b="0">
+                          <a:solidFill>
+                            <a:srgbClr val="1D1B43"/>
+                          </a:solidFill>
+                          <a:latin typeface="Calibri"/>
+                        </a:rPr>
+                        <a:t>89.0%</a:t>
+                      </a:r>
+                    </a:p>
+                  </a:txBody>
+                  <a:tcPr>
+                    <a:solidFill>
+                      <a:srgbClr val="FFFFFF"/>
+                    </a:solidFill>
+                  </a:tcPr>
+                </a:tc>
+                <a:tc>
+                  <a:txBody>
+                    <a:bodyPr/>
+                    <a:lstStyle/>
+                    <a:p>
+                      <a:pPr algn="l"/>
+                      <a:r>
+                        <a:rPr sz="1000" b="0">
+                          <a:solidFill>
+                            <a:srgbClr val="1D1B43"/>
+                          </a:solidFill>
+                          <a:latin typeface="Calibri"/>
+                        </a:rPr>
+                        <a:t>Regular</a:t>
+                      </a:r>
+                    </a:p>
+                  </a:txBody>
+                  <a:tcPr>
+                    <a:solidFill>
+                      <a:srgbClr val="FFFFFF"/>
+                    </a:solidFill>
+                  </a:tcPr>
+                </a:tc>
+              </a:tr>
+              <a:tr h="438912">
+                <a:tc>
+                  <a:txBody>
+                    <a:bodyPr/>
+                    <a:lstStyle/>
+                    <a:p>
+                      <a:pPr algn="l"/>
+                      <a:r>
+                        <a:rPr sz="1000" b="0">
+                          <a:solidFill>
+                            <a:srgbClr val="1D1B43"/>
+                          </a:solidFill>
+                          <a:latin typeface="Calibri"/>
+                        </a:rPr>
+                        <a:t>GO</a:t>
+                      </a:r>
+                    </a:p>
+                  </a:txBody>
+                  <a:tcPr>
+                    <a:solidFill>
+                      <a:srgbClr val="F2F2F2"/>
+                    </a:solidFill>
+                  </a:tcPr>
+                </a:tc>
+                <a:tc>
+                  <a:txBody>
+                    <a:bodyPr/>
+                    <a:lstStyle/>
+                    <a:p>
+                      <a:pPr algn="l"/>
+                      <a:r>
+                        <a:rPr sz="1000" b="0">
+                          <a:solidFill>
+                            <a:srgbClr val="1D1B43"/>
+                          </a:solidFill>
+                          <a:latin typeface="Calibri"/>
+                        </a:rPr>
+                        <a:t>16</a:t>
+                      </a:r>
+                    </a:p>
+                  </a:txBody>
+                  <a:tcPr>
+                    <a:solidFill>
+                      <a:srgbClr val="F2F2F2"/>
+                    </a:solidFill>
+                  </a:tcPr>
+                </a:tc>
+                <a:tc>
+                  <a:txBody>
+                    <a:bodyPr/>
+                    <a:lstStyle/>
+                    <a:p>
+                      <a:pPr algn="l"/>
+                      <a:r>
+                        <a:rPr sz="1000" b="0">
+                          <a:solidFill>
+                            <a:srgbClr val="1D1B43"/>
+                          </a:solidFill>
+                          <a:latin typeface="Calibri"/>
+                        </a:rPr>
+                        <a:t>15</a:t>
+                      </a:r>
+                    </a:p>
+                  </a:txBody>
+                  <a:tcPr>
+                    <a:solidFill>
+                      <a:srgbClr val="F2F2F2"/>
+                    </a:solidFill>
+                  </a:tcPr>
+                </a:tc>
+                <a:tc>
+                  <a:txBody>
+                    <a:bodyPr/>
+                    <a:lstStyle/>
+                    <a:p>
+                      <a:pPr algn="l"/>
+                      <a:r>
+                        <a:rPr sz="1000" b="0">
+                          <a:solidFill>
+                            <a:srgbClr val="1D1B43"/>
+                          </a:solidFill>
+                          <a:latin typeface="Calibri"/>
+                        </a:rPr>
+                        <a:t>1</a:t>
+                      </a:r>
+                    </a:p>
+                  </a:txBody>
+                  <a:tcPr>
+                    <a:solidFill>
+                      <a:srgbClr val="F2F2F2"/>
+                    </a:solidFill>
+                  </a:tcPr>
+                </a:tc>
+                <a:tc>
+                  <a:txBody>
+                    <a:bodyPr/>
+                    <a:lstStyle/>
+                    <a:p>
+                      <a:pPr algn="l"/>
+                      <a:r>
+                        <a:rPr sz="1000" b="0">
+                          <a:solidFill>
+                            <a:srgbClr val="1D1B43"/>
+                          </a:solidFill>
+                          <a:latin typeface="Calibri"/>
+                        </a:rPr>
+                        <a:t>93.8%</a:t>
+                      </a:r>
+                    </a:p>
+                  </a:txBody>
+                  <a:tcPr>
+                    <a:solidFill>
+                      <a:srgbClr val="F2F2F2"/>
+                    </a:solidFill>
+                  </a:tcPr>
+                </a:tc>
+                <a:tc>
+                  <a:txBody>
+                    <a:bodyPr/>
+                    <a:lstStyle/>
+                    <a:p>
+                      <a:pPr algn="l"/>
+                      <a:r>
+                        <a:rPr sz="1000" b="0">
+                          <a:solidFill>
+                            <a:srgbClr val="1D1B43"/>
+                          </a:solidFill>
+                          <a:latin typeface="Calibri"/>
+                        </a:rPr>
+                        <a:t>Regular</a:t>
+                      </a:r>
+                    </a:p>
+                  </a:txBody>
+                  <a:tcPr>
+                    <a:solidFill>
+                      <a:srgbClr val="F2F2F2"/>
+                    </a:solidFill>
+                  </a:tcPr>
+                </a:tc>
+              </a:tr>
+              <a:tr h="438912">
+                <a:tc>
+                  <a:txBody>
+                    <a:bodyPr/>
+                    <a:lstStyle/>
+                    <a:p>
+                      <a:pPr algn="l"/>
+                      <a:r>
+                        <a:rPr sz="1000" b="0">
+                          <a:solidFill>
+                            <a:srgbClr val="1D1B43"/>
+                          </a:solidFill>
+                          <a:latin typeface="Calibri"/>
+                        </a:rPr>
+                        <a:t>RS</a:t>
+                      </a:r>
+                    </a:p>
+                  </a:txBody>
+                  <a:tcPr>
+                    <a:solidFill>
+                      <a:srgbClr val="FFFFFF"/>
+                    </a:solidFill>
+                  </a:tcPr>
+                </a:tc>
+                <a:tc>
+                  <a:txBody>
+                    <a:bodyPr/>
+                    <a:lstStyle/>
+                    <a:p>
+                      <a:pPr algn="l"/>
+                      <a:r>
+                        <a:rPr sz="1000" b="0">
+                          <a:solidFill>
+                            <a:srgbClr val="1D1B43"/>
+                          </a:solidFill>
+                          <a:latin typeface="Calibri"/>
+                        </a:rPr>
+                        <a:t>8</a:t>
+                      </a:r>
+                    </a:p>
+                  </a:txBody>
+                  <a:tcPr>
+                    <a:solidFill>
+                      <a:srgbClr val="FFFFFF"/>
+                    </a:solidFill>
+                  </a:tcPr>
+                </a:tc>
+                <a:tc>
+                  <a:txBody>
+                    <a:bodyPr/>
+                    <a:lstStyle/>
+                    <a:p>
+                      <a:pPr algn="l"/>
+                      <a:r>
+                        <a:rPr sz="1000" b="0">
+                          <a:solidFill>
+                            <a:srgbClr val="1D1B43"/>
+                          </a:solidFill>
+                          <a:latin typeface="Calibri"/>
+                        </a:rPr>
+                        <a:t>8</a:t>
                       </a:r>
                     </a:p>
                   </a:txBody>
@@ -6956,21 +7470,21 @@
                   </a:tcPr>
                 </a:tc>
               </a:tr>
-              <a:tr h="457200">
-                <a:tc>
-                  <a:txBody>
-                    <a:bodyPr/>
-                    <a:lstStyle/>
-                    <a:p>
-                      <a:pPr algn="l"/>
-                      <a:r>
-                        <a:rPr sz="1000" b="0">
-                          <a:solidFill>
-                            <a:srgbClr val="1D1B43"/>
-                          </a:solidFill>
-                          <a:latin typeface="Calibri"/>
-                        </a:rPr>
-                        <a:t>GO</a:t>
+              <a:tr h="438912">
+                <a:tc>
+                  <a:txBody>
+                    <a:bodyPr/>
+                    <a:lstStyle/>
+                    <a:p>
+                      <a:pPr algn="l"/>
+                      <a:r>
+                        <a:rPr sz="1000" b="0">
+                          <a:solidFill>
+                            <a:srgbClr val="1D1B43"/>
+                          </a:solidFill>
+                          <a:latin typeface="Calibri"/>
+                        </a:rPr>
+                        <a:t>SC</a:t>
                       </a:r>
                     </a:p>
                   </a:txBody>
@@ -6993,7 +7507,7 @@
                           </a:solidFill>
                           <a:latin typeface="Calibri"/>
                         </a:rPr>
-                        <a:t>26</a:t>
+                        <a:t>6</a:t>
                       </a:r>
                     </a:p>
                   </a:txBody>
@@ -7016,7 +7530,7 @@
                           </a:solidFill>
                           <a:latin typeface="Calibri"/>
                         </a:rPr>
-                        <a:t>19</a:t>
+                        <a:t>6</a:t>
                       </a:r>
                     </a:p>
                   </a:txBody>
@@ -7039,7 +7553,7 @@
                           </a:solidFill>
                           <a:latin typeface="Calibri"/>
                         </a:rPr>
-                        <a:t>7</a:t>
+                        <a:t>0</a:t>
                       </a:r>
                     </a:p>
                   </a:txBody>
@@ -7062,7 +7576,7 @@
                           </a:solidFill>
                           <a:latin typeface="Calibri"/>
                         </a:rPr>
-                        <a:t>73.1%</a:t>
+                        <a:t>100.0%</a:t>
                       </a:r>
                     </a:p>
                   </a:txBody>
@@ -7085,6 +7599,566 @@
                           </a:solidFill>
                           <a:latin typeface="Calibri"/>
                         </a:rPr>
+                        <a:t>Excelente</a:t>
+                      </a:r>
+                    </a:p>
+                  </a:txBody>
+                  <a:tcPr>
+                    <a:solidFill>
+                      <a:srgbClr val="F2F2F2"/>
+                    </a:solidFill>
+                  </a:tcPr>
+                </a:tc>
+              </a:tr>
+              <a:tr h="438912">
+                <a:tc>
+                  <a:txBody>
+                    <a:bodyPr/>
+                    <a:lstStyle/>
+                    <a:p>
+                      <a:pPr algn="l"/>
+                      <a:r>
+                        <a:rPr sz="1000" b="0">
+                          <a:solidFill>
+                            <a:srgbClr val="1D1B43"/>
+                          </a:solidFill>
+                          <a:latin typeface="Calibri"/>
+                        </a:rPr>
+                        <a:t>DF</a:t>
+                      </a:r>
+                    </a:p>
+                  </a:txBody>
+                  <a:tcPr>
+                    <a:solidFill>
+                      <a:srgbClr val="FFFFFF"/>
+                    </a:solidFill>
+                  </a:tcPr>
+                </a:tc>
+                <a:tc>
+                  <a:txBody>
+                    <a:bodyPr/>
+                    <a:lstStyle/>
+                    <a:p>
+                      <a:pPr algn="l"/>
+                      <a:r>
+                        <a:rPr sz="1000" b="0">
+                          <a:solidFill>
+                            <a:srgbClr val="1D1B43"/>
+                          </a:solidFill>
+                          <a:latin typeface="Calibri"/>
+                        </a:rPr>
+                        <a:t>3</a:t>
+                      </a:r>
+                    </a:p>
+                  </a:txBody>
+                  <a:tcPr>
+                    <a:solidFill>
+                      <a:srgbClr val="FFFFFF"/>
+                    </a:solidFill>
+                  </a:tcPr>
+                </a:tc>
+                <a:tc>
+                  <a:txBody>
+                    <a:bodyPr/>
+                    <a:lstStyle/>
+                    <a:p>
+                      <a:pPr algn="l"/>
+                      <a:r>
+                        <a:rPr sz="1000" b="0">
+                          <a:solidFill>
+                            <a:srgbClr val="1D1B43"/>
+                          </a:solidFill>
+                          <a:latin typeface="Calibri"/>
+                        </a:rPr>
+                        <a:t>3</a:t>
+                      </a:r>
+                    </a:p>
+                  </a:txBody>
+                  <a:tcPr>
+                    <a:solidFill>
+                      <a:srgbClr val="FFFFFF"/>
+                    </a:solidFill>
+                  </a:tcPr>
+                </a:tc>
+                <a:tc>
+                  <a:txBody>
+                    <a:bodyPr/>
+                    <a:lstStyle/>
+                    <a:p>
+                      <a:pPr algn="l"/>
+                      <a:r>
+                        <a:rPr sz="1000" b="0">
+                          <a:solidFill>
+                            <a:srgbClr val="1D1B43"/>
+                          </a:solidFill>
+                          <a:latin typeface="Calibri"/>
+                        </a:rPr>
+                        <a:t>0</a:t>
+                      </a:r>
+                    </a:p>
+                  </a:txBody>
+                  <a:tcPr>
+                    <a:solidFill>
+                      <a:srgbClr val="FFFFFF"/>
+                    </a:solidFill>
+                  </a:tcPr>
+                </a:tc>
+                <a:tc>
+                  <a:txBody>
+                    <a:bodyPr/>
+                    <a:lstStyle/>
+                    <a:p>
+                      <a:pPr algn="l"/>
+                      <a:r>
+                        <a:rPr sz="1000" b="0">
+                          <a:solidFill>
+                            <a:srgbClr val="1D1B43"/>
+                          </a:solidFill>
+                          <a:latin typeface="Calibri"/>
+                        </a:rPr>
+                        <a:t>100.0%</a:t>
+                      </a:r>
+                    </a:p>
+                  </a:txBody>
+                  <a:tcPr>
+                    <a:solidFill>
+                      <a:srgbClr val="FFFFFF"/>
+                    </a:solidFill>
+                  </a:tcPr>
+                </a:tc>
+                <a:tc>
+                  <a:txBody>
+                    <a:bodyPr/>
+                    <a:lstStyle/>
+                    <a:p>
+                      <a:pPr algn="l"/>
+                      <a:r>
+                        <a:rPr sz="1000" b="0">
+                          <a:solidFill>
+                            <a:srgbClr val="1D1B43"/>
+                          </a:solidFill>
+                          <a:latin typeface="Calibri"/>
+                        </a:rPr>
+                        <a:t>Excelente</a:t>
+                      </a:r>
+                    </a:p>
+                  </a:txBody>
+                  <a:tcPr>
+                    <a:solidFill>
+                      <a:srgbClr val="FFFFFF"/>
+                    </a:solidFill>
+                  </a:tcPr>
+                </a:tc>
+              </a:tr>
+              <a:tr h="438912">
+                <a:tc>
+                  <a:txBody>
+                    <a:bodyPr/>
+                    <a:lstStyle/>
+                    <a:p>
+                      <a:pPr algn="l"/>
+                      <a:r>
+                        <a:rPr sz="1000" b="0">
+                          <a:solidFill>
+                            <a:srgbClr val="1D1B43"/>
+                          </a:solidFill>
+                          <a:latin typeface="Calibri"/>
+                        </a:rPr>
+                        <a:t>PR</a:t>
+                      </a:r>
+                    </a:p>
+                  </a:txBody>
+                  <a:tcPr>
+                    <a:solidFill>
+                      <a:srgbClr val="F2F2F2"/>
+                    </a:solidFill>
+                  </a:tcPr>
+                </a:tc>
+                <a:tc>
+                  <a:txBody>
+                    <a:bodyPr/>
+                    <a:lstStyle/>
+                    <a:p>
+                      <a:pPr algn="l"/>
+                      <a:r>
+                        <a:rPr sz="1000" b="0">
+                          <a:solidFill>
+                            <a:srgbClr val="1D1B43"/>
+                          </a:solidFill>
+                          <a:latin typeface="Calibri"/>
+                        </a:rPr>
+                        <a:t>3</a:t>
+                      </a:r>
+                    </a:p>
+                  </a:txBody>
+                  <a:tcPr>
+                    <a:solidFill>
+                      <a:srgbClr val="F2F2F2"/>
+                    </a:solidFill>
+                  </a:tcPr>
+                </a:tc>
+                <a:tc>
+                  <a:txBody>
+                    <a:bodyPr/>
+                    <a:lstStyle/>
+                    <a:p>
+                      <a:pPr algn="l"/>
+                      <a:r>
+                        <a:rPr sz="1000" b="0">
+                          <a:solidFill>
+                            <a:srgbClr val="1D1B43"/>
+                          </a:solidFill>
+                          <a:latin typeface="Calibri"/>
+                        </a:rPr>
+                        <a:t>3</a:t>
+                      </a:r>
+                    </a:p>
+                  </a:txBody>
+                  <a:tcPr>
+                    <a:solidFill>
+                      <a:srgbClr val="F2F2F2"/>
+                    </a:solidFill>
+                  </a:tcPr>
+                </a:tc>
+                <a:tc>
+                  <a:txBody>
+                    <a:bodyPr/>
+                    <a:lstStyle/>
+                    <a:p>
+                      <a:pPr algn="l"/>
+                      <a:r>
+                        <a:rPr sz="1000" b="0">
+                          <a:solidFill>
+                            <a:srgbClr val="1D1B43"/>
+                          </a:solidFill>
+                          <a:latin typeface="Calibri"/>
+                        </a:rPr>
+                        <a:t>0</a:t>
+                      </a:r>
+                    </a:p>
+                  </a:txBody>
+                  <a:tcPr>
+                    <a:solidFill>
+                      <a:srgbClr val="F2F2F2"/>
+                    </a:solidFill>
+                  </a:tcPr>
+                </a:tc>
+                <a:tc>
+                  <a:txBody>
+                    <a:bodyPr/>
+                    <a:lstStyle/>
+                    <a:p>
+                      <a:pPr algn="l"/>
+                      <a:r>
+                        <a:rPr sz="1000" b="0">
+                          <a:solidFill>
+                            <a:srgbClr val="1D1B43"/>
+                          </a:solidFill>
+                          <a:latin typeface="Calibri"/>
+                        </a:rPr>
+                        <a:t>100.0%</a:t>
+                      </a:r>
+                    </a:p>
+                  </a:txBody>
+                  <a:tcPr>
+                    <a:solidFill>
+                      <a:srgbClr val="F2F2F2"/>
+                    </a:solidFill>
+                  </a:tcPr>
+                </a:tc>
+                <a:tc>
+                  <a:txBody>
+                    <a:bodyPr/>
+                    <a:lstStyle/>
+                    <a:p>
+                      <a:pPr algn="l"/>
+                      <a:r>
+                        <a:rPr sz="1000" b="0">
+                          <a:solidFill>
+                            <a:srgbClr val="1D1B43"/>
+                          </a:solidFill>
+                          <a:latin typeface="Calibri"/>
+                        </a:rPr>
+                        <a:t>Excelente</a:t>
+                      </a:r>
+                    </a:p>
+                  </a:txBody>
+                  <a:tcPr>
+                    <a:solidFill>
+                      <a:srgbClr val="F2F2F2"/>
+                    </a:solidFill>
+                  </a:tcPr>
+                </a:tc>
+              </a:tr>
+              <a:tr h="438912">
+                <a:tc>
+                  <a:txBody>
+                    <a:bodyPr/>
+                    <a:lstStyle/>
+                    <a:p>
+                      <a:pPr algn="l"/>
+                      <a:r>
+                        <a:rPr sz="1000" b="0">
+                          <a:solidFill>
+                            <a:srgbClr val="1D1B43"/>
+                          </a:solidFill>
+                          <a:latin typeface="Calibri"/>
+                        </a:rPr>
+                        <a:t>RJ</a:t>
+                      </a:r>
+                    </a:p>
+                  </a:txBody>
+                  <a:tcPr>
+                    <a:solidFill>
+                      <a:srgbClr val="FFFFFF"/>
+                    </a:solidFill>
+                  </a:tcPr>
+                </a:tc>
+                <a:tc>
+                  <a:txBody>
+                    <a:bodyPr/>
+                    <a:lstStyle/>
+                    <a:p>
+                      <a:pPr algn="l"/>
+                      <a:r>
+                        <a:rPr sz="1000" b="0">
+                          <a:solidFill>
+                            <a:srgbClr val="1D1B43"/>
+                          </a:solidFill>
+                          <a:latin typeface="Calibri"/>
+                        </a:rPr>
+                        <a:t>2</a:t>
+                      </a:r>
+                    </a:p>
+                  </a:txBody>
+                  <a:tcPr>
+                    <a:solidFill>
+                      <a:srgbClr val="FFFFFF"/>
+                    </a:solidFill>
+                  </a:tcPr>
+                </a:tc>
+                <a:tc>
+                  <a:txBody>
+                    <a:bodyPr/>
+                    <a:lstStyle/>
+                    <a:p>
+                      <a:pPr algn="l"/>
+                      <a:r>
+                        <a:rPr sz="1000" b="0">
+                          <a:solidFill>
+                            <a:srgbClr val="1D1B43"/>
+                          </a:solidFill>
+                          <a:latin typeface="Calibri"/>
+                        </a:rPr>
+                        <a:t>2</a:t>
+                      </a:r>
+                    </a:p>
+                  </a:txBody>
+                  <a:tcPr>
+                    <a:solidFill>
+                      <a:srgbClr val="FFFFFF"/>
+                    </a:solidFill>
+                  </a:tcPr>
+                </a:tc>
+                <a:tc>
+                  <a:txBody>
+                    <a:bodyPr/>
+                    <a:lstStyle/>
+                    <a:p>
+                      <a:pPr algn="l"/>
+                      <a:r>
+                        <a:rPr sz="1000" b="0">
+                          <a:solidFill>
+                            <a:srgbClr val="1D1B43"/>
+                          </a:solidFill>
+                          <a:latin typeface="Calibri"/>
+                        </a:rPr>
+                        <a:t>0</a:t>
+                      </a:r>
+                    </a:p>
+                  </a:txBody>
+                  <a:tcPr>
+                    <a:solidFill>
+                      <a:srgbClr val="FFFFFF"/>
+                    </a:solidFill>
+                  </a:tcPr>
+                </a:tc>
+                <a:tc>
+                  <a:txBody>
+                    <a:bodyPr/>
+                    <a:lstStyle/>
+                    <a:p>
+                      <a:pPr algn="l"/>
+                      <a:r>
+                        <a:rPr sz="1000" b="0">
+                          <a:solidFill>
+                            <a:srgbClr val="1D1B43"/>
+                          </a:solidFill>
+                          <a:latin typeface="Calibri"/>
+                        </a:rPr>
+                        <a:t>100.0%</a:t>
+                      </a:r>
+                    </a:p>
+                  </a:txBody>
+                  <a:tcPr>
+                    <a:solidFill>
+                      <a:srgbClr val="FFFFFF"/>
+                    </a:solidFill>
+                  </a:tcPr>
+                </a:tc>
+                <a:tc>
+                  <a:txBody>
+                    <a:bodyPr/>
+                    <a:lstStyle/>
+                    <a:p>
+                      <a:pPr algn="l"/>
+                      <a:r>
+                        <a:rPr sz="1000" b="0">
+                          <a:solidFill>
+                            <a:srgbClr val="1D1B43"/>
+                          </a:solidFill>
+                          <a:latin typeface="Calibri"/>
+                        </a:rPr>
+                        <a:t>Excelente</a:t>
+                      </a:r>
+                    </a:p>
+                  </a:txBody>
+                  <a:tcPr>
+                    <a:solidFill>
+                      <a:srgbClr val="FFFFFF"/>
+                    </a:solidFill>
+                  </a:tcPr>
+                </a:tc>
+              </a:tr>
+              <a:tr h="438912">
+                <a:tc>
+                  <a:txBody>
+                    <a:bodyPr/>
+                    <a:lstStyle/>
+                    <a:p>
+                      <a:pPr algn="l"/>
+                      <a:r>
+                        <a:rPr sz="1000" b="0">
+                          <a:solidFill>
+                            <a:srgbClr val="1D1B43"/>
+                          </a:solidFill>
+                          <a:latin typeface="Calibri"/>
+                        </a:rPr>
+                        <a:t>MT</a:t>
+                      </a:r>
+                    </a:p>
+                  </a:txBody>
+                  <a:tcPr>
+                    <a:solidFill>
+                      <a:srgbClr val="F2F2F2"/>
+                    </a:solidFill>
+                  </a:tcPr>
+                </a:tc>
+                <a:tc>
+                  <a:txBody>
+                    <a:bodyPr/>
+                    <a:lstStyle/>
+                    <a:p>
+                      <a:pPr algn="l"/>
+                      <a:r>
+                        <a:rPr sz="1000" b="0">
+                          <a:solidFill>
+                            <a:srgbClr val="1D1B43"/>
+                          </a:solidFill>
+                          <a:latin typeface="Calibri"/>
+                        </a:rPr>
+                        <a:t>1</a:t>
+                      </a:r>
+                    </a:p>
+                  </a:txBody>
+                  <a:tcPr>
+                    <a:solidFill>
+                      <a:srgbClr val="F2F2F2"/>
+                    </a:solidFill>
+                  </a:tcPr>
+                </a:tc>
+                <a:tc>
+                  <a:txBody>
+                    <a:bodyPr/>
+                    <a:lstStyle/>
+                    <a:p>
+                      <a:pPr algn="l"/>
+                      <a:r>
+                        <a:rPr sz="1000" b="0">
+                          <a:solidFill>
+                            <a:srgbClr val="1D1B43"/>
+                          </a:solidFill>
+                          <a:latin typeface="Calibri"/>
+                        </a:rPr>
+                        <a:t>0</a:t>
+                      </a:r>
+                    </a:p>
+                  </a:txBody>
+                  <a:tcPr>
+                    <a:solidFill>
+                      <a:srgbClr val="F2F2F2"/>
+                    </a:solidFill>
+                  </a:tcPr>
+                </a:tc>
+                <a:tc>
+                  <a:txBody>
+                    <a:bodyPr/>
+                    <a:lstStyle/>
+                    <a:p>
+                      <a:pPr algn="l"/>
+                      <a:r>
+                        <a:rPr sz="1000" b="0">
+                          <a:solidFill>
+                            <a:srgbClr val="1D1B43"/>
+                          </a:solidFill>
+                          <a:latin typeface="Calibri"/>
+                        </a:rPr>
+                        <a:t>1</a:t>
+                      </a:r>
+                    </a:p>
+                  </a:txBody>
+                  <a:tcPr>
+                    <a:solidFill>
+                      <a:srgbClr val="F2F2F2"/>
+                    </a:solidFill>
+                  </a:tcPr>
+                </a:tc>
+                <a:tc>
+                  <a:txBody>
+                    <a:bodyPr/>
+                    <a:lstStyle/>
+                    <a:p>
+                      <a:pPr algn="l"/>
+                      <a:r>
+                        <a:rPr sz="1000" b="0">
+                          <a:solidFill>
+                            <a:srgbClr val="1D1B43"/>
+                          </a:solidFill>
+                          <a:latin typeface="Calibri"/>
+                        </a:rPr>
+                        <a:t>0.0%</a:t>
+                      </a:r>
+                    </a:p>
+                  </a:txBody>
+                  <a:tcPr>
+                    <a:solidFill>
+                      <a:srgbClr val="F2F2F2"/>
+                    </a:solidFill>
+                  </a:tcPr>
+                </a:tc>
+                <a:tc>
+                  <a:txBody>
+                    <a:bodyPr/>
+                    <a:lstStyle/>
+                    <a:p>
+                      <a:pPr algn="l"/>
+                      <a:r>
+                        <a:rPr sz="1000" b="0">
+                          <a:solidFill>
+                            <a:srgbClr val="1D1B43"/>
+                          </a:solidFill>
+                          <a:latin typeface="Calibri"/>
+                        </a:rPr>
                         <a:t>Atencao</a:t>
                       </a:r>
                     </a:p>
@@ -7096,67 +8170,21 @@
                   </a:tcPr>
                 </a:tc>
               </a:tr>
-              <a:tr h="457200">
-                <a:tc>
-                  <a:txBody>
-                    <a:bodyPr/>
-                    <a:lstStyle/>
-                    <a:p>
-                      <a:pPr algn="l"/>
-                      <a:r>
-                        <a:rPr sz="1000" b="0">
-                          <a:solidFill>
-                            <a:srgbClr val="1D1B43"/>
-                          </a:solidFill>
-                          <a:latin typeface="Calibri"/>
-                        </a:rPr>
-                        <a:t>MT</a:t>
-                      </a:r>
-                    </a:p>
-                  </a:txBody>
-                  <a:tcPr>
-                    <a:solidFill>
-                      <a:srgbClr val="FFFFFF"/>
-                    </a:solidFill>
-                  </a:tcPr>
-                </a:tc>
-                <a:tc>
-                  <a:txBody>
-                    <a:bodyPr/>
-                    <a:lstStyle/>
-                    <a:p>
-                      <a:pPr algn="l"/>
-                      <a:r>
-                        <a:rPr sz="1000" b="0">
-                          <a:solidFill>
-                            <a:srgbClr val="1D1B43"/>
-                          </a:solidFill>
-                          <a:latin typeface="Calibri"/>
-                        </a:rPr>
-                        <a:t>5</a:t>
-                      </a:r>
-                    </a:p>
-                  </a:txBody>
-                  <a:tcPr>
-                    <a:solidFill>
-                      <a:srgbClr val="FFFFFF"/>
-                    </a:solidFill>
-                  </a:tcPr>
-                </a:tc>
-                <a:tc>
-                  <a:txBody>
-                    <a:bodyPr/>
-                    <a:lstStyle/>
-                    <a:p>
-                      <a:pPr algn="l"/>
-                      <a:r>
-                        <a:rPr sz="1000" b="0">
-                          <a:solidFill>
-                            <a:srgbClr val="1D1B43"/>
-                          </a:solidFill>
-                          <a:latin typeface="Calibri"/>
-                        </a:rPr>
-                        <a:t>4</a:t>
+              <a:tr h="438912">
+                <a:tc>
+                  <a:txBody>
+                    <a:bodyPr/>
+                    <a:lstStyle/>
+                    <a:p>
+                      <a:pPr algn="l"/>
+                      <a:r>
+                        <a:rPr sz="1000" b="0">
+                          <a:solidFill>
+                            <a:srgbClr val="1D1B43"/>
+                          </a:solidFill>
+                          <a:latin typeface="Calibri"/>
+                        </a:rPr>
+                        <a:t>TO</a:t>
                       </a:r>
                     </a:p>
                   </a:txBody>
@@ -7202,7 +8230,53 @@
                           </a:solidFill>
                           <a:latin typeface="Calibri"/>
                         </a:rPr>
-                        <a:t>80.0%</a:t>
+                        <a:t>0</a:t>
+                      </a:r>
+                    </a:p>
+                  </a:txBody>
+                  <a:tcPr>
+                    <a:solidFill>
+                      <a:srgbClr val="FFFFFF"/>
+                    </a:solidFill>
+                  </a:tcPr>
+                </a:tc>
+                <a:tc>
+                  <a:txBody>
+                    <a:bodyPr/>
+                    <a:lstStyle/>
+                    <a:p>
+                      <a:pPr algn="l"/>
+                      <a:r>
+                        <a:rPr sz="1000" b="0">
+                          <a:solidFill>
+                            <a:srgbClr val="1D1B43"/>
+                          </a:solidFill>
+                          <a:latin typeface="Calibri"/>
+                        </a:rPr>
+                        <a:t>1</a:t>
+                      </a:r>
+                    </a:p>
+                  </a:txBody>
+                  <a:tcPr>
+                    <a:solidFill>
+                      <a:srgbClr val="FFFFFF"/>
+                    </a:solidFill>
+                  </a:tcPr>
+                </a:tc>
+                <a:tc>
+                  <a:txBody>
+                    <a:bodyPr/>
+                    <a:lstStyle/>
+                    <a:p>
+                      <a:pPr algn="l"/>
+                      <a:r>
+                        <a:rPr sz="1000" b="0">
+                          <a:solidFill>
+                            <a:srgbClr val="1D1B43"/>
+                          </a:solidFill>
+                          <a:latin typeface="Calibri"/>
+                        </a:rPr>
+                        <a:t>0.0%</a:t>
                       </a:r>
                     </a:p>
                   </a:txBody>
@@ -7232,426 +8306,6 @@
                   <a:tcPr>
                     <a:solidFill>
                       <a:srgbClr val="FFFFFF"/>
-                    </a:solidFill>
-                  </a:tcPr>
-                </a:tc>
-              </a:tr>
-              <a:tr h="457200">
-                <a:tc>
-                  <a:txBody>
-                    <a:bodyPr/>
-                    <a:lstStyle/>
-                    <a:p>
-                      <a:pPr algn="l"/>
-                      <a:r>
-                        <a:rPr sz="1000" b="0">
-                          <a:solidFill>
-                            <a:srgbClr val="1D1B43"/>
-                          </a:solidFill>
-                          <a:latin typeface="Calibri"/>
-                        </a:rPr>
-                        <a:t>RS</a:t>
-                      </a:r>
-                    </a:p>
-                  </a:txBody>
-                  <a:tcPr>
-                    <a:solidFill>
-                      <a:srgbClr val="F2F2F2"/>
-                    </a:solidFill>
-                  </a:tcPr>
-                </a:tc>
-                <a:tc>
-                  <a:txBody>
-                    <a:bodyPr/>
-                    <a:lstStyle/>
-                    <a:p>
-                      <a:pPr algn="l"/>
-                      <a:r>
-                        <a:rPr sz="1000" b="0">
-                          <a:solidFill>
-                            <a:srgbClr val="1D1B43"/>
-                          </a:solidFill>
-                          <a:latin typeface="Calibri"/>
-                        </a:rPr>
-                        <a:t>5</a:t>
-                      </a:r>
-                    </a:p>
-                  </a:txBody>
-                  <a:tcPr>
-                    <a:solidFill>
-                      <a:srgbClr val="F2F2F2"/>
-                    </a:solidFill>
-                  </a:tcPr>
-                </a:tc>
-                <a:tc>
-                  <a:txBody>
-                    <a:bodyPr/>
-                    <a:lstStyle/>
-                    <a:p>
-                      <a:pPr algn="l"/>
-                      <a:r>
-                        <a:rPr sz="1000" b="0">
-                          <a:solidFill>
-                            <a:srgbClr val="1D1B43"/>
-                          </a:solidFill>
-                          <a:latin typeface="Calibri"/>
-                        </a:rPr>
-                        <a:t>5</a:t>
-                      </a:r>
-                    </a:p>
-                  </a:txBody>
-                  <a:tcPr>
-                    <a:solidFill>
-                      <a:srgbClr val="F2F2F2"/>
-                    </a:solidFill>
-                  </a:tcPr>
-                </a:tc>
-                <a:tc>
-                  <a:txBody>
-                    <a:bodyPr/>
-                    <a:lstStyle/>
-                    <a:p>
-                      <a:pPr algn="l"/>
-                      <a:r>
-                        <a:rPr sz="1000" b="0">
-                          <a:solidFill>
-                            <a:srgbClr val="1D1B43"/>
-                          </a:solidFill>
-                          <a:latin typeface="Calibri"/>
-                        </a:rPr>
-                        <a:t>0</a:t>
-                      </a:r>
-                    </a:p>
-                  </a:txBody>
-                  <a:tcPr>
-                    <a:solidFill>
-                      <a:srgbClr val="F2F2F2"/>
-                    </a:solidFill>
-                  </a:tcPr>
-                </a:tc>
-                <a:tc>
-                  <a:txBody>
-                    <a:bodyPr/>
-                    <a:lstStyle/>
-                    <a:p>
-                      <a:pPr algn="l"/>
-                      <a:r>
-                        <a:rPr sz="1000" b="0">
-                          <a:solidFill>
-                            <a:srgbClr val="1D1B43"/>
-                          </a:solidFill>
-                          <a:latin typeface="Calibri"/>
-                        </a:rPr>
-                        <a:t>100.0%</a:t>
-                      </a:r>
-                    </a:p>
-                  </a:txBody>
-                  <a:tcPr>
-                    <a:solidFill>
-                      <a:srgbClr val="F2F2F2"/>
-                    </a:solidFill>
-                  </a:tcPr>
-                </a:tc>
-                <a:tc>
-                  <a:txBody>
-                    <a:bodyPr/>
-                    <a:lstStyle/>
-                    <a:p>
-                      <a:pPr algn="l"/>
-                      <a:r>
-                        <a:rPr sz="1000" b="0">
-                          <a:solidFill>
-                            <a:srgbClr val="1D1B43"/>
-                          </a:solidFill>
-                          <a:latin typeface="Calibri"/>
-                        </a:rPr>
-                        <a:t>Excelente</a:t>
-                      </a:r>
-                    </a:p>
-                  </a:txBody>
-                  <a:tcPr>
-                    <a:solidFill>
-                      <a:srgbClr val="F2F2F2"/>
-                    </a:solidFill>
-                  </a:tcPr>
-                </a:tc>
-              </a:tr>
-              <a:tr h="457200">
-                <a:tc>
-                  <a:txBody>
-                    <a:bodyPr/>
-                    <a:lstStyle/>
-                    <a:p>
-                      <a:pPr algn="l"/>
-                      <a:r>
-                        <a:rPr sz="1000" b="0">
-                          <a:solidFill>
-                            <a:srgbClr val="1D1B43"/>
-                          </a:solidFill>
-                          <a:latin typeface="Calibri"/>
-                        </a:rPr>
-                        <a:t>SC</a:t>
-                      </a:r>
-                    </a:p>
-                  </a:txBody>
-                  <a:tcPr>
-                    <a:solidFill>
-                      <a:srgbClr val="FFFFFF"/>
-                    </a:solidFill>
-                  </a:tcPr>
-                </a:tc>
-                <a:tc>
-                  <a:txBody>
-                    <a:bodyPr/>
-                    <a:lstStyle/>
-                    <a:p>
-                      <a:pPr algn="l"/>
-                      <a:r>
-                        <a:rPr sz="1000" b="0">
-                          <a:solidFill>
-                            <a:srgbClr val="1D1B43"/>
-                          </a:solidFill>
-                          <a:latin typeface="Calibri"/>
-                        </a:rPr>
-                        <a:t>5</a:t>
-                      </a:r>
-                    </a:p>
-                  </a:txBody>
-                  <a:tcPr>
-                    <a:solidFill>
-                      <a:srgbClr val="FFFFFF"/>
-                    </a:solidFill>
-                  </a:tcPr>
-                </a:tc>
-                <a:tc>
-                  <a:txBody>
-                    <a:bodyPr/>
-                    <a:lstStyle/>
-                    <a:p>
-                      <a:pPr algn="l"/>
-                      <a:r>
-                        <a:rPr sz="1000" b="0">
-                          <a:solidFill>
-                            <a:srgbClr val="1D1B43"/>
-                          </a:solidFill>
-                          <a:latin typeface="Calibri"/>
-                        </a:rPr>
-                        <a:t>5</a:t>
-                      </a:r>
-                    </a:p>
-                  </a:txBody>
-                  <a:tcPr>
-                    <a:solidFill>
-                      <a:srgbClr val="FFFFFF"/>
-                    </a:solidFill>
-                  </a:tcPr>
-                </a:tc>
-                <a:tc>
-                  <a:txBody>
-                    <a:bodyPr/>
-                    <a:lstStyle/>
-                    <a:p>
-                      <a:pPr algn="l"/>
-                      <a:r>
-                        <a:rPr sz="1000" b="0">
-                          <a:solidFill>
-                            <a:srgbClr val="1D1B43"/>
-                          </a:solidFill>
-                          <a:latin typeface="Calibri"/>
-                        </a:rPr>
-                        <a:t>0</a:t>
-                      </a:r>
-                    </a:p>
-                  </a:txBody>
-                  <a:tcPr>
-                    <a:solidFill>
-                      <a:srgbClr val="FFFFFF"/>
-                    </a:solidFill>
-                  </a:tcPr>
-                </a:tc>
-                <a:tc>
-                  <a:txBody>
-                    <a:bodyPr/>
-                    <a:lstStyle/>
-                    <a:p>
-                      <a:pPr algn="l"/>
-                      <a:r>
-                        <a:rPr sz="1000" b="0">
-                          <a:solidFill>
-                            <a:srgbClr val="1D1B43"/>
-                          </a:solidFill>
-                          <a:latin typeface="Calibri"/>
-                        </a:rPr>
-                        <a:t>100.0%</a:t>
-                      </a:r>
-                    </a:p>
-                  </a:txBody>
-                  <a:tcPr>
-                    <a:solidFill>
-                      <a:srgbClr val="FFFFFF"/>
-                    </a:solidFill>
-                  </a:tcPr>
-                </a:tc>
-                <a:tc>
-                  <a:txBody>
-                    <a:bodyPr/>
-                    <a:lstStyle/>
-                    <a:p>
-                      <a:pPr algn="l"/>
-                      <a:r>
-                        <a:rPr sz="1000" b="0">
-                          <a:solidFill>
-                            <a:srgbClr val="1D1B43"/>
-                          </a:solidFill>
-                          <a:latin typeface="Calibri"/>
-                        </a:rPr>
-                        <a:t>Excelente</a:t>
-                      </a:r>
-                    </a:p>
-                  </a:txBody>
-                  <a:tcPr>
-                    <a:solidFill>
-                      <a:srgbClr val="FFFFFF"/>
-                    </a:solidFill>
-                  </a:tcPr>
-                </a:tc>
-              </a:tr>
-              <a:tr h="457200">
-                <a:tc>
-                  <a:txBody>
-                    <a:bodyPr/>
-                    <a:lstStyle/>
-                    <a:p>
-                      <a:pPr algn="l"/>
-                      <a:r>
-                        <a:rPr sz="1000" b="0">
-                          <a:solidFill>
-                            <a:srgbClr val="1D1B43"/>
-                          </a:solidFill>
-                          <a:latin typeface="Calibri"/>
-                        </a:rPr>
-                        <a:t>PR</a:t>
-                      </a:r>
-                    </a:p>
-                  </a:txBody>
-                  <a:tcPr>
-                    <a:solidFill>
-                      <a:srgbClr val="F2F2F2"/>
-                    </a:solidFill>
-                  </a:tcPr>
-                </a:tc>
-                <a:tc>
-                  <a:txBody>
-                    <a:bodyPr/>
-                    <a:lstStyle/>
-                    <a:p>
-                      <a:pPr algn="l"/>
-                      <a:r>
-                        <a:rPr sz="1000" b="0">
-                          <a:solidFill>
-                            <a:srgbClr val="1D1B43"/>
-                          </a:solidFill>
-                          <a:latin typeface="Calibri"/>
-                        </a:rPr>
-                        <a:t>3</a:t>
-                      </a:r>
-                    </a:p>
-                  </a:txBody>
-                  <a:tcPr>
-                    <a:solidFill>
-                      <a:srgbClr val="F2F2F2"/>
-                    </a:solidFill>
-                  </a:tcPr>
-                </a:tc>
-                <a:tc>
-                  <a:txBody>
-                    <a:bodyPr/>
-                    <a:lstStyle/>
-                    <a:p>
-                      <a:pPr algn="l"/>
-                      <a:r>
-                        <a:rPr sz="1000" b="0">
-                          <a:solidFill>
-                            <a:srgbClr val="1D1B43"/>
-                          </a:solidFill>
-                          <a:latin typeface="Calibri"/>
-                        </a:rPr>
-                        <a:t>2</a:t>
-                      </a:r>
-                    </a:p>
-                  </a:txBody>
-                  <a:tcPr>
-                    <a:solidFill>
-                      <a:srgbClr val="F2F2F2"/>
-                    </a:solidFill>
-                  </a:tcPr>
-                </a:tc>
-                <a:tc>
-                  <a:txBody>
-                    <a:bodyPr/>
-                    <a:lstStyle/>
-                    <a:p>
-                      <a:pPr algn="l"/>
-                      <a:r>
-                        <a:rPr sz="1000" b="0">
-                          <a:solidFill>
-                            <a:srgbClr val="1D1B43"/>
-                          </a:solidFill>
-                          <a:latin typeface="Calibri"/>
-                        </a:rPr>
-                        <a:t>1</a:t>
-                      </a:r>
-                    </a:p>
-                  </a:txBody>
-                  <a:tcPr>
-                    <a:solidFill>
-                      <a:srgbClr val="F2F2F2"/>
-                    </a:solidFill>
-                  </a:tcPr>
-                </a:tc>
-                <a:tc>
-                  <a:txBody>
-                    <a:bodyPr/>
-                    <a:lstStyle/>
-                    <a:p>
-                      <a:pPr algn="l"/>
-                      <a:r>
-                        <a:rPr sz="1000" b="0">
-                          <a:solidFill>
-                            <a:srgbClr val="1D1B43"/>
-                          </a:solidFill>
-                          <a:latin typeface="Calibri"/>
-                        </a:rPr>
-                        <a:t>66.7%</a:t>
-                      </a:r>
-                    </a:p>
-                  </a:txBody>
-                  <a:tcPr>
-                    <a:solidFill>
-                      <a:srgbClr val="F2F2F2"/>
-                    </a:solidFill>
-                  </a:tcPr>
-                </a:tc>
-                <a:tc>
-                  <a:txBody>
-                    <a:bodyPr/>
-                    <a:lstStyle/>
-                    <a:p>
-                      <a:pPr algn="l"/>
-                      <a:r>
-                        <a:rPr sz="1000" b="0">
-                          <a:solidFill>
-                            <a:srgbClr val="1D1B43"/>
-                          </a:solidFill>
-                          <a:latin typeface="Calibri"/>
-                        </a:rPr>
-                        <a:t>Atencao</a:t>
-                      </a:r>
-                    </a:p>
-                  </a:txBody>
-                  <a:tcPr>
-                    <a:solidFill>
-                      <a:srgbClr val="F2F2F2"/>
                     </a:solidFill>
                   </a:tcPr>
                 </a:tc>
@@ -7740,7 +8394,7 @@
                 </a:solidFill>
                 <a:latin typeface="Calibri"/>
               </a:rPr>
-              <a:t>TOP DESTINATARIOS (66 pontos)</a:t>
+              <a:t>TOP DESTINATARIOS (83 pontos)</a:t>
             </a:r>
           </a:p>
         </p:txBody>
@@ -8015,53 +8669,53 @@
                           </a:solidFill>
                           <a:latin typeface="Calibri"/>
                         </a:rPr>
-                        <a:t>TRANSNOBREGA - SAO PAULO / SP</a:t>
-                      </a:r>
-                    </a:p>
-                  </a:txBody>
-                  <a:tcPr>
-                    <a:solidFill>
-                      <a:srgbClr val="FFFFFF"/>
-                    </a:solidFill>
-                  </a:tcPr>
-                </a:tc>
-                <a:tc>
-                  <a:txBody>
-                    <a:bodyPr/>
-                    <a:lstStyle/>
-                    <a:p>
-                      <a:pPr algn="l"/>
-                      <a:r>
-                        <a:rPr sz="1000" b="0">
-                          <a:solidFill>
-                            <a:srgbClr val="1D1B43"/>
-                          </a:solidFill>
-                          <a:latin typeface="Calibri"/>
-                        </a:rPr>
-                        <a:t>3</a:t>
-                      </a:r>
-                    </a:p>
-                  </a:txBody>
-                  <a:tcPr>
-                    <a:solidFill>
-                      <a:srgbClr val="FFFFFF"/>
-                    </a:solidFill>
-                  </a:tcPr>
-                </a:tc>
-                <a:tc>
-                  <a:txBody>
-                    <a:bodyPr/>
-                    <a:lstStyle/>
-                    <a:p>
-                      <a:pPr algn="l"/>
-                      <a:r>
-                        <a:rPr sz="1000" b="0">
-                          <a:solidFill>
-                            <a:srgbClr val="1D1B43"/>
-                          </a:solidFill>
-                          <a:latin typeface="Calibri"/>
-                        </a:rPr>
-                        <a:t>3</a:t>
+                        <a:t>VELOCARGAS BRASIL E - GUARULHOS / SP</a:t>
+                      </a:r>
+                    </a:p>
+                  </a:txBody>
+                  <a:tcPr>
+                    <a:solidFill>
+                      <a:srgbClr val="FFFFFF"/>
+                    </a:solidFill>
+                  </a:tcPr>
+                </a:tc>
+                <a:tc>
+                  <a:txBody>
+                    <a:bodyPr/>
+                    <a:lstStyle/>
+                    <a:p>
+                      <a:pPr algn="l"/>
+                      <a:r>
+                        <a:rPr sz="1000" b="0">
+                          <a:solidFill>
+                            <a:srgbClr val="1D1B43"/>
+                          </a:solidFill>
+                          <a:latin typeface="Calibri"/>
+                        </a:rPr>
+                        <a:t>11</a:t>
+                      </a:r>
+                    </a:p>
+                  </a:txBody>
+                  <a:tcPr>
+                    <a:solidFill>
+                      <a:srgbClr val="FFFFFF"/>
+                    </a:solidFill>
+                  </a:tcPr>
+                </a:tc>
+                <a:tc>
+                  <a:txBody>
+                    <a:bodyPr/>
+                    <a:lstStyle/>
+                    <a:p>
+                      <a:pPr algn="l"/>
+                      <a:r>
+                        <a:rPr sz="1000" b="0">
+                          <a:solidFill>
+                            <a:srgbClr val="1D1B43"/>
+                          </a:solidFill>
+                          <a:latin typeface="Calibri"/>
+                        </a:rPr>
+                        <a:t>11</a:t>
                       </a:r>
                     </a:p>
                   </a:txBody>
@@ -8178,7 +8832,7 @@
                           </a:solidFill>
                           <a:latin typeface="Calibri"/>
                         </a:rPr>
-                        <a:t>WILSON LUIS TRANSPOR - GUARULHOS / SP</a:t>
+                        <a:t>VAILOG TRANSPORTES E - SAO PAULO / SP</a:t>
                       </a:r>
                     </a:p>
                   </a:txBody>
@@ -8201,7 +8855,7 @@
                           </a:solidFill>
                           <a:latin typeface="Calibri"/>
                         </a:rPr>
-                        <a:t>3</a:t>
+                        <a:t>6</a:t>
                       </a:r>
                     </a:p>
                   </a:txBody>
@@ -8224,7 +8878,7 @@
                           </a:solidFill>
                           <a:latin typeface="Calibri"/>
                         </a:rPr>
-                        <a:t>3</a:t>
+                        <a:t>6</a:t>
                       </a:r>
                     </a:p>
                   </a:txBody>
@@ -8364,99 +9018,99 @@
                           </a:solidFill>
                           <a:latin typeface="Calibri"/>
                         </a:rPr>
-                        <a:t>2</a:t>
-                      </a:r>
-                    </a:p>
-                  </a:txBody>
-                  <a:tcPr>
-                    <a:solidFill>
-                      <a:srgbClr val="FFFFFF"/>
-                    </a:solidFill>
-                  </a:tcPr>
-                </a:tc>
-                <a:tc>
-                  <a:txBody>
-                    <a:bodyPr/>
-                    <a:lstStyle/>
-                    <a:p>
-                      <a:pPr algn="l"/>
-                      <a:r>
-                        <a:rPr sz="1000" b="0">
-                          <a:solidFill>
-                            <a:srgbClr val="1D1B43"/>
-                          </a:solidFill>
-                          <a:latin typeface="Calibri"/>
-                        </a:rPr>
-                        <a:t>2</a:t>
-                      </a:r>
-                    </a:p>
-                  </a:txBody>
-                  <a:tcPr>
-                    <a:solidFill>
-                      <a:srgbClr val="FFFFFF"/>
-                    </a:solidFill>
-                  </a:tcPr>
-                </a:tc>
-                <a:tc>
-                  <a:txBody>
-                    <a:bodyPr/>
-                    <a:lstStyle/>
-                    <a:p>
-                      <a:pPr algn="l"/>
-                      <a:r>
-                        <a:rPr sz="1000" b="0">
-                          <a:solidFill>
-                            <a:srgbClr val="1D1B43"/>
-                          </a:solidFill>
-                          <a:latin typeface="Calibri"/>
-                        </a:rPr>
-                        <a:t>0</a:t>
-                      </a:r>
-                    </a:p>
-                  </a:txBody>
-                  <a:tcPr>
-                    <a:solidFill>
-                      <a:srgbClr val="FFFFFF"/>
-                    </a:solidFill>
-                  </a:tcPr>
-                </a:tc>
-                <a:tc>
-                  <a:txBody>
-                    <a:bodyPr/>
-                    <a:lstStyle/>
-                    <a:p>
-                      <a:pPr algn="l"/>
-                      <a:r>
-                        <a:rPr sz="1000" b="0">
-                          <a:solidFill>
-                            <a:srgbClr val="1D1B43"/>
-                          </a:solidFill>
-                          <a:latin typeface="Calibri"/>
-                        </a:rPr>
-                        <a:t>100.0%</a:t>
-                      </a:r>
-                    </a:p>
-                  </a:txBody>
-                  <a:tcPr>
-                    <a:solidFill>
-                      <a:srgbClr val="FFFFFF"/>
-                    </a:solidFill>
-                  </a:tcPr>
-                </a:tc>
-                <a:tc>
-                  <a:txBody>
-                    <a:bodyPr/>
-                    <a:lstStyle/>
-                    <a:p>
-                      <a:pPr algn="l"/>
-                      <a:r>
-                        <a:rPr sz="1000" b="0">
-                          <a:solidFill>
-                            <a:srgbClr val="1D1B43"/>
-                          </a:solidFill>
-                          <a:latin typeface="Calibri"/>
-                        </a:rPr>
-                        <a:t>Excelente</a:t>
+                        <a:t>5</a:t>
+                      </a:r>
+                    </a:p>
+                  </a:txBody>
+                  <a:tcPr>
+                    <a:solidFill>
+                      <a:srgbClr val="FFFFFF"/>
+                    </a:solidFill>
+                  </a:tcPr>
+                </a:tc>
+                <a:tc>
+                  <a:txBody>
+                    <a:bodyPr/>
+                    <a:lstStyle/>
+                    <a:p>
+                      <a:pPr algn="l"/>
+                      <a:r>
+                        <a:rPr sz="1000" b="0">
+                          <a:solidFill>
+                            <a:srgbClr val="1D1B43"/>
+                          </a:solidFill>
+                          <a:latin typeface="Calibri"/>
+                        </a:rPr>
+                        <a:t>4</a:t>
+                      </a:r>
+                    </a:p>
+                  </a:txBody>
+                  <a:tcPr>
+                    <a:solidFill>
+                      <a:srgbClr val="FFFFFF"/>
+                    </a:solidFill>
+                  </a:tcPr>
+                </a:tc>
+                <a:tc>
+                  <a:txBody>
+                    <a:bodyPr/>
+                    <a:lstStyle/>
+                    <a:p>
+                      <a:pPr algn="l"/>
+                      <a:r>
+                        <a:rPr sz="1000" b="0">
+                          <a:solidFill>
+                            <a:srgbClr val="1D1B43"/>
+                          </a:solidFill>
+                          <a:latin typeface="Calibri"/>
+                        </a:rPr>
+                        <a:t>1</a:t>
+                      </a:r>
+                    </a:p>
+                  </a:txBody>
+                  <a:tcPr>
+                    <a:solidFill>
+                      <a:srgbClr val="FFFFFF"/>
+                    </a:solidFill>
+                  </a:tcPr>
+                </a:tc>
+                <a:tc>
+                  <a:txBody>
+                    <a:bodyPr/>
+                    <a:lstStyle/>
+                    <a:p>
+                      <a:pPr algn="l"/>
+                      <a:r>
+                        <a:rPr sz="1000" b="0">
+                          <a:solidFill>
+                            <a:srgbClr val="1D1B43"/>
+                          </a:solidFill>
+                          <a:latin typeface="Calibri"/>
+                        </a:rPr>
+                        <a:t>80.0%</a:t>
+                      </a:r>
+                    </a:p>
+                  </a:txBody>
+                  <a:tcPr>
+                    <a:solidFill>
+                      <a:srgbClr val="FFFFFF"/>
+                    </a:solidFill>
+                  </a:tcPr>
+                </a:tc>
+                <a:tc>
+                  <a:txBody>
+                    <a:bodyPr/>
+                    <a:lstStyle/>
+                    <a:p>
+                      <a:pPr algn="l"/>
+                      <a:r>
+                        <a:rPr sz="1000" b="0">
+                          <a:solidFill>
+                            <a:srgbClr val="1D1B43"/>
+                          </a:solidFill>
+                          <a:latin typeface="Calibri"/>
+                        </a:rPr>
+                        <a:t>Atencao</a:t>
                       </a:r>
                     </a:p>
                   </a:txBody>
@@ -8504,7 +9158,7 @@
                           </a:solidFill>
                           <a:latin typeface="Calibri"/>
                         </a:rPr>
-                        <a:t>VAILOG TRANSPORTES E - SAO PAULO / SP</a:t>
+                        <a:t>WILSON LUIS TRANSPOR - GUARULHOS / SP</a:t>
                       </a:r>
                     </a:p>
                   </a:txBody>
@@ -8527,7 +9181,7 @@
                           </a:solidFill>
                           <a:latin typeface="Calibri"/>
                         </a:rPr>
-                        <a:t>2</a:t>
+                        <a:t>4</a:t>
                       </a:r>
                     </a:p>
                   </a:txBody>
@@ -8550,7 +9204,7 @@
                           </a:solidFill>
                           <a:latin typeface="Calibri"/>
                         </a:rPr>
-                        <a:t>2</a:t>
+                        <a:t>4</a:t>
                       </a:r>
                     </a:p>
                   </a:txBody>
@@ -8667,53 +9321,53 @@
                           </a:solidFill>
                           <a:latin typeface="Calibri"/>
                         </a:rPr>
-                        <a:t>LETICIA BABY - MONTE AZUL PAULISTA / SP</a:t>
-                      </a:r>
-                    </a:p>
-                  </a:txBody>
-                  <a:tcPr>
-                    <a:solidFill>
-                      <a:srgbClr val="FFFFFF"/>
-                    </a:solidFill>
-                  </a:tcPr>
-                </a:tc>
-                <a:tc>
-                  <a:txBody>
-                    <a:bodyPr/>
-                    <a:lstStyle/>
-                    <a:p>
-                      <a:pPr algn="l"/>
-                      <a:r>
-                        <a:rPr sz="1000" b="0">
-                          <a:solidFill>
-                            <a:srgbClr val="1D1B43"/>
-                          </a:solidFill>
-                          <a:latin typeface="Calibri"/>
-                        </a:rPr>
-                        <a:t>2</a:t>
-                      </a:r>
-                    </a:p>
-                  </a:txBody>
-                  <a:tcPr>
-                    <a:solidFill>
-                      <a:srgbClr val="FFFFFF"/>
-                    </a:solidFill>
-                  </a:tcPr>
-                </a:tc>
-                <a:tc>
-                  <a:txBody>
-                    <a:bodyPr/>
-                    <a:lstStyle/>
-                    <a:p>
-                      <a:pPr algn="l"/>
-                      <a:r>
-                        <a:rPr sz="1000" b="0">
-                          <a:solidFill>
-                            <a:srgbClr val="1D1B43"/>
-                          </a:solidFill>
-                          <a:latin typeface="Calibri"/>
-                        </a:rPr>
-                        <a:t>2</a:t>
+                        <a:t>BATIKI COM IMPORT EX - SAO JOSE DO RIO PRETO / S</a:t>
+                      </a:r>
+                    </a:p>
+                  </a:txBody>
+                  <a:tcPr>
+                    <a:solidFill>
+                      <a:srgbClr val="FFFFFF"/>
+                    </a:solidFill>
+                  </a:tcPr>
+                </a:tc>
+                <a:tc>
+                  <a:txBody>
+                    <a:bodyPr/>
+                    <a:lstStyle/>
+                    <a:p>
+                      <a:pPr algn="l"/>
+                      <a:r>
+                        <a:rPr sz="1000" b="0">
+                          <a:solidFill>
+                            <a:srgbClr val="1D1B43"/>
+                          </a:solidFill>
+                          <a:latin typeface="Calibri"/>
+                        </a:rPr>
+                        <a:t>3</a:t>
+                      </a:r>
+                    </a:p>
+                  </a:txBody>
+                  <a:tcPr>
+                    <a:solidFill>
+                      <a:srgbClr val="FFFFFF"/>
+                    </a:solidFill>
+                  </a:tcPr>
+                </a:tc>
+                <a:tc>
+                  <a:txBody>
+                    <a:bodyPr/>
+                    <a:lstStyle/>
+                    <a:p>
+                      <a:pPr algn="l"/>
+                      <a:r>
+                        <a:rPr sz="1000" b="0">
+                          <a:solidFill>
+                            <a:srgbClr val="1D1B43"/>
+                          </a:solidFill>
+                          <a:latin typeface="Calibri"/>
+                        </a:rPr>
+                        <a:t>3</a:t>
                       </a:r>
                     </a:p>
                   </a:txBody>
@@ -8830,7 +9484,7 @@
                           </a:solidFill>
                           <a:latin typeface="Calibri"/>
                         </a:rPr>
-                        <a:t>REDE MAIS CALCADOS E - XANXERE / SC</a:t>
+                        <a:t>TRANSPRESS TRANSPORT - GUARULHOS / SP</a:t>
                       </a:r>
                     </a:p>
                   </a:txBody>
@@ -8853,7 +9507,7 @@
                           </a:solidFill>
                           <a:latin typeface="Calibri"/>
                         </a:rPr>
-                        <a:t>2</a:t>
+                        <a:t>3</a:t>
                       </a:r>
                     </a:p>
                   </a:txBody>
@@ -8876,7 +9530,7 @@
                           </a:solidFill>
                           <a:latin typeface="Calibri"/>
                         </a:rPr>
-                        <a:t>2</a:t>
+                        <a:t>0</a:t>
                       </a:r>
                     </a:p>
                   </a:txBody>
@@ -8899,7 +9553,7 @@
                           </a:solidFill>
                           <a:latin typeface="Calibri"/>
                         </a:rPr>
-                        <a:t>0</a:t>
+                        <a:t>3</a:t>
                       </a:r>
                     </a:p>
                   </a:txBody>
@@ -8922,7 +9576,7 @@
                           </a:solidFill>
                           <a:latin typeface="Calibri"/>
                         </a:rPr>
-                        <a:t>100.0%</a:t>
+                        <a:t>0.0%</a:t>
                       </a:r>
                     </a:p>
                   </a:txBody>
@@ -8945,7 +9599,7 @@
                           </a:solidFill>
                           <a:latin typeface="Calibri"/>
                         </a:rPr>
-                        <a:t>Excelente</a:t>
+                        <a:t>Atencao</a:t>
                       </a:r>
                     </a:p>
                   </a:txBody>
@@ -8993,53 +9647,53 @@
                           </a:solidFill>
                           <a:latin typeface="Calibri"/>
                         </a:rPr>
-                        <a:t>56.969.922 CARLITO D - GOIANIA / GO</a:t>
-                      </a:r>
-                    </a:p>
-                  </a:txBody>
-                  <a:tcPr>
-                    <a:solidFill>
-                      <a:srgbClr val="FFFFFF"/>
-                    </a:solidFill>
-                  </a:tcPr>
-                </a:tc>
-                <a:tc>
-                  <a:txBody>
-                    <a:bodyPr/>
-                    <a:lstStyle/>
-                    <a:p>
-                      <a:pPr algn="l"/>
-                      <a:r>
-                        <a:rPr sz="1000" b="0">
-                          <a:solidFill>
-                            <a:srgbClr val="1D1B43"/>
-                          </a:solidFill>
-                          <a:latin typeface="Calibri"/>
-                        </a:rPr>
-                        <a:t>1</a:t>
-                      </a:r>
-                    </a:p>
-                  </a:txBody>
-                  <a:tcPr>
-                    <a:solidFill>
-                      <a:srgbClr val="FFFFFF"/>
-                    </a:solidFill>
-                  </a:tcPr>
-                </a:tc>
-                <a:tc>
-                  <a:txBody>
-                    <a:bodyPr/>
-                    <a:lstStyle/>
-                    <a:p>
-                      <a:pPr algn="l"/>
-                      <a:r>
-                        <a:rPr sz="1000" b="0">
-                          <a:solidFill>
-                            <a:srgbClr val="1D1B43"/>
-                          </a:solidFill>
-                          <a:latin typeface="Calibri"/>
-                        </a:rPr>
-                        <a:t>1</a:t>
+                        <a:t>ERF SILVA ACESSORIOS - SAO PAULO / SP</a:t>
+                      </a:r>
+                    </a:p>
+                  </a:txBody>
+                  <a:tcPr>
+                    <a:solidFill>
+                      <a:srgbClr val="FFFFFF"/>
+                    </a:solidFill>
+                  </a:tcPr>
+                </a:tc>
+                <a:tc>
+                  <a:txBody>
+                    <a:bodyPr/>
+                    <a:lstStyle/>
+                    <a:p>
+                      <a:pPr algn="l"/>
+                      <a:r>
+                        <a:rPr sz="1000" b="0">
+                          <a:solidFill>
+                            <a:srgbClr val="1D1B43"/>
+                          </a:solidFill>
+                          <a:latin typeface="Calibri"/>
+                        </a:rPr>
+                        <a:t>2</a:t>
+                      </a:r>
+                    </a:p>
+                  </a:txBody>
+                  <a:tcPr>
+                    <a:solidFill>
+                      <a:srgbClr val="FFFFFF"/>
+                    </a:solidFill>
+                  </a:tcPr>
+                </a:tc>
+                <a:tc>
+                  <a:txBody>
+                    <a:bodyPr/>
+                    <a:lstStyle/>
+                    <a:p>
+                      <a:pPr algn="l"/>
+                      <a:r>
+                        <a:rPr sz="1000" b="0">
+                          <a:solidFill>
+                            <a:srgbClr val="1D1B43"/>
+                          </a:solidFill>
+                          <a:latin typeface="Calibri"/>
+                        </a:rPr>
+                        <a:t>2</a:t>
                       </a:r>
                     </a:p>
                   </a:txBody>
@@ -9156,7 +9810,7 @@
                           </a:solidFill>
                           <a:latin typeface="Calibri"/>
                         </a:rPr>
-                        <a:t>3 IRMAOS BRINQ E VAR - URUACU / GO</a:t>
+                        <a:t>LANDRICO MINAS LTDA - SAO PAULO / SP</a:t>
                       </a:r>
                     </a:p>
                   </a:txBody>
@@ -9179,7 +9833,7 @@
                           </a:solidFill>
                           <a:latin typeface="Calibri"/>
                         </a:rPr>
-                        <a:t>1</a:t>
+                        <a:t>2</a:t>
                       </a:r>
                     </a:p>
                   </a:txBody>
@@ -9202,7 +9856,7 @@
                           </a:solidFill>
                           <a:latin typeface="Calibri"/>
                         </a:rPr>
-                        <a:t>1</a:t>
+                        <a:t>2</a:t>
                       </a:r>
                     </a:p>
                   </a:txBody>
@@ -9319,53 +9973,53 @@
                           </a:solidFill>
                           <a:latin typeface="Calibri"/>
                         </a:rPr>
-                        <a:t>AMIR NURELDIN EZBE A - JATAI / GO</a:t>
-                      </a:r>
-                    </a:p>
-                  </a:txBody>
-                  <a:tcPr>
-                    <a:solidFill>
-                      <a:srgbClr val="FFFFFF"/>
-                    </a:solidFill>
-                  </a:tcPr>
-                </a:tc>
-                <a:tc>
-                  <a:txBody>
-                    <a:bodyPr/>
-                    <a:lstStyle/>
-                    <a:p>
-                      <a:pPr algn="l"/>
-                      <a:r>
-                        <a:rPr sz="1000" b="0">
-                          <a:solidFill>
-                            <a:srgbClr val="1D1B43"/>
-                          </a:solidFill>
-                          <a:latin typeface="Calibri"/>
-                        </a:rPr>
-                        <a:t>1</a:t>
-                      </a:r>
-                    </a:p>
-                  </a:txBody>
-                  <a:tcPr>
-                    <a:solidFill>
-                      <a:srgbClr val="FFFFFF"/>
-                    </a:solidFill>
-                  </a:tcPr>
-                </a:tc>
-                <a:tc>
-                  <a:txBody>
-                    <a:bodyPr/>
-                    <a:lstStyle/>
-                    <a:p>
-                      <a:pPr algn="l"/>
-                      <a:r>
-                        <a:rPr sz="1000" b="0">
-                          <a:solidFill>
-                            <a:srgbClr val="1D1B43"/>
-                          </a:solidFill>
-                          <a:latin typeface="Calibri"/>
-                        </a:rPr>
-                        <a:t>1</a:t>
+                        <a:t>SERAFIM TRANSPORTE D - GUARULHOS / SP</a:t>
+                      </a:r>
+                    </a:p>
+                  </a:txBody>
+                  <a:tcPr>
+                    <a:solidFill>
+                      <a:srgbClr val="FFFFFF"/>
+                    </a:solidFill>
+                  </a:tcPr>
+                </a:tc>
+                <a:tc>
+                  <a:txBody>
+                    <a:bodyPr/>
+                    <a:lstStyle/>
+                    <a:p>
+                      <a:pPr algn="l"/>
+                      <a:r>
+                        <a:rPr sz="1000" b="0">
+                          <a:solidFill>
+                            <a:srgbClr val="1D1B43"/>
+                          </a:solidFill>
+                          <a:latin typeface="Calibri"/>
+                        </a:rPr>
+                        <a:t>2</a:t>
+                      </a:r>
+                    </a:p>
+                  </a:txBody>
+                  <a:tcPr>
+                    <a:solidFill>
+                      <a:srgbClr val="FFFFFF"/>
+                    </a:solidFill>
+                  </a:tcPr>
+                </a:tc>
+                <a:tc>
+                  <a:txBody>
+                    <a:bodyPr/>
+                    <a:lstStyle/>
+                    <a:p>
+                      <a:pPr algn="l"/>
+                      <a:r>
+                        <a:rPr sz="1000" b="0">
+                          <a:solidFill>
+                            <a:srgbClr val="1D1B43"/>
+                          </a:solidFill>
+                          <a:latin typeface="Calibri"/>
+                        </a:rPr>
+                        <a:t>2</a:t>
                       </a:r>
                     </a:p>
                   </a:txBody>
@@ -9482,7 +10136,7 @@
                           </a:solidFill>
                           <a:latin typeface="Calibri"/>
                         </a:rPr>
-                        <a:t>ABC LAJEADO DISTRIBU - LAJEADO / RS</a:t>
+                        <a:t>ADERALDO GONCALVES D - BRASILIA / DF</a:t>
                       </a:r>
                     </a:p>
                   </a:txBody>
@@ -9505,7 +10159,7 @@
                           </a:solidFill>
                           <a:latin typeface="Calibri"/>
                         </a:rPr>
-                        <a:t>1</a:t>
+                        <a:t>2</a:t>
                       </a:r>
                     </a:p>
                   </a:txBody>
@@ -9528,7 +10182,7 @@
                           </a:solidFill>
                           <a:latin typeface="Calibri"/>
                         </a:rPr>
-                        <a:t>1</a:t>
+                        <a:t>2</a:t>
                       </a:r>
                     </a:p>
                   </a:txBody>
@@ -9645,7 +10299,7 @@
                           </a:solidFill>
                           <a:latin typeface="Calibri"/>
                         </a:rPr>
-                        <a:t>C TEIXEIRA E GALVAN - TERRA NOVA DO NORTE / MT</a:t>
+                        <a:t>BORDONALE MOVEIS E E - ORLANDIA / SP</a:t>
                       </a:r>
                     </a:p>
                   </a:txBody>
@@ -9691,6 +10345,29 @@
                           </a:solidFill>
                           <a:latin typeface="Calibri"/>
                         </a:rPr>
+                        <a:t>0</a:t>
+                      </a:r>
+                    </a:p>
+                  </a:txBody>
+                  <a:tcPr>
+                    <a:solidFill>
+                      <a:srgbClr val="FFFFFF"/>
+                    </a:solidFill>
+                  </a:tcPr>
+                </a:tc>
+                <a:tc>
+                  <a:txBody>
+                    <a:bodyPr/>
+                    <a:lstStyle/>
+                    <a:p>
+                      <a:pPr algn="l"/>
+                      <a:r>
+                        <a:rPr sz="1000" b="0">
+                          <a:solidFill>
+                            <a:srgbClr val="1D1B43"/>
+                          </a:solidFill>
+                          <a:latin typeface="Calibri"/>
+                        </a:rPr>
                         <a:t>1</a:t>
                       </a:r>
                     </a:p>
@@ -9714,53 +10391,30 @@
                           </a:solidFill>
                           <a:latin typeface="Calibri"/>
                         </a:rPr>
-                        <a:t>0</a:t>
-                      </a:r>
-                    </a:p>
-                  </a:txBody>
-                  <a:tcPr>
-                    <a:solidFill>
-                      <a:srgbClr val="FFFFFF"/>
-                    </a:solidFill>
-                  </a:tcPr>
-                </a:tc>
-                <a:tc>
-                  <a:txBody>
-                    <a:bodyPr/>
-                    <a:lstStyle/>
-                    <a:p>
-                      <a:pPr algn="l"/>
-                      <a:r>
-                        <a:rPr sz="1000" b="0">
-                          <a:solidFill>
-                            <a:srgbClr val="1D1B43"/>
-                          </a:solidFill>
-                          <a:latin typeface="Calibri"/>
-                        </a:rPr>
-                        <a:t>100.0%</a:t>
-                      </a:r>
-                    </a:p>
-                  </a:txBody>
-                  <a:tcPr>
-                    <a:solidFill>
-                      <a:srgbClr val="FFFFFF"/>
-                    </a:solidFill>
-                  </a:tcPr>
-                </a:tc>
-                <a:tc>
-                  <a:txBody>
-                    <a:bodyPr/>
-                    <a:lstStyle/>
-                    <a:p>
-                      <a:pPr algn="l"/>
-                      <a:r>
-                        <a:rPr sz="1000" b="0">
-                          <a:solidFill>
-                            <a:srgbClr val="1D1B43"/>
-                          </a:solidFill>
-                          <a:latin typeface="Calibri"/>
-                        </a:rPr>
-                        <a:t>Excelente</a:t>
+                        <a:t>0.0%</a:t>
+                      </a:r>
+                    </a:p>
+                  </a:txBody>
+                  <a:tcPr>
+                    <a:solidFill>
+                      <a:srgbClr val="FFFFFF"/>
+                    </a:solidFill>
+                  </a:tcPr>
+                </a:tc>
+                <a:tc>
+                  <a:txBody>
+                    <a:bodyPr/>
+                    <a:lstStyle/>
+                    <a:p>
+                      <a:pPr algn="l"/>
+                      <a:r>
+                        <a:rPr sz="1000" b="0">
+                          <a:solidFill>
+                            <a:srgbClr val="1D1B43"/>
+                          </a:solidFill>
+                          <a:latin typeface="Calibri"/>
+                        </a:rPr>
+                        <a:t>Atencao</a:t>
                       </a:r>
                     </a:p>
                   </a:txBody>
@@ -9808,7 +10462,7 @@
                           </a:solidFill>
                           <a:latin typeface="Calibri"/>
                         </a:rPr>
-                        <a:t>CAPITAL BOLSAS E ACE - SOROCABA / SP</a:t>
+                        <a:t>ABC LAJEADO DISTRIBU - LAJEADO / RS</a:t>
                       </a:r>
                     </a:p>
                   </a:txBody>
@@ -9971,7 +10625,7 @@
                           </a:solidFill>
                           <a:latin typeface="Calibri"/>
                         </a:rPr>
-                        <a:t>CAROLINE KOTSAN ME - CURITIBA / PR</a:t>
+                        <a:t>A A DE S FERREIRA LT - CONFRESA / MT</a:t>
                       </a:r>
                     </a:p>
                   </a:txBody>
@@ -10017,6 +10671,29 @@
                           </a:solidFill>
                           <a:latin typeface="Calibri"/>
                         </a:rPr>
+                        <a:t>0</a:t>
+                      </a:r>
+                    </a:p>
+                  </a:txBody>
+                  <a:tcPr>
+                    <a:solidFill>
+                      <a:srgbClr val="FFFFFF"/>
+                    </a:solidFill>
+                  </a:tcPr>
+                </a:tc>
+                <a:tc>
+                  <a:txBody>
+                    <a:bodyPr/>
+                    <a:lstStyle/>
+                    <a:p>
+                      <a:pPr algn="l"/>
+                      <a:r>
+                        <a:rPr sz="1000" b="0">
+                          <a:solidFill>
+                            <a:srgbClr val="1D1B43"/>
+                          </a:solidFill>
+                          <a:latin typeface="Calibri"/>
+                        </a:rPr>
                         <a:t>1</a:t>
                       </a:r>
                     </a:p>
@@ -10040,53 +10717,30 @@
                           </a:solidFill>
                           <a:latin typeface="Calibri"/>
                         </a:rPr>
-                        <a:t>0</a:t>
-                      </a:r>
-                    </a:p>
-                  </a:txBody>
-                  <a:tcPr>
-                    <a:solidFill>
-                      <a:srgbClr val="FFFFFF"/>
-                    </a:solidFill>
-                  </a:tcPr>
-                </a:tc>
-                <a:tc>
-                  <a:txBody>
-                    <a:bodyPr/>
-                    <a:lstStyle/>
-                    <a:p>
-                      <a:pPr algn="l"/>
-                      <a:r>
-                        <a:rPr sz="1000" b="0">
-                          <a:solidFill>
-                            <a:srgbClr val="1D1B43"/>
-                          </a:solidFill>
-                          <a:latin typeface="Calibri"/>
-                        </a:rPr>
-                        <a:t>100.0%</a:t>
-                      </a:r>
-                    </a:p>
-                  </a:txBody>
-                  <a:tcPr>
-                    <a:solidFill>
-                      <a:srgbClr val="FFFFFF"/>
-                    </a:solidFill>
-                  </a:tcPr>
-                </a:tc>
-                <a:tc>
-                  <a:txBody>
-                    <a:bodyPr/>
-                    <a:lstStyle/>
-                    <a:p>
-                      <a:pPr algn="l"/>
-                      <a:r>
-                        <a:rPr sz="1000" b="0">
-                          <a:solidFill>
-                            <a:srgbClr val="1D1B43"/>
-                          </a:solidFill>
-                          <a:latin typeface="Calibri"/>
-                        </a:rPr>
-                        <a:t>Excelente</a:t>
+                        <a:t>0.0%</a:t>
+                      </a:r>
+                    </a:p>
+                  </a:txBody>
+                  <a:tcPr>
+                    <a:solidFill>
+                      <a:srgbClr val="FFFFFF"/>
+                    </a:solidFill>
+                  </a:tcPr>
+                </a:tc>
+                <a:tc>
+                  <a:txBody>
+                    <a:bodyPr/>
+                    <a:lstStyle/>
+                    <a:p>
+                      <a:pPr algn="l"/>
+                      <a:r>
+                        <a:rPr sz="1000" b="0">
+                          <a:solidFill>
+                            <a:srgbClr val="1D1B43"/>
+                          </a:solidFill>
+                          <a:latin typeface="Calibri"/>
+                        </a:rPr>
+                        <a:t>Atencao</a:t>
                       </a:r>
                     </a:p>
                   </a:txBody>
@@ -10134,7 +10788,7 @@
                           </a:solidFill>
                           <a:latin typeface="Calibri"/>
                         </a:rPr>
-                        <a:t>ALESSANDRA DA SILVA - BARRA DO BUGRES / MT</a:t>
+                        <a:t>ALEX IMMIANOVSKI - BRUSQUE / SC</a:t>
                       </a:r>
                     </a:p>
                   </a:txBody>
